--- a/output/wordlabs-tion-3day.pptx
+++ b/output/wordlabs-tion-3day.pptx
@@ -4240,7 +4240,7 @@
                 <a:ea typeface="Calibri" pitchFamily="34" charset="-122"/>
                 <a:cs typeface="Calibri" pitchFamily="34" charset="-120"/>
               </a:rPr>
-              <a:t>"act, state, or result"</a:t>
+              <a:t>"act, process, or state"</a:t>
             </a:r>
             <a:endParaRPr lang="en-US" sz="2200" dirty="0"/>
           </a:p>
@@ -5288,7 +5288,7 @@
                 <a:ea typeface="Calibri" pitchFamily="34" charset="-122"/>
                 <a:cs typeface="Calibri" pitchFamily="34" charset="-120"/>
               </a:rPr>
-              <a:t>Word Labs  •  wordlabs.app  •  Suffix: '-tion' = act, state, or result</a:t>
+              <a:t>Word Labs  •  wordlabs.app  •  Suffix: '-tion' = act, process, or state</a:t>
             </a:r>
             <a:endParaRPr lang="en-US" sz="800" dirty="0"/>
           </a:p>
@@ -5928,7 +5928,7 @@
                 <a:ea typeface="Calibri" pitchFamily="34" charset="-122"/>
                 <a:cs typeface="Calibri" pitchFamily="34" charset="-120"/>
               </a:rPr>
-              <a:t>Word Labs  •  wordlabs.app  •  Suffix: '-tion' = act, state, or result</a:t>
+              <a:t>Word Labs  •  wordlabs.app  •  Suffix: '-tion' = act, process, or state</a:t>
             </a:r>
             <a:endParaRPr lang="en-US" sz="800" dirty="0"/>
           </a:p>
@@ -6057,7 +6057,7 @@
                 <a:ea typeface="Calibri" pitchFamily="34" charset="-122"/>
                 <a:cs typeface="Calibri" pitchFamily="34" charset="-120"/>
               </a:rPr>
-              <a:t>collection</a:t>
+              <a:t>invention</a:t>
             </a:r>
             <a:pPr algn="l" indent="0" marL="0">
               <a:buNone/>
@@ -6071,7 +6071,7 @@
                 <a:ea typeface="Calibri" pitchFamily="34" charset="-122"/>
                 <a:cs typeface="Calibri" pitchFamily="34" charset="-120"/>
               </a:rPr>
-              <a:t> of insects on display was a great </a:t>
+              <a:t> changed the </a:t>
             </a:r>
             <a:pPr algn="l" indent="0" marL="0">
               <a:buNone/>
@@ -6088,7 +6088,7 @@
                 <a:ea typeface="Calibri" pitchFamily="34" charset="-122"/>
                 <a:cs typeface="Calibri" pitchFamily="34" charset="-120"/>
               </a:rPr>
-              <a:t>attraction</a:t>
+              <a:t>direction</a:t>
             </a:r>
             <a:pPr algn="l" indent="0" marL="0">
               <a:buNone/>
@@ -6102,7 +6102,7 @@
                 <a:ea typeface="Calibri" pitchFamily="34" charset="-122"/>
                 <a:cs typeface="Calibri" pitchFamily="34" charset="-120"/>
               </a:rPr>
-              <a:t> at the school fair.</a:t>
+              <a:t> of modern science forever.</a:t>
             </a:r>
             <a:endParaRPr lang="en-US" sz="1800" dirty="0"/>
           </a:p>
@@ -6257,7 +6257,7 @@
                 <a:ea typeface="Trebuchet MS" pitchFamily="34" charset="-122"/>
                 <a:cs typeface="Trebuchet MS" pitchFamily="34" charset="-120"/>
               </a:rPr>
-              <a:t>collection</a:t>
+              <a:t>invention</a:t>
             </a:r>
             <a:endParaRPr lang="en-US" sz="1400" dirty="0"/>
           </a:p>
@@ -6385,7 +6385,7 @@
                 <a:ea typeface="Trebuchet MS" pitchFamily="34" charset="-122"/>
                 <a:cs typeface="Trebuchet MS" pitchFamily="34" charset="-120"/>
               </a:rPr>
-              <a:t>attraction</a:t>
+              <a:t>direction</a:t>
             </a:r>
             <a:endParaRPr lang="en-US" sz="1400" dirty="0"/>
           </a:p>
@@ -6716,7 +6716,7 @@
                 <a:ea typeface="Calibri" pitchFamily="34" charset="-122"/>
                 <a:cs typeface="Calibri" pitchFamily="34" charset="-120"/>
               </a:rPr>
-              <a:t>Word Labs  •  wordlabs.app  •  Suffix: '-tion' = act, state, or result</a:t>
+              <a:t>Word Labs  •  wordlabs.app  •  Suffix: '-tion' = act, process, or state</a:t>
             </a:r>
             <a:endParaRPr lang="en-US" sz="800" dirty="0"/>
           </a:p>
@@ -6855,7 +6855,7 @@
                 <a:ea typeface="Trebuchet MS" pitchFamily="34" charset="-122"/>
                 <a:cs typeface="Trebuchet MS" pitchFamily="34" charset="-120"/>
               </a:rPr>
-              <a:t>collection</a:t>
+              <a:t>invention</a:t>
             </a:r>
             <a:endParaRPr lang="en-US" sz="2800" dirty="0"/>
           </a:p>
@@ -7134,11 +7134,11 @@
         <p:spPr>
           <a:xfrm>
             <a:off x="365760" y="4096512"/>
-            <a:ext cx="1371600" cy="658368"/>
+            <a:ext cx="1371600" cy="804672"/>
           </a:xfrm>
           <a:prstGeom prst="rect">
             <a:avLst>
-              <a:gd name="adj" fmla="val 8333"/>
+              <a:gd name="adj" fmla="val 6818"/>
             </a:avLst>
           </a:prstGeom>
           <a:solidFill>
@@ -7161,7 +7161,7 @@
         <p:spPr>
           <a:xfrm>
             <a:off x="365760" y="4096512"/>
-            <a:ext cx="1371600" cy="658368"/>
+            <a:ext cx="1371600" cy="804672"/>
           </a:xfrm>
           <a:prstGeom prst="rect">
             <a:avLst/>
@@ -7200,11 +7200,11 @@
         <p:spPr>
           <a:xfrm>
             <a:off x="1874520" y="4096512"/>
-            <a:ext cx="6903720" cy="658368"/>
+            <a:ext cx="6903720" cy="804672"/>
           </a:xfrm>
           <a:prstGeom prst="rect">
             <a:avLst>
-              <a:gd name="adj" fmla="val 8333"/>
+              <a:gd name="adj" fmla="val 6818"/>
             </a:avLst>
           </a:prstGeom>
           <a:solidFill>
@@ -7227,7 +7227,7 @@
         <p:spPr>
           <a:xfrm>
             <a:off x="1874520" y="4096512"/>
-            <a:ext cx="6903720" cy="658368"/>
+            <a:ext cx="6903720" cy="804672"/>
           </a:xfrm>
           <a:prstGeom prst="rect">
             <a:avLst/>
@@ -7543,7 +7543,7 @@
                 <a:ea typeface="Calibri" pitchFamily="34" charset="-122"/>
                 <a:cs typeface="Calibri" pitchFamily="34" charset="-120"/>
               </a:rPr>
-              <a:t>Word Labs  •  wordlabs.app  •  Suffix: '-tion' = act, state, or result</a:t>
+              <a:t>Word Labs  •  wordlabs.app  •  Suffix: '-tion' = act, process, or state</a:t>
             </a:r>
             <a:endParaRPr lang="en-US" sz="800" dirty="0"/>
           </a:p>
@@ -7682,7 +7682,7 @@
                 <a:ea typeface="Trebuchet MS" pitchFamily="34" charset="-122"/>
                 <a:cs typeface="Trebuchet MS" pitchFamily="34" charset="-120"/>
               </a:rPr>
-              <a:t>collection</a:t>
+              <a:t>invention</a:t>
             </a:r>
             <a:endParaRPr lang="en-US" sz="2800" dirty="0"/>
           </a:p>
@@ -7821,7 +7821,7 @@
                 <a:ea typeface="Trebuchet MS" pitchFamily="34" charset="-122"/>
                 <a:cs typeface="Trebuchet MS" pitchFamily="34" charset="-120"/>
               </a:rPr>
-              <a:t>con</a:t>
+              <a:t>in</a:t>
             </a:r>
             <a:endParaRPr lang="en-US" sz="1300" dirty="0"/>
           </a:p>
@@ -7860,7 +7860,7 @@
                 <a:ea typeface="Calibri" pitchFamily="34" charset="-122"/>
                 <a:cs typeface="Calibri" pitchFamily="34" charset="-120"/>
               </a:rPr>
-              <a:t>together</a:t>
+              <a:t>into / upon</a:t>
             </a:r>
             <a:endParaRPr lang="en-US" sz="850" dirty="0"/>
           </a:p>
@@ -7868,46 +7868,7 @@
       </p:sp>
       <p:sp>
         <p:nvSpPr>
-          <p:cNvPr id="19" name="Text 17"/>
-          <p:cNvSpPr/>
-          <p:nvPr/>
-        </p:nvSpPr>
-        <p:spPr>
-          <a:xfrm>
-            <a:off x="2221992" y="2752344"/>
-            <a:ext cx="1828800" cy="182880"/>
-          </a:xfrm>
-          <a:prstGeom prst="rect">
-            <a:avLst/>
-          </a:prstGeom>
-          <a:noFill/>
-          <a:ln/>
-        </p:spPr>
-        <p:txBody>
-          <a:bodyPr wrap="square" lIns="0" tIns="0" rIns="0" bIns="0" rtlCol="0" anchor="t"/>
-          <a:lstStyle/>
-          <a:p>
-            <a:pPr algn="ctr" indent="0" marL="0">
-              <a:buNone/>
-            </a:pPr>
-            <a:r>
-              <a:rPr lang="en-US" sz="700" i="1" dirty="0">
-                <a:solidFill>
-                  <a:srgbClr val="94A3B8"/>
-                </a:solidFill>
-                <a:latin typeface="Calibri" pitchFamily="34" charset="0"/>
-                <a:ea typeface="Calibri" pitchFamily="34" charset="-122"/>
-                <a:cs typeface="Calibri" pitchFamily="34" charset="-120"/>
-              </a:rPr>
-              <a:t>con → col before 'l'</a:t>
-            </a:r>
-            <a:endParaRPr lang="en-US" sz="700" dirty="0"/>
-          </a:p>
-        </p:txBody>
-      </p:sp>
-      <p:sp>
-        <p:nvSpPr>
-          <p:cNvPr id="20" name="Shape 18"/>
+          <p:cNvPr id="19" name="Shape 17"/>
           <p:cNvSpPr/>
           <p:nvPr/>
         </p:nvSpPr>
@@ -7941,7 +7902,7 @@
       </p:sp>
       <p:sp>
         <p:nvSpPr>
-          <p:cNvPr id="21" name="Text 19"/>
+          <p:cNvPr id="20" name="Text 18"/>
           <p:cNvSpPr/>
           <p:nvPr/>
         </p:nvSpPr>
@@ -7972,7 +7933,7 @@
                 <a:ea typeface="Trebuchet MS" pitchFamily="34" charset="-122"/>
                 <a:cs typeface="Trebuchet MS" pitchFamily="34" charset="-120"/>
               </a:rPr>
-              <a:t>lect</a:t>
+              <a:t>vent</a:t>
             </a:r>
             <a:endParaRPr lang="en-US" sz="1300" dirty="0"/>
           </a:p>
@@ -7980,7 +7941,7 @@
       </p:sp>
       <p:sp>
         <p:nvSpPr>
-          <p:cNvPr id="22" name="Text 20"/>
+          <p:cNvPr id="21" name="Text 19"/>
           <p:cNvSpPr/>
           <p:nvPr/>
         </p:nvSpPr>
@@ -8011,7 +7972,7 @@
                 <a:ea typeface="Calibri" pitchFamily="34" charset="-122"/>
                 <a:cs typeface="Calibri" pitchFamily="34" charset="-120"/>
               </a:rPr>
-              <a:t>gather</a:t>
+              <a:t>come</a:t>
             </a:r>
             <a:endParaRPr lang="en-US" sz="850" dirty="0"/>
           </a:p>
@@ -8019,7 +7980,7 @@
       </p:sp>
       <p:sp>
         <p:nvSpPr>
-          <p:cNvPr id="23" name="Shape 21"/>
+          <p:cNvPr id="22" name="Shape 20"/>
           <p:cNvSpPr/>
           <p:nvPr/>
         </p:nvSpPr>
@@ -8034,11 +7995,11 @@
             </a:avLst>
           </a:prstGeom>
           <a:solidFill>
-            <a:srgbClr val="FCE7F3"/>
+            <a:srgbClr val="CCFBF1"/>
           </a:solidFill>
           <a:ln w="19050">
             <a:solidFill>
-              <a:srgbClr val="DB2777"/>
+              <a:srgbClr val="0D9488"/>
             </a:solidFill>
             <a:prstDash val="solid"/>
           </a:ln>
@@ -8053,7 +8014,7 @@
       </p:sp>
       <p:sp>
         <p:nvSpPr>
-          <p:cNvPr id="24" name="Text 22"/>
+          <p:cNvPr id="23" name="Text 21"/>
           <p:cNvSpPr/>
           <p:nvPr/>
         </p:nvSpPr>
@@ -8078,13 +8039,13 @@
             <a:r>
               <a:rPr lang="en-US" sz="1300" b="1" dirty="0">
                 <a:solidFill>
-                  <a:srgbClr val="9D174D"/>
+                  <a:srgbClr val="0F766E"/>
                 </a:solidFill>
                 <a:latin typeface="Trebuchet MS" pitchFamily="34" charset="0"/>
                 <a:ea typeface="Trebuchet MS" pitchFamily="34" charset="-122"/>
                 <a:cs typeface="Trebuchet MS" pitchFamily="34" charset="-120"/>
               </a:rPr>
-              <a:t>ion</a:t>
+              <a:t>tion</a:t>
             </a:r>
             <a:endParaRPr lang="en-US" sz="1300" dirty="0"/>
           </a:p>
@@ -8092,7 +8053,7 @@
       </p:sp>
       <p:sp>
         <p:nvSpPr>
-          <p:cNvPr id="25" name="Text 23"/>
+          <p:cNvPr id="24" name="Text 22"/>
           <p:cNvSpPr/>
           <p:nvPr/>
         </p:nvSpPr>
@@ -8123,7 +8084,7 @@
                 <a:ea typeface="Calibri" pitchFamily="34" charset="-122"/>
                 <a:cs typeface="Calibri" pitchFamily="34" charset="-120"/>
               </a:rPr>
-              <a:t>act or state of</a:t>
+              <a:t>act or process</a:t>
             </a:r>
             <a:endParaRPr lang="en-US" sz="850" dirty="0"/>
           </a:p>
@@ -8131,7 +8092,7 @@
       </p:sp>
       <p:sp>
         <p:nvSpPr>
-          <p:cNvPr id="26" name="Shape 24"/>
+          <p:cNvPr id="25" name="Shape 23"/>
           <p:cNvSpPr/>
           <p:nvPr/>
         </p:nvSpPr>
@@ -8158,7 +8119,7 @@
       </p:sp>
       <p:sp>
         <p:nvSpPr>
-          <p:cNvPr id="27" name="Text 25"/>
+          <p:cNvPr id="26" name="Text 24"/>
           <p:cNvSpPr/>
           <p:nvPr/>
         </p:nvSpPr>
@@ -8197,7 +8158,7 @@
       </p:sp>
       <p:sp>
         <p:nvSpPr>
-          <p:cNvPr id="28" name="Shape 26"/>
+          <p:cNvPr id="27" name="Shape 25"/>
           <p:cNvSpPr/>
           <p:nvPr/>
         </p:nvSpPr>
@@ -8224,7 +8185,7 @@
       </p:sp>
       <p:sp>
         <p:nvSpPr>
-          <p:cNvPr id="29" name="Text 27"/>
+          <p:cNvPr id="28" name="Text 26"/>
           <p:cNvSpPr/>
           <p:nvPr/>
         </p:nvSpPr>
@@ -8263,18 +8224,18 @@
       </p:sp>
       <p:sp>
         <p:nvSpPr>
-          <p:cNvPr id="30" name="Shape 28"/>
+          <p:cNvPr id="29" name="Shape 27"/>
           <p:cNvSpPr/>
           <p:nvPr/>
         </p:nvSpPr>
         <p:spPr>
           <a:xfrm>
             <a:off x="365760" y="4096512"/>
-            <a:ext cx="1371600" cy="658368"/>
+            <a:ext cx="1371600" cy="804672"/>
           </a:xfrm>
           <a:prstGeom prst="rect">
             <a:avLst>
-              <a:gd name="adj" fmla="val 8333"/>
+              <a:gd name="adj" fmla="val 6818"/>
             </a:avLst>
           </a:prstGeom>
           <a:solidFill>
@@ -8290,14 +8251,14 @@
       </p:sp>
       <p:sp>
         <p:nvSpPr>
-          <p:cNvPr id="31" name="Text 29"/>
+          <p:cNvPr id="30" name="Text 28"/>
           <p:cNvSpPr/>
           <p:nvPr/>
         </p:nvSpPr>
         <p:spPr>
           <a:xfrm>
             <a:off x="365760" y="4096512"/>
-            <a:ext cx="1371600" cy="658368"/>
+            <a:ext cx="1371600" cy="804672"/>
           </a:xfrm>
           <a:prstGeom prst="rect">
             <a:avLst/>
@@ -8329,18 +8290,18 @@
       </p:sp>
       <p:sp>
         <p:nvSpPr>
-          <p:cNvPr id="32" name="Shape 30"/>
+          <p:cNvPr id="31" name="Shape 29"/>
           <p:cNvSpPr/>
           <p:nvPr/>
         </p:nvSpPr>
         <p:spPr>
           <a:xfrm>
             <a:off x="1874520" y="4096512"/>
-            <a:ext cx="6903720" cy="658368"/>
+            <a:ext cx="6903720" cy="804672"/>
           </a:xfrm>
           <a:prstGeom prst="rect">
             <a:avLst>
-              <a:gd name="adj" fmla="val 8333"/>
+              <a:gd name="adj" fmla="val 6818"/>
             </a:avLst>
           </a:prstGeom>
           <a:solidFill>
@@ -8356,14 +8317,14 @@
       </p:sp>
       <p:sp>
         <p:nvSpPr>
-          <p:cNvPr id="33" name="Text 31"/>
+          <p:cNvPr id="32" name="Text 30"/>
           <p:cNvSpPr/>
           <p:nvPr/>
         </p:nvSpPr>
         <p:spPr>
           <a:xfrm>
             <a:off x="1874520" y="4096512"/>
-            <a:ext cx="6903720" cy="658368"/>
+            <a:ext cx="6903720" cy="804672"/>
           </a:xfrm>
           <a:prstGeom prst="rect">
             <a:avLst/>
@@ -8679,7 +8640,7 @@
                 <a:ea typeface="Calibri" pitchFamily="34" charset="-122"/>
                 <a:cs typeface="Calibri" pitchFamily="34" charset="-120"/>
               </a:rPr>
-              <a:t>Word Labs  •  wordlabs.app  •  Suffix: '-tion' = act, state, or result</a:t>
+              <a:t>Word Labs  •  wordlabs.app  •  Suffix: '-tion' = act, process, or state</a:t>
             </a:r>
             <a:endParaRPr lang="en-US" sz="800" dirty="0"/>
           </a:p>
@@ -8818,7 +8779,7 @@
                 <a:ea typeface="Trebuchet MS" pitchFamily="34" charset="-122"/>
                 <a:cs typeface="Trebuchet MS" pitchFamily="34" charset="-120"/>
               </a:rPr>
-              <a:t>collection</a:t>
+              <a:t>invention</a:t>
             </a:r>
             <a:endParaRPr lang="en-US" sz="2800" dirty="0"/>
           </a:p>
@@ -8957,7 +8918,7 @@
                 <a:ea typeface="Trebuchet MS" pitchFamily="34" charset="-122"/>
                 <a:cs typeface="Trebuchet MS" pitchFamily="34" charset="-120"/>
               </a:rPr>
-              <a:t>con</a:t>
+              <a:t>in</a:t>
             </a:r>
             <a:endParaRPr lang="en-US" sz="1300" dirty="0"/>
           </a:p>
@@ -8996,7 +8957,7 @@
                 <a:ea typeface="Calibri" pitchFamily="34" charset="-122"/>
                 <a:cs typeface="Calibri" pitchFamily="34" charset="-120"/>
               </a:rPr>
-              <a:t>together</a:t>
+              <a:t>into / upon</a:t>
             </a:r>
             <a:endParaRPr lang="en-US" sz="850" dirty="0"/>
           </a:p>
@@ -9004,46 +8965,7 @@
       </p:sp>
       <p:sp>
         <p:nvSpPr>
-          <p:cNvPr id="19" name="Text 17"/>
-          <p:cNvSpPr/>
-          <p:nvPr/>
-        </p:nvSpPr>
-        <p:spPr>
-          <a:xfrm>
-            <a:off x="2221992" y="2752344"/>
-            <a:ext cx="1828800" cy="182880"/>
-          </a:xfrm>
-          <a:prstGeom prst="rect">
-            <a:avLst/>
-          </a:prstGeom>
-          <a:noFill/>
-          <a:ln/>
-        </p:spPr>
-        <p:txBody>
-          <a:bodyPr wrap="square" lIns="0" tIns="0" rIns="0" bIns="0" rtlCol="0" anchor="t"/>
-          <a:lstStyle/>
-          <a:p>
-            <a:pPr algn="ctr" indent="0" marL="0">
-              <a:buNone/>
-            </a:pPr>
-            <a:r>
-              <a:rPr lang="en-US" sz="700" i="1" dirty="0">
-                <a:solidFill>
-                  <a:srgbClr val="94A3B8"/>
-                </a:solidFill>
-                <a:latin typeface="Calibri" pitchFamily="34" charset="0"/>
-                <a:ea typeface="Calibri" pitchFamily="34" charset="-122"/>
-                <a:cs typeface="Calibri" pitchFamily="34" charset="-120"/>
-              </a:rPr>
-              <a:t>con → col before 'l'</a:t>
-            </a:r>
-            <a:endParaRPr lang="en-US" sz="700" dirty="0"/>
-          </a:p>
-        </p:txBody>
-      </p:sp>
-      <p:sp>
-        <p:nvSpPr>
-          <p:cNvPr id="20" name="Shape 18"/>
+          <p:cNvPr id="19" name="Shape 17"/>
           <p:cNvSpPr/>
           <p:nvPr/>
         </p:nvSpPr>
@@ -9077,7 +8999,7 @@
       </p:sp>
       <p:sp>
         <p:nvSpPr>
-          <p:cNvPr id="21" name="Text 19"/>
+          <p:cNvPr id="20" name="Text 18"/>
           <p:cNvSpPr/>
           <p:nvPr/>
         </p:nvSpPr>
@@ -9108,7 +9030,7 @@
                 <a:ea typeface="Trebuchet MS" pitchFamily="34" charset="-122"/>
                 <a:cs typeface="Trebuchet MS" pitchFamily="34" charset="-120"/>
               </a:rPr>
-              <a:t>lect</a:t>
+              <a:t>vent</a:t>
             </a:r>
             <a:endParaRPr lang="en-US" sz="1300" dirty="0"/>
           </a:p>
@@ -9116,7 +9038,7 @@
       </p:sp>
       <p:sp>
         <p:nvSpPr>
-          <p:cNvPr id="22" name="Text 20"/>
+          <p:cNvPr id="21" name="Text 19"/>
           <p:cNvSpPr/>
           <p:nvPr/>
         </p:nvSpPr>
@@ -9147,7 +9069,7 @@
                 <a:ea typeface="Calibri" pitchFamily="34" charset="-122"/>
                 <a:cs typeface="Calibri" pitchFamily="34" charset="-120"/>
               </a:rPr>
-              <a:t>gather</a:t>
+              <a:t>come</a:t>
             </a:r>
             <a:endParaRPr lang="en-US" sz="850" dirty="0"/>
           </a:p>
@@ -9155,7 +9077,7 @@
       </p:sp>
       <p:sp>
         <p:nvSpPr>
-          <p:cNvPr id="23" name="Shape 21"/>
+          <p:cNvPr id="22" name="Shape 20"/>
           <p:cNvSpPr/>
           <p:nvPr/>
         </p:nvSpPr>
@@ -9170,11 +9092,11 @@
             </a:avLst>
           </a:prstGeom>
           <a:solidFill>
-            <a:srgbClr val="FCE7F3"/>
+            <a:srgbClr val="CCFBF1"/>
           </a:solidFill>
           <a:ln w="19050">
             <a:solidFill>
-              <a:srgbClr val="DB2777"/>
+              <a:srgbClr val="0D9488"/>
             </a:solidFill>
             <a:prstDash val="solid"/>
           </a:ln>
@@ -9189,7 +9111,7 @@
       </p:sp>
       <p:sp>
         <p:nvSpPr>
-          <p:cNvPr id="24" name="Text 22"/>
+          <p:cNvPr id="23" name="Text 21"/>
           <p:cNvSpPr/>
           <p:nvPr/>
         </p:nvSpPr>
@@ -9214,13 +9136,13 @@
             <a:r>
               <a:rPr lang="en-US" sz="1300" b="1" dirty="0">
                 <a:solidFill>
-                  <a:srgbClr val="9D174D"/>
+                  <a:srgbClr val="0F766E"/>
                 </a:solidFill>
                 <a:latin typeface="Trebuchet MS" pitchFamily="34" charset="0"/>
                 <a:ea typeface="Trebuchet MS" pitchFamily="34" charset="-122"/>
                 <a:cs typeface="Trebuchet MS" pitchFamily="34" charset="-120"/>
               </a:rPr>
-              <a:t>ion</a:t>
+              <a:t>tion</a:t>
             </a:r>
             <a:endParaRPr lang="en-US" sz="1300" dirty="0"/>
           </a:p>
@@ -9228,7 +9150,7 @@
       </p:sp>
       <p:sp>
         <p:nvSpPr>
-          <p:cNvPr id="25" name="Text 23"/>
+          <p:cNvPr id="24" name="Text 22"/>
           <p:cNvSpPr/>
           <p:nvPr/>
         </p:nvSpPr>
@@ -9259,7 +9181,7 @@
                 <a:ea typeface="Calibri" pitchFamily="34" charset="-122"/>
                 <a:cs typeface="Calibri" pitchFamily="34" charset="-120"/>
               </a:rPr>
-              <a:t>act or state of</a:t>
+              <a:t>act or process</a:t>
             </a:r>
             <a:endParaRPr lang="en-US" sz="850" dirty="0"/>
           </a:p>
@@ -9267,7 +9189,7 @@
       </p:sp>
       <p:sp>
         <p:nvSpPr>
-          <p:cNvPr id="26" name="Shape 24"/>
+          <p:cNvPr id="25" name="Shape 23"/>
           <p:cNvSpPr/>
           <p:nvPr/>
         </p:nvSpPr>
@@ -9294,7 +9216,7 @@
       </p:sp>
       <p:sp>
         <p:nvSpPr>
-          <p:cNvPr id="27" name="Text 25"/>
+          <p:cNvPr id="26" name="Text 24"/>
           <p:cNvSpPr/>
           <p:nvPr/>
         </p:nvSpPr>
@@ -9333,7 +9255,7 @@
       </p:sp>
       <p:sp>
         <p:nvSpPr>
-          <p:cNvPr id="28" name="Shape 26"/>
+          <p:cNvPr id="27" name="Shape 25"/>
           <p:cNvSpPr/>
           <p:nvPr/>
         </p:nvSpPr>
@@ -9360,7 +9282,7 @@
       </p:sp>
       <p:sp>
         <p:nvSpPr>
-          <p:cNvPr id="29" name="Shape 27"/>
+          <p:cNvPr id="28" name="Shape 26"/>
           <p:cNvSpPr/>
           <p:nvPr/>
         </p:nvSpPr>
@@ -9387,7 +9309,7 @@
       </p:sp>
       <p:sp>
         <p:nvSpPr>
-          <p:cNvPr id="30" name="Text 28"/>
+          <p:cNvPr id="29" name="Text 27"/>
           <p:cNvSpPr/>
           <p:nvPr/>
         </p:nvSpPr>
@@ -9418,7 +9340,7 @@
                 <a:ea typeface="Trebuchet MS" pitchFamily="34" charset="-122"/>
                 <a:cs typeface="Trebuchet MS" pitchFamily="34" charset="-120"/>
               </a:rPr>
-              <a:t>col</a:t>
+              <a:t>in</a:t>
             </a:r>
             <a:endParaRPr lang="en-US" sz="1400" dirty="0"/>
           </a:p>
@@ -9426,7 +9348,7 @@
       </p:sp>
       <p:sp>
         <p:nvSpPr>
-          <p:cNvPr id="31" name="Text 29"/>
+          <p:cNvPr id="30" name="Text 28"/>
           <p:cNvSpPr/>
           <p:nvPr/>
         </p:nvSpPr>
@@ -9465,7 +9387,7 @@
       </p:sp>
       <p:sp>
         <p:nvSpPr>
-          <p:cNvPr id="32" name="Shape 30"/>
+          <p:cNvPr id="31" name="Shape 29"/>
           <p:cNvSpPr/>
           <p:nvPr/>
         </p:nvSpPr>
@@ -9492,7 +9414,7 @@
       </p:sp>
       <p:sp>
         <p:nvSpPr>
-          <p:cNvPr id="33" name="Text 31"/>
+          <p:cNvPr id="32" name="Text 30"/>
           <p:cNvSpPr/>
           <p:nvPr/>
         </p:nvSpPr>
@@ -9523,7 +9445,7 @@
                 <a:ea typeface="Trebuchet MS" pitchFamily="34" charset="-122"/>
                 <a:cs typeface="Trebuchet MS" pitchFamily="34" charset="-120"/>
               </a:rPr>
-              <a:t>lec</a:t>
+              <a:t>ven</a:t>
             </a:r>
             <a:endParaRPr lang="en-US" sz="1400" dirty="0"/>
           </a:p>
@@ -9531,7 +9453,7 @@
       </p:sp>
       <p:sp>
         <p:nvSpPr>
-          <p:cNvPr id="34" name="Text 32"/>
+          <p:cNvPr id="33" name="Text 31"/>
           <p:cNvSpPr/>
           <p:nvPr/>
         </p:nvSpPr>
@@ -9570,7 +9492,7 @@
       </p:sp>
       <p:sp>
         <p:nvSpPr>
-          <p:cNvPr id="35" name="Shape 33"/>
+          <p:cNvPr id="34" name="Shape 32"/>
           <p:cNvSpPr/>
           <p:nvPr/>
         </p:nvSpPr>
@@ -9597,7 +9519,7 @@
       </p:sp>
       <p:sp>
         <p:nvSpPr>
-          <p:cNvPr id="36" name="Text 34"/>
+          <p:cNvPr id="35" name="Text 33"/>
           <p:cNvSpPr/>
           <p:nvPr/>
         </p:nvSpPr>
@@ -9636,18 +9558,18 @@
       </p:sp>
       <p:sp>
         <p:nvSpPr>
-          <p:cNvPr id="37" name="Shape 35"/>
+          <p:cNvPr id="36" name="Shape 34"/>
           <p:cNvSpPr/>
           <p:nvPr/>
         </p:nvSpPr>
         <p:spPr>
           <a:xfrm>
             <a:off x="365760" y="4096512"/>
-            <a:ext cx="1371600" cy="658368"/>
+            <a:ext cx="1371600" cy="804672"/>
           </a:xfrm>
           <a:prstGeom prst="rect">
             <a:avLst>
-              <a:gd name="adj" fmla="val 8333"/>
+              <a:gd name="adj" fmla="val 6818"/>
             </a:avLst>
           </a:prstGeom>
           <a:solidFill>
@@ -9663,14 +9585,14 @@
       </p:sp>
       <p:sp>
         <p:nvSpPr>
-          <p:cNvPr id="38" name="Text 36"/>
+          <p:cNvPr id="37" name="Text 35"/>
           <p:cNvSpPr/>
           <p:nvPr/>
         </p:nvSpPr>
         <p:spPr>
           <a:xfrm>
             <a:off x="365760" y="4096512"/>
-            <a:ext cx="1371600" cy="658368"/>
+            <a:ext cx="1371600" cy="804672"/>
           </a:xfrm>
           <a:prstGeom prst="rect">
             <a:avLst/>
@@ -9702,18 +9624,18 @@
       </p:sp>
       <p:sp>
         <p:nvSpPr>
-          <p:cNvPr id="39" name="Shape 37"/>
+          <p:cNvPr id="38" name="Shape 36"/>
           <p:cNvSpPr/>
           <p:nvPr/>
         </p:nvSpPr>
         <p:spPr>
           <a:xfrm>
             <a:off x="1874520" y="4096512"/>
-            <a:ext cx="6903720" cy="658368"/>
+            <a:ext cx="6903720" cy="804672"/>
           </a:xfrm>
           <a:prstGeom prst="rect">
             <a:avLst>
-              <a:gd name="adj" fmla="val 8333"/>
+              <a:gd name="adj" fmla="val 6818"/>
             </a:avLst>
           </a:prstGeom>
           <a:solidFill>
@@ -9729,14 +9651,14 @@
       </p:sp>
       <p:sp>
         <p:nvSpPr>
-          <p:cNvPr id="40" name="Text 38"/>
+          <p:cNvPr id="39" name="Text 37"/>
           <p:cNvSpPr/>
           <p:nvPr/>
         </p:nvSpPr>
         <p:spPr>
           <a:xfrm>
             <a:off x="1874520" y="4096512"/>
-            <a:ext cx="6903720" cy="658368"/>
+            <a:ext cx="6903720" cy="804672"/>
           </a:xfrm>
           <a:prstGeom prst="rect">
             <a:avLst/>
@@ -10052,7 +9974,7 @@
                 <a:ea typeface="Calibri" pitchFamily="34" charset="-122"/>
                 <a:cs typeface="Calibri" pitchFamily="34" charset="-120"/>
               </a:rPr>
-              <a:t>Word Labs  •  wordlabs.app  •  Suffix: '-tion' = act, state, or result</a:t>
+              <a:t>Word Labs  •  wordlabs.app  •  Suffix: '-tion' = act, process, or state</a:t>
             </a:r>
             <a:endParaRPr lang="en-US" sz="800" dirty="0"/>
           </a:p>
@@ -10191,7 +10113,7 @@
                 <a:ea typeface="Trebuchet MS" pitchFamily="34" charset="-122"/>
                 <a:cs typeface="Trebuchet MS" pitchFamily="34" charset="-120"/>
               </a:rPr>
-              <a:t>collection</a:t>
+              <a:t>invention</a:t>
             </a:r>
             <a:endParaRPr lang="en-US" sz="2800" dirty="0"/>
           </a:p>
@@ -10330,7 +10252,7 @@
                 <a:ea typeface="Trebuchet MS" pitchFamily="34" charset="-122"/>
                 <a:cs typeface="Trebuchet MS" pitchFamily="34" charset="-120"/>
               </a:rPr>
-              <a:t>con</a:t>
+              <a:t>in</a:t>
             </a:r>
             <a:endParaRPr lang="en-US" sz="1300" dirty="0"/>
           </a:p>
@@ -10369,7 +10291,7 @@
                 <a:ea typeface="Calibri" pitchFamily="34" charset="-122"/>
                 <a:cs typeface="Calibri" pitchFamily="34" charset="-120"/>
               </a:rPr>
-              <a:t>together</a:t>
+              <a:t>into / upon</a:t>
             </a:r>
             <a:endParaRPr lang="en-US" sz="850" dirty="0"/>
           </a:p>
@@ -10377,46 +10299,7 @@
       </p:sp>
       <p:sp>
         <p:nvSpPr>
-          <p:cNvPr id="19" name="Text 17"/>
-          <p:cNvSpPr/>
-          <p:nvPr/>
-        </p:nvSpPr>
-        <p:spPr>
-          <a:xfrm>
-            <a:off x="2221992" y="2752344"/>
-            <a:ext cx="1828800" cy="182880"/>
-          </a:xfrm>
-          <a:prstGeom prst="rect">
-            <a:avLst/>
-          </a:prstGeom>
-          <a:noFill/>
-          <a:ln/>
-        </p:spPr>
-        <p:txBody>
-          <a:bodyPr wrap="square" lIns="0" tIns="0" rIns="0" bIns="0" rtlCol="0" anchor="t"/>
-          <a:lstStyle/>
-          <a:p>
-            <a:pPr algn="ctr" indent="0" marL="0">
-              <a:buNone/>
-            </a:pPr>
-            <a:r>
-              <a:rPr lang="en-US" sz="700" i="1" dirty="0">
-                <a:solidFill>
-                  <a:srgbClr val="94A3B8"/>
-                </a:solidFill>
-                <a:latin typeface="Calibri" pitchFamily="34" charset="0"/>
-                <a:ea typeface="Calibri" pitchFamily="34" charset="-122"/>
-                <a:cs typeface="Calibri" pitchFamily="34" charset="-120"/>
-              </a:rPr>
-              <a:t>con → col before 'l'</a:t>
-            </a:r>
-            <a:endParaRPr lang="en-US" sz="700" dirty="0"/>
-          </a:p>
-        </p:txBody>
-      </p:sp>
-      <p:sp>
-        <p:nvSpPr>
-          <p:cNvPr id="20" name="Shape 18"/>
+          <p:cNvPr id="19" name="Shape 17"/>
           <p:cNvSpPr/>
           <p:nvPr/>
         </p:nvSpPr>
@@ -10450,7 +10333,7 @@
       </p:sp>
       <p:sp>
         <p:nvSpPr>
-          <p:cNvPr id="21" name="Text 19"/>
+          <p:cNvPr id="20" name="Text 18"/>
           <p:cNvSpPr/>
           <p:nvPr/>
         </p:nvSpPr>
@@ -10481,7 +10364,7 @@
                 <a:ea typeface="Trebuchet MS" pitchFamily="34" charset="-122"/>
                 <a:cs typeface="Trebuchet MS" pitchFamily="34" charset="-120"/>
               </a:rPr>
-              <a:t>lect</a:t>
+              <a:t>vent</a:t>
             </a:r>
             <a:endParaRPr lang="en-US" sz="1300" dirty="0"/>
           </a:p>
@@ -10489,7 +10372,7 @@
       </p:sp>
       <p:sp>
         <p:nvSpPr>
-          <p:cNvPr id="22" name="Text 20"/>
+          <p:cNvPr id="21" name="Text 19"/>
           <p:cNvSpPr/>
           <p:nvPr/>
         </p:nvSpPr>
@@ -10520,7 +10403,7 @@
                 <a:ea typeface="Calibri" pitchFamily="34" charset="-122"/>
                 <a:cs typeface="Calibri" pitchFamily="34" charset="-120"/>
               </a:rPr>
-              <a:t>gather</a:t>
+              <a:t>come</a:t>
             </a:r>
             <a:endParaRPr lang="en-US" sz="850" dirty="0"/>
           </a:p>
@@ -10528,7 +10411,7 @@
       </p:sp>
       <p:sp>
         <p:nvSpPr>
-          <p:cNvPr id="23" name="Shape 21"/>
+          <p:cNvPr id="22" name="Shape 20"/>
           <p:cNvSpPr/>
           <p:nvPr/>
         </p:nvSpPr>
@@ -10543,11 +10426,11 @@
             </a:avLst>
           </a:prstGeom>
           <a:solidFill>
-            <a:srgbClr val="FCE7F3"/>
+            <a:srgbClr val="CCFBF1"/>
           </a:solidFill>
           <a:ln w="19050">
             <a:solidFill>
-              <a:srgbClr val="DB2777"/>
+              <a:srgbClr val="0D9488"/>
             </a:solidFill>
             <a:prstDash val="solid"/>
           </a:ln>
@@ -10562,7 +10445,7 @@
       </p:sp>
       <p:sp>
         <p:nvSpPr>
-          <p:cNvPr id="24" name="Text 22"/>
+          <p:cNvPr id="23" name="Text 21"/>
           <p:cNvSpPr/>
           <p:nvPr/>
         </p:nvSpPr>
@@ -10587,13 +10470,13 @@
             <a:r>
               <a:rPr lang="en-US" sz="1300" b="1" dirty="0">
                 <a:solidFill>
-                  <a:srgbClr val="9D174D"/>
+                  <a:srgbClr val="0F766E"/>
                 </a:solidFill>
                 <a:latin typeface="Trebuchet MS" pitchFamily="34" charset="0"/>
                 <a:ea typeface="Trebuchet MS" pitchFamily="34" charset="-122"/>
                 <a:cs typeface="Trebuchet MS" pitchFamily="34" charset="-120"/>
               </a:rPr>
-              <a:t>ion</a:t>
+              <a:t>tion</a:t>
             </a:r>
             <a:endParaRPr lang="en-US" sz="1300" dirty="0"/>
           </a:p>
@@ -10601,7 +10484,7 @@
       </p:sp>
       <p:sp>
         <p:nvSpPr>
-          <p:cNvPr id="25" name="Text 23"/>
+          <p:cNvPr id="24" name="Text 22"/>
           <p:cNvSpPr/>
           <p:nvPr/>
         </p:nvSpPr>
@@ -10632,7 +10515,7 @@
                 <a:ea typeface="Calibri" pitchFamily="34" charset="-122"/>
                 <a:cs typeface="Calibri" pitchFamily="34" charset="-120"/>
               </a:rPr>
-              <a:t>act or state of</a:t>
+              <a:t>act or process</a:t>
             </a:r>
             <a:endParaRPr lang="en-US" sz="850" dirty="0"/>
           </a:p>
@@ -10640,7 +10523,7 @@
       </p:sp>
       <p:sp>
         <p:nvSpPr>
-          <p:cNvPr id="26" name="Shape 24"/>
+          <p:cNvPr id="25" name="Shape 23"/>
           <p:cNvSpPr/>
           <p:nvPr/>
         </p:nvSpPr>
@@ -10667,7 +10550,7 @@
       </p:sp>
       <p:sp>
         <p:nvSpPr>
-          <p:cNvPr id="27" name="Text 25"/>
+          <p:cNvPr id="26" name="Text 24"/>
           <p:cNvSpPr/>
           <p:nvPr/>
         </p:nvSpPr>
@@ -10706,7 +10589,7 @@
       </p:sp>
       <p:sp>
         <p:nvSpPr>
-          <p:cNvPr id="28" name="Shape 26"/>
+          <p:cNvPr id="27" name="Shape 25"/>
           <p:cNvSpPr/>
           <p:nvPr/>
         </p:nvSpPr>
@@ -10733,7 +10616,7 @@
       </p:sp>
       <p:sp>
         <p:nvSpPr>
-          <p:cNvPr id="29" name="Shape 27"/>
+          <p:cNvPr id="28" name="Shape 26"/>
           <p:cNvSpPr/>
           <p:nvPr/>
         </p:nvSpPr>
@@ -10760,7 +10643,7 @@
       </p:sp>
       <p:sp>
         <p:nvSpPr>
-          <p:cNvPr id="30" name="Text 28"/>
+          <p:cNvPr id="29" name="Text 27"/>
           <p:cNvSpPr/>
           <p:nvPr/>
         </p:nvSpPr>
@@ -10791,7 +10674,7 @@
                 <a:ea typeface="Trebuchet MS" pitchFamily="34" charset="-122"/>
                 <a:cs typeface="Trebuchet MS" pitchFamily="34" charset="-120"/>
               </a:rPr>
-              <a:t>col</a:t>
+              <a:t>in</a:t>
             </a:r>
             <a:endParaRPr lang="en-US" sz="1400" dirty="0"/>
           </a:p>
@@ -10799,7 +10682,7 @@
       </p:sp>
       <p:sp>
         <p:nvSpPr>
-          <p:cNvPr id="31" name="Text 29"/>
+          <p:cNvPr id="30" name="Text 28"/>
           <p:cNvSpPr/>
           <p:nvPr/>
         </p:nvSpPr>
@@ -10838,7 +10721,7 @@
       </p:sp>
       <p:sp>
         <p:nvSpPr>
-          <p:cNvPr id="32" name="Shape 30"/>
+          <p:cNvPr id="31" name="Shape 29"/>
           <p:cNvSpPr/>
           <p:nvPr/>
         </p:nvSpPr>
@@ -10865,7 +10748,7 @@
       </p:sp>
       <p:sp>
         <p:nvSpPr>
-          <p:cNvPr id="33" name="Text 31"/>
+          <p:cNvPr id="32" name="Text 30"/>
           <p:cNvSpPr/>
           <p:nvPr/>
         </p:nvSpPr>
@@ -10896,7 +10779,7 @@
                 <a:ea typeface="Trebuchet MS" pitchFamily="34" charset="-122"/>
                 <a:cs typeface="Trebuchet MS" pitchFamily="34" charset="-120"/>
               </a:rPr>
-              <a:t>lec</a:t>
+              <a:t>ven</a:t>
             </a:r>
             <a:endParaRPr lang="en-US" sz="1400" dirty="0"/>
           </a:p>
@@ -10904,7 +10787,7 @@
       </p:sp>
       <p:sp>
         <p:nvSpPr>
-          <p:cNvPr id="34" name="Text 32"/>
+          <p:cNvPr id="33" name="Text 31"/>
           <p:cNvSpPr/>
           <p:nvPr/>
         </p:nvSpPr>
@@ -10943,7 +10826,7 @@
       </p:sp>
       <p:sp>
         <p:nvSpPr>
-          <p:cNvPr id="35" name="Shape 33"/>
+          <p:cNvPr id="34" name="Shape 32"/>
           <p:cNvSpPr/>
           <p:nvPr/>
         </p:nvSpPr>
@@ -10970,7 +10853,7 @@
       </p:sp>
       <p:sp>
         <p:nvSpPr>
-          <p:cNvPr id="36" name="Text 34"/>
+          <p:cNvPr id="35" name="Text 33"/>
           <p:cNvSpPr/>
           <p:nvPr/>
         </p:nvSpPr>
@@ -11009,18 +10892,18 @@
       </p:sp>
       <p:sp>
         <p:nvSpPr>
-          <p:cNvPr id="37" name="Shape 35"/>
+          <p:cNvPr id="36" name="Shape 34"/>
           <p:cNvSpPr/>
           <p:nvPr/>
         </p:nvSpPr>
         <p:spPr>
           <a:xfrm>
             <a:off x="365760" y="4096512"/>
-            <a:ext cx="1371600" cy="658368"/>
+            <a:ext cx="1371600" cy="804672"/>
           </a:xfrm>
           <a:prstGeom prst="rect">
             <a:avLst>
-              <a:gd name="adj" fmla="val 8333"/>
+              <a:gd name="adj" fmla="val 6818"/>
             </a:avLst>
           </a:prstGeom>
           <a:solidFill>
@@ -11036,14 +10919,14 @@
       </p:sp>
       <p:sp>
         <p:nvSpPr>
-          <p:cNvPr id="38" name="Text 36"/>
+          <p:cNvPr id="37" name="Text 35"/>
           <p:cNvSpPr/>
           <p:nvPr/>
         </p:nvSpPr>
         <p:spPr>
           <a:xfrm>
             <a:off x="365760" y="4096512"/>
-            <a:ext cx="1371600" cy="658368"/>
+            <a:ext cx="1371600" cy="804672"/>
           </a:xfrm>
           <a:prstGeom prst="rect">
             <a:avLst/>
@@ -11075,22 +10958,49 @@
       </p:sp>
       <p:sp>
         <p:nvSpPr>
+          <p:cNvPr id="38" name="Shape 36"/>
+          <p:cNvSpPr/>
+          <p:nvPr/>
+        </p:nvSpPr>
+        <p:spPr>
+          <a:xfrm>
+            <a:off x="1874520" y="4096512"/>
+            <a:ext cx="6903720" cy="804672"/>
+          </a:xfrm>
+          <a:prstGeom prst="rect">
+            <a:avLst>
+              <a:gd name="adj" fmla="val 6818"/>
+            </a:avLst>
+          </a:prstGeom>
+          <a:solidFill>
+            <a:srgbClr val="FCE7F3"/>
+          </a:solidFill>
+          <a:ln w="12700">
+            <a:solidFill>
+              <a:srgbClr val="DB2777"/>
+            </a:solidFill>
+            <a:prstDash val="solid"/>
+          </a:ln>
+        </p:spPr>
+      </p:sp>
+      <p:sp>
+        <p:nvSpPr>
           <p:cNvPr id="39" name="Shape 37"/>
           <p:cNvSpPr/>
           <p:nvPr/>
         </p:nvSpPr>
         <p:spPr>
           <a:xfrm>
-            <a:off x="1874520" y="4096512"/>
-            <a:ext cx="6903720" cy="658368"/>
+            <a:off x="2023872" y="4169664"/>
+            <a:ext cx="685800" cy="384048"/>
           </a:xfrm>
           <a:prstGeom prst="rect">
             <a:avLst>
-              <a:gd name="adj" fmla="val 8333"/>
+              <a:gd name="adj" fmla="val 9524"/>
             </a:avLst>
           </a:prstGeom>
           <a:solidFill>
-            <a:srgbClr val="FCE7F3"/>
+            <a:srgbClr val="FFFFFF"/>
           </a:solidFill>
           <a:ln w="12700">
             <a:solidFill>
@@ -11102,41 +11012,14 @@
       </p:sp>
       <p:sp>
         <p:nvSpPr>
-          <p:cNvPr id="40" name="Shape 38"/>
-          <p:cNvSpPr/>
-          <p:nvPr/>
-        </p:nvSpPr>
-        <p:spPr>
-          <a:xfrm>
-            <a:off x="2023872" y="4187952"/>
-            <a:ext cx="685800" cy="475488"/>
-          </a:xfrm>
-          <a:prstGeom prst="rect">
-            <a:avLst>
-              <a:gd name="adj" fmla="val 7692"/>
-            </a:avLst>
-          </a:prstGeom>
-          <a:solidFill>
-            <a:srgbClr val="FFFFFF"/>
-          </a:solidFill>
-          <a:ln w="12700">
-            <a:solidFill>
-              <a:srgbClr val="DB2777"/>
-            </a:solidFill>
-            <a:prstDash val="solid"/>
-          </a:ln>
-        </p:spPr>
-      </p:sp>
-      <p:sp>
-        <p:nvSpPr>
-          <p:cNvPr id="41" name="Text 39"/>
-          <p:cNvSpPr/>
-          <p:nvPr/>
-        </p:nvSpPr>
-        <p:spPr>
-          <a:xfrm>
-            <a:off x="2023872" y="4187952"/>
-            <a:ext cx="685800" cy="475488"/>
+          <p:cNvPr id="40" name="Text 38"/>
+          <p:cNvSpPr/>
+          <p:nvPr/>
+        </p:nvSpPr>
+        <p:spPr>
+          <a:xfrm>
+            <a:off x="2023872" y="4169664"/>
+            <a:ext cx="685800" cy="384048"/>
           </a:xfrm>
           <a:prstGeom prst="rect">
             <a:avLst/>
@@ -11160,7 +11043,7 @@
                 <a:ea typeface="Trebuchet MS" pitchFamily="34" charset="-122"/>
                 <a:cs typeface="Trebuchet MS" pitchFamily="34" charset="-120"/>
               </a:rPr>
-              <a:t>c</a:t>
+              <a:t>i</a:t>
             </a:r>
             <a:endParaRPr lang="en-US" sz="900" dirty="0"/>
           </a:p>
@@ -11168,18 +11051,18 @@
       </p:sp>
       <p:sp>
         <p:nvSpPr>
-          <p:cNvPr id="42" name="Shape 40"/>
-          <p:cNvSpPr/>
-          <p:nvPr/>
-        </p:nvSpPr>
-        <p:spPr>
-          <a:xfrm>
-            <a:off x="2831592" y="4187952"/>
-            <a:ext cx="685800" cy="475488"/>
+          <p:cNvPr id="41" name="Shape 39"/>
+          <p:cNvSpPr/>
+          <p:nvPr/>
+        </p:nvSpPr>
+        <p:spPr>
+          <a:xfrm>
+            <a:off x="2831592" y="4169664"/>
+            <a:ext cx="685800" cy="384048"/>
           </a:xfrm>
           <a:prstGeom prst="rect">
             <a:avLst>
-              <a:gd name="adj" fmla="val 7692"/>
+              <a:gd name="adj" fmla="val 9524"/>
             </a:avLst>
           </a:prstGeom>
           <a:solidFill>
@@ -11195,14 +11078,14 @@
       </p:sp>
       <p:sp>
         <p:nvSpPr>
-          <p:cNvPr id="43" name="Text 41"/>
-          <p:cNvSpPr/>
-          <p:nvPr/>
-        </p:nvSpPr>
-        <p:spPr>
-          <a:xfrm>
-            <a:off x="2831592" y="4187952"/>
-            <a:ext cx="685800" cy="475488"/>
+          <p:cNvPr id="42" name="Text 40"/>
+          <p:cNvSpPr/>
+          <p:nvPr/>
+        </p:nvSpPr>
+        <p:spPr>
+          <a:xfrm>
+            <a:off x="2831592" y="4169664"/>
+            <a:ext cx="685800" cy="384048"/>
           </a:xfrm>
           <a:prstGeom prst="rect">
             <a:avLst/>
@@ -11226,7 +11109,7 @@
                 <a:ea typeface="Trebuchet MS" pitchFamily="34" charset="-122"/>
                 <a:cs typeface="Trebuchet MS" pitchFamily="34" charset="-120"/>
               </a:rPr>
-              <a:t>o</a:t>
+              <a:t>n</a:t>
             </a:r>
             <a:endParaRPr lang="en-US" sz="900" dirty="0"/>
           </a:p>
@@ -11234,18 +11117,18 @@
       </p:sp>
       <p:sp>
         <p:nvSpPr>
-          <p:cNvPr id="44" name="Shape 42"/>
-          <p:cNvSpPr/>
-          <p:nvPr/>
-        </p:nvSpPr>
-        <p:spPr>
-          <a:xfrm>
-            <a:off x="3639312" y="4187952"/>
-            <a:ext cx="685800" cy="475488"/>
+          <p:cNvPr id="43" name="Shape 41"/>
+          <p:cNvSpPr/>
+          <p:nvPr/>
+        </p:nvSpPr>
+        <p:spPr>
+          <a:xfrm>
+            <a:off x="3639312" y="4169664"/>
+            <a:ext cx="685800" cy="384048"/>
           </a:xfrm>
           <a:prstGeom prst="rect">
             <a:avLst>
-              <a:gd name="adj" fmla="val 7692"/>
+              <a:gd name="adj" fmla="val 9524"/>
             </a:avLst>
           </a:prstGeom>
           <a:solidFill>
@@ -11261,14 +11144,14 @@
       </p:sp>
       <p:sp>
         <p:nvSpPr>
-          <p:cNvPr id="45" name="Text 43"/>
-          <p:cNvSpPr/>
-          <p:nvPr/>
-        </p:nvSpPr>
-        <p:spPr>
-          <a:xfrm>
-            <a:off x="3639312" y="4187952"/>
-            <a:ext cx="685800" cy="475488"/>
+          <p:cNvPr id="44" name="Text 42"/>
+          <p:cNvSpPr/>
+          <p:nvPr/>
+        </p:nvSpPr>
+        <p:spPr>
+          <a:xfrm>
+            <a:off x="3639312" y="4169664"/>
+            <a:ext cx="685800" cy="384048"/>
           </a:xfrm>
           <a:prstGeom prst="rect">
             <a:avLst/>
@@ -11292,7 +11175,7 @@
                 <a:ea typeface="Trebuchet MS" pitchFamily="34" charset="-122"/>
                 <a:cs typeface="Trebuchet MS" pitchFamily="34" charset="-120"/>
               </a:rPr>
-              <a:t>ll</a:t>
+              <a:t>v</a:t>
             </a:r>
             <a:endParaRPr lang="en-US" sz="900" dirty="0"/>
           </a:p>
@@ -11300,18 +11183,18 @@
       </p:sp>
       <p:sp>
         <p:nvSpPr>
-          <p:cNvPr id="46" name="Shape 44"/>
-          <p:cNvSpPr/>
-          <p:nvPr/>
-        </p:nvSpPr>
-        <p:spPr>
-          <a:xfrm>
-            <a:off x="4447032" y="4187952"/>
-            <a:ext cx="685800" cy="475488"/>
+          <p:cNvPr id="45" name="Shape 43"/>
+          <p:cNvSpPr/>
+          <p:nvPr/>
+        </p:nvSpPr>
+        <p:spPr>
+          <a:xfrm>
+            <a:off x="4447032" y="4169664"/>
+            <a:ext cx="685800" cy="384048"/>
           </a:xfrm>
           <a:prstGeom prst="rect">
             <a:avLst>
-              <a:gd name="adj" fmla="val 7692"/>
+              <a:gd name="adj" fmla="val 9524"/>
             </a:avLst>
           </a:prstGeom>
           <a:solidFill>
@@ -11327,14 +11210,14 @@
       </p:sp>
       <p:sp>
         <p:nvSpPr>
-          <p:cNvPr id="47" name="Text 45"/>
-          <p:cNvSpPr/>
-          <p:nvPr/>
-        </p:nvSpPr>
-        <p:spPr>
-          <a:xfrm>
-            <a:off x="4447032" y="4187952"/>
-            <a:ext cx="685800" cy="475488"/>
+          <p:cNvPr id="46" name="Text 44"/>
+          <p:cNvSpPr/>
+          <p:nvPr/>
+        </p:nvSpPr>
+        <p:spPr>
+          <a:xfrm>
+            <a:off x="4447032" y="4169664"/>
+            <a:ext cx="685800" cy="384048"/>
           </a:xfrm>
           <a:prstGeom prst="rect">
             <a:avLst/>
@@ -11366,18 +11249,18 @@
       </p:sp>
       <p:sp>
         <p:nvSpPr>
-          <p:cNvPr id="48" name="Shape 46"/>
-          <p:cNvSpPr/>
-          <p:nvPr/>
-        </p:nvSpPr>
-        <p:spPr>
-          <a:xfrm>
-            <a:off x="5254752" y="4187952"/>
-            <a:ext cx="685800" cy="475488"/>
+          <p:cNvPr id="47" name="Shape 45"/>
+          <p:cNvSpPr/>
+          <p:nvPr/>
+        </p:nvSpPr>
+        <p:spPr>
+          <a:xfrm>
+            <a:off x="5254752" y="4169664"/>
+            <a:ext cx="685800" cy="384048"/>
           </a:xfrm>
           <a:prstGeom prst="rect">
             <a:avLst>
-              <a:gd name="adj" fmla="val 7692"/>
+              <a:gd name="adj" fmla="val 9524"/>
             </a:avLst>
           </a:prstGeom>
           <a:solidFill>
@@ -11393,14 +11276,14 @@
       </p:sp>
       <p:sp>
         <p:nvSpPr>
-          <p:cNvPr id="49" name="Text 47"/>
-          <p:cNvSpPr/>
-          <p:nvPr/>
-        </p:nvSpPr>
-        <p:spPr>
-          <a:xfrm>
-            <a:off x="5254752" y="4187952"/>
-            <a:ext cx="685800" cy="475488"/>
+          <p:cNvPr id="48" name="Text 46"/>
+          <p:cNvSpPr/>
+          <p:nvPr/>
+        </p:nvSpPr>
+        <p:spPr>
+          <a:xfrm>
+            <a:off x="5254752" y="4169664"/>
+            <a:ext cx="685800" cy="384048"/>
           </a:xfrm>
           <a:prstGeom prst="rect">
             <a:avLst/>
@@ -11424,7 +11307,7 @@
                 <a:ea typeface="Trebuchet MS" pitchFamily="34" charset="-122"/>
                 <a:cs typeface="Trebuchet MS" pitchFamily="34" charset="-120"/>
               </a:rPr>
-              <a:t>c</a:t>
+              <a:t>n</a:t>
             </a:r>
             <a:endParaRPr lang="en-US" sz="900" dirty="0"/>
           </a:p>
@@ -11432,18 +11315,18 @@
       </p:sp>
       <p:sp>
         <p:nvSpPr>
-          <p:cNvPr id="50" name="Shape 48"/>
-          <p:cNvSpPr/>
-          <p:nvPr/>
-        </p:nvSpPr>
-        <p:spPr>
-          <a:xfrm>
-            <a:off x="6062472" y="4187952"/>
-            <a:ext cx="685800" cy="475488"/>
+          <p:cNvPr id="49" name="Shape 47"/>
+          <p:cNvSpPr/>
+          <p:nvPr/>
+        </p:nvSpPr>
+        <p:spPr>
+          <a:xfrm>
+            <a:off x="6062472" y="4169664"/>
+            <a:ext cx="685800" cy="384048"/>
           </a:xfrm>
           <a:prstGeom prst="rect">
             <a:avLst>
-              <a:gd name="adj" fmla="val 7692"/>
+              <a:gd name="adj" fmla="val 9524"/>
             </a:avLst>
           </a:prstGeom>
           <a:solidFill>
@@ -11459,14 +11342,14 @@
       </p:sp>
       <p:sp>
         <p:nvSpPr>
-          <p:cNvPr id="51" name="Text 49"/>
-          <p:cNvSpPr/>
-          <p:nvPr/>
-        </p:nvSpPr>
-        <p:spPr>
-          <a:xfrm>
-            <a:off x="6062472" y="4187952"/>
-            <a:ext cx="685800" cy="475488"/>
+          <p:cNvPr id="50" name="Text 48"/>
+          <p:cNvSpPr/>
+          <p:nvPr/>
+        </p:nvSpPr>
+        <p:spPr>
+          <a:xfrm>
+            <a:off x="6062472" y="4169664"/>
+            <a:ext cx="685800" cy="384048"/>
           </a:xfrm>
           <a:prstGeom prst="rect">
             <a:avLst/>
@@ -11498,18 +11381,57 @@
       </p:sp>
       <p:sp>
         <p:nvSpPr>
+          <p:cNvPr id="51" name="Text 49"/>
+          <p:cNvSpPr/>
+          <p:nvPr/>
+        </p:nvSpPr>
+        <p:spPr>
+          <a:xfrm>
+            <a:off x="6062472" y="4572000"/>
+            <a:ext cx="685800" cy="219456"/>
+          </a:xfrm>
+          <a:prstGeom prst="rect">
+            <a:avLst/>
+          </a:prstGeom>
+          <a:noFill/>
+          <a:ln/>
+        </p:spPr>
+        <p:txBody>
+          <a:bodyPr wrap="square" lIns="0" tIns="0" rIns="0" bIns="0" rtlCol="0" anchor="t"/>
+          <a:lstStyle/>
+          <a:p>
+            <a:pPr algn="ctr" indent="0" marL="0">
+              <a:buNone/>
+            </a:pPr>
+            <a:r>
+              <a:rPr lang="en-US" sz="750" i="1" dirty="0">
+                <a:solidFill>
+                  <a:srgbClr val="94A3B8"/>
+                </a:solidFill>
+                <a:latin typeface="Calibri" pitchFamily="34" charset="0"/>
+                <a:ea typeface="Calibri" pitchFamily="34" charset="-122"/>
+                <a:cs typeface="Calibri" pitchFamily="34" charset="-120"/>
+              </a:rPr>
+              <a:t>/sh/</a:t>
+            </a:r>
+            <a:endParaRPr lang="en-US" sz="750" dirty="0"/>
+          </a:p>
+        </p:txBody>
+      </p:sp>
+      <p:sp>
+        <p:nvSpPr>
           <p:cNvPr id="52" name="Shape 50"/>
           <p:cNvSpPr/>
           <p:nvPr/>
         </p:nvSpPr>
         <p:spPr>
           <a:xfrm>
-            <a:off x="6870192" y="4187952"/>
-            <a:ext cx="685800" cy="475488"/>
+            <a:off x="6870192" y="4169664"/>
+            <a:ext cx="685800" cy="384048"/>
           </a:xfrm>
           <a:prstGeom prst="rect">
             <a:avLst>
-              <a:gd name="adj" fmla="val 7692"/>
+              <a:gd name="adj" fmla="val 9524"/>
             </a:avLst>
           </a:prstGeom>
           <a:solidFill>
@@ -11531,8 +11453,8 @@
         </p:nvSpPr>
         <p:spPr>
           <a:xfrm>
-            <a:off x="6870192" y="4187952"/>
-            <a:ext cx="685800" cy="475488"/>
+            <a:off x="6870192" y="4169664"/>
+            <a:ext cx="685800" cy="384048"/>
           </a:xfrm>
           <a:prstGeom prst="rect">
             <a:avLst/>
@@ -11570,12 +11492,12 @@
         </p:nvSpPr>
         <p:spPr>
           <a:xfrm>
-            <a:off x="7677912" y="4187952"/>
-            <a:ext cx="685800" cy="475488"/>
+            <a:off x="7677912" y="4169664"/>
+            <a:ext cx="685800" cy="384048"/>
           </a:xfrm>
           <a:prstGeom prst="rect">
             <a:avLst>
-              <a:gd name="adj" fmla="val 7692"/>
+              <a:gd name="adj" fmla="val 9524"/>
             </a:avLst>
           </a:prstGeom>
           <a:solidFill>
@@ -11597,8 +11519,8 @@
         </p:nvSpPr>
         <p:spPr>
           <a:xfrm>
-            <a:off x="7677912" y="4187952"/>
-            <a:ext cx="685800" cy="475488"/>
+            <a:off x="7677912" y="4169664"/>
+            <a:ext cx="685800" cy="384048"/>
           </a:xfrm>
           <a:prstGeom prst="rect">
             <a:avLst/>
@@ -11914,7 +11836,7 @@
                 <a:ea typeface="Calibri" pitchFamily="34" charset="-122"/>
                 <a:cs typeface="Calibri" pitchFamily="34" charset="-120"/>
               </a:rPr>
-              <a:t>Word Labs  •  wordlabs.app  •  Suffix: '-tion' = act, state, or result</a:t>
+              <a:t>Word Labs  •  wordlabs.app  •  Suffix: '-tion' = act, process, or state</a:t>
             </a:r>
             <a:endParaRPr lang="en-US" sz="800" dirty="0"/>
           </a:p>
@@ -12053,7 +11975,7 @@
                 <a:ea typeface="Trebuchet MS" pitchFamily="34" charset="-122"/>
                 <a:cs typeface="Trebuchet MS" pitchFamily="34" charset="-120"/>
               </a:rPr>
-              <a:t>attraction</a:t>
+              <a:t>direction</a:t>
             </a:r>
             <a:endParaRPr lang="en-US" sz="2800" dirty="0"/>
           </a:p>
@@ -12332,11 +12254,11 @@
         <p:spPr>
           <a:xfrm>
             <a:off x="365760" y="4096512"/>
-            <a:ext cx="1371600" cy="658368"/>
+            <a:ext cx="1371600" cy="804672"/>
           </a:xfrm>
           <a:prstGeom prst="rect">
             <a:avLst>
-              <a:gd name="adj" fmla="val 8333"/>
+              <a:gd name="adj" fmla="val 6818"/>
             </a:avLst>
           </a:prstGeom>
           <a:solidFill>
@@ -12359,7 +12281,7 @@
         <p:spPr>
           <a:xfrm>
             <a:off x="365760" y="4096512"/>
-            <a:ext cx="1371600" cy="658368"/>
+            <a:ext cx="1371600" cy="804672"/>
           </a:xfrm>
           <a:prstGeom prst="rect">
             <a:avLst/>
@@ -12398,11 +12320,11 @@
         <p:spPr>
           <a:xfrm>
             <a:off x="1874520" y="4096512"/>
-            <a:ext cx="6903720" cy="658368"/>
+            <a:ext cx="6903720" cy="804672"/>
           </a:xfrm>
           <a:prstGeom prst="rect">
             <a:avLst>
-              <a:gd name="adj" fmla="val 8333"/>
+              <a:gd name="adj" fmla="val 6818"/>
             </a:avLst>
           </a:prstGeom>
           <a:solidFill>
@@ -12425,7 +12347,7 @@
         <p:spPr>
           <a:xfrm>
             <a:off x="1874520" y="4096512"/>
-            <a:ext cx="6903720" cy="658368"/>
+            <a:ext cx="6903720" cy="804672"/>
           </a:xfrm>
           <a:prstGeom prst="rect">
             <a:avLst/>
@@ -12741,7 +12663,7 @@
                 <a:ea typeface="Calibri" pitchFamily="34" charset="-122"/>
                 <a:cs typeface="Calibri" pitchFamily="34" charset="-120"/>
               </a:rPr>
-              <a:t>Word Labs  •  wordlabs.app  •  Suffix: '-tion' = act, state, or result</a:t>
+              <a:t>Word Labs  •  wordlabs.app  •  Suffix: '-tion' = act, process, or state</a:t>
             </a:r>
             <a:endParaRPr lang="en-US" sz="800" dirty="0"/>
           </a:p>
@@ -12880,7 +12802,7 @@
                 <a:ea typeface="Trebuchet MS" pitchFamily="34" charset="-122"/>
                 <a:cs typeface="Trebuchet MS" pitchFamily="34" charset="-120"/>
               </a:rPr>
-              <a:t>attraction</a:t>
+              <a:t>direction</a:t>
             </a:r>
             <a:endParaRPr lang="en-US" sz="2800" dirty="0"/>
           </a:p>
@@ -13019,7 +12941,7 @@
                 <a:ea typeface="Trebuchet MS" pitchFamily="34" charset="-122"/>
                 <a:cs typeface="Trebuchet MS" pitchFamily="34" charset="-120"/>
               </a:rPr>
-              <a:t>at</a:t>
+              <a:t>di</a:t>
             </a:r>
             <a:endParaRPr lang="en-US" sz="1300" dirty="0"/>
           </a:p>
@@ -13058,7 +12980,7 @@
                 <a:ea typeface="Calibri" pitchFamily="34" charset="-122"/>
                 <a:cs typeface="Calibri" pitchFamily="34" charset="-120"/>
               </a:rPr>
-              <a:t>toward</a:t>
+              <a:t>apart / away</a:t>
             </a:r>
             <a:endParaRPr lang="en-US" sz="850" dirty="0"/>
           </a:p>
@@ -13066,46 +12988,7 @@
       </p:sp>
       <p:sp>
         <p:nvSpPr>
-          <p:cNvPr id="19" name="Text 17"/>
-          <p:cNvSpPr/>
-          <p:nvPr/>
-        </p:nvSpPr>
-        <p:spPr>
-          <a:xfrm>
-            <a:off x="2221992" y="2752344"/>
-            <a:ext cx="1828800" cy="182880"/>
-          </a:xfrm>
-          <a:prstGeom prst="rect">
-            <a:avLst/>
-          </a:prstGeom>
-          <a:noFill/>
-          <a:ln/>
-        </p:spPr>
-        <p:txBody>
-          <a:bodyPr wrap="square" lIns="0" tIns="0" rIns="0" bIns="0" rtlCol="0" anchor="t"/>
-          <a:lstStyle/>
-          <a:p>
-            <a:pPr algn="ctr" indent="0" marL="0">
-              <a:buNone/>
-            </a:pPr>
-            <a:r>
-              <a:rPr lang="en-US" sz="700" i="1" dirty="0">
-                <a:solidFill>
-                  <a:srgbClr val="94A3B8"/>
-                </a:solidFill>
-                <a:latin typeface="Calibri" pitchFamily="34" charset="0"/>
-                <a:ea typeface="Calibri" pitchFamily="34" charset="-122"/>
-                <a:cs typeface="Calibri" pitchFamily="34" charset="-120"/>
-              </a:rPr>
-              <a:t>ad → at before 't'</a:t>
-            </a:r>
-            <a:endParaRPr lang="en-US" sz="700" dirty="0"/>
-          </a:p>
-        </p:txBody>
-      </p:sp>
-      <p:sp>
-        <p:nvSpPr>
-          <p:cNvPr id="20" name="Shape 18"/>
+          <p:cNvPr id="19" name="Shape 17"/>
           <p:cNvSpPr/>
           <p:nvPr/>
         </p:nvSpPr>
@@ -13139,7 +13022,7 @@
       </p:sp>
       <p:sp>
         <p:nvSpPr>
-          <p:cNvPr id="21" name="Text 19"/>
+          <p:cNvPr id="20" name="Text 18"/>
           <p:cNvSpPr/>
           <p:nvPr/>
         </p:nvSpPr>
@@ -13170,7 +13053,7 @@
                 <a:ea typeface="Trebuchet MS" pitchFamily="34" charset="-122"/>
                 <a:cs typeface="Trebuchet MS" pitchFamily="34" charset="-120"/>
               </a:rPr>
-              <a:t>tract</a:t>
+              <a:t>rect</a:t>
             </a:r>
             <a:endParaRPr lang="en-US" sz="1300" dirty="0"/>
           </a:p>
@@ -13178,7 +13061,7 @@
       </p:sp>
       <p:sp>
         <p:nvSpPr>
-          <p:cNvPr id="22" name="Text 20"/>
+          <p:cNvPr id="21" name="Text 19"/>
           <p:cNvSpPr/>
           <p:nvPr/>
         </p:nvSpPr>
@@ -13209,7 +13092,7 @@
                 <a:ea typeface="Calibri" pitchFamily="34" charset="-122"/>
                 <a:cs typeface="Calibri" pitchFamily="34" charset="-120"/>
               </a:rPr>
-              <a:t>pull or draw</a:t>
+              <a:t>straight</a:t>
             </a:r>
             <a:endParaRPr lang="en-US" sz="850" dirty="0"/>
           </a:p>
@@ -13217,7 +13100,7 @@
       </p:sp>
       <p:sp>
         <p:nvSpPr>
-          <p:cNvPr id="23" name="Shape 21"/>
+          <p:cNvPr id="22" name="Shape 20"/>
           <p:cNvSpPr/>
           <p:nvPr/>
         </p:nvSpPr>
@@ -13232,11 +13115,11 @@
             </a:avLst>
           </a:prstGeom>
           <a:solidFill>
-            <a:srgbClr val="FCE7F3"/>
+            <a:srgbClr val="CCFBF1"/>
           </a:solidFill>
           <a:ln w="19050">
             <a:solidFill>
-              <a:srgbClr val="DB2777"/>
+              <a:srgbClr val="0D9488"/>
             </a:solidFill>
             <a:prstDash val="solid"/>
           </a:ln>
@@ -13251,7 +13134,7 @@
       </p:sp>
       <p:sp>
         <p:nvSpPr>
-          <p:cNvPr id="24" name="Text 22"/>
+          <p:cNvPr id="23" name="Text 21"/>
           <p:cNvSpPr/>
           <p:nvPr/>
         </p:nvSpPr>
@@ -13276,13 +13159,13 @@
             <a:r>
               <a:rPr lang="en-US" sz="1300" b="1" dirty="0">
                 <a:solidFill>
-                  <a:srgbClr val="9D174D"/>
+                  <a:srgbClr val="0F766E"/>
                 </a:solidFill>
                 <a:latin typeface="Trebuchet MS" pitchFamily="34" charset="0"/>
                 <a:ea typeface="Trebuchet MS" pitchFamily="34" charset="-122"/>
                 <a:cs typeface="Trebuchet MS" pitchFamily="34" charset="-120"/>
               </a:rPr>
-              <a:t>ion</a:t>
+              <a:t>tion</a:t>
             </a:r>
             <a:endParaRPr lang="en-US" sz="1300" dirty="0"/>
           </a:p>
@@ -13290,7 +13173,7 @@
       </p:sp>
       <p:sp>
         <p:nvSpPr>
-          <p:cNvPr id="25" name="Text 23"/>
+          <p:cNvPr id="24" name="Text 22"/>
           <p:cNvSpPr/>
           <p:nvPr/>
         </p:nvSpPr>
@@ -13321,7 +13204,7 @@
                 <a:ea typeface="Calibri" pitchFamily="34" charset="-122"/>
                 <a:cs typeface="Calibri" pitchFamily="34" charset="-120"/>
               </a:rPr>
-              <a:t>act or state of</a:t>
+              <a:t>act or process</a:t>
             </a:r>
             <a:endParaRPr lang="en-US" sz="850" dirty="0"/>
           </a:p>
@@ -13329,7 +13212,7 @@
       </p:sp>
       <p:sp>
         <p:nvSpPr>
-          <p:cNvPr id="26" name="Shape 24"/>
+          <p:cNvPr id="25" name="Shape 23"/>
           <p:cNvSpPr/>
           <p:nvPr/>
         </p:nvSpPr>
@@ -13356,7 +13239,7 @@
       </p:sp>
       <p:sp>
         <p:nvSpPr>
-          <p:cNvPr id="27" name="Text 25"/>
+          <p:cNvPr id="26" name="Text 24"/>
           <p:cNvSpPr/>
           <p:nvPr/>
         </p:nvSpPr>
@@ -13395,7 +13278,7 @@
       </p:sp>
       <p:sp>
         <p:nvSpPr>
-          <p:cNvPr id="28" name="Shape 26"/>
+          <p:cNvPr id="27" name="Shape 25"/>
           <p:cNvSpPr/>
           <p:nvPr/>
         </p:nvSpPr>
@@ -13422,7 +13305,7 @@
       </p:sp>
       <p:sp>
         <p:nvSpPr>
-          <p:cNvPr id="29" name="Text 27"/>
+          <p:cNvPr id="28" name="Text 26"/>
           <p:cNvSpPr/>
           <p:nvPr/>
         </p:nvSpPr>
@@ -13461,18 +13344,18 @@
       </p:sp>
       <p:sp>
         <p:nvSpPr>
-          <p:cNvPr id="30" name="Shape 28"/>
+          <p:cNvPr id="29" name="Shape 27"/>
           <p:cNvSpPr/>
           <p:nvPr/>
         </p:nvSpPr>
         <p:spPr>
           <a:xfrm>
             <a:off x="365760" y="4096512"/>
-            <a:ext cx="1371600" cy="658368"/>
+            <a:ext cx="1371600" cy="804672"/>
           </a:xfrm>
           <a:prstGeom prst="rect">
             <a:avLst>
-              <a:gd name="adj" fmla="val 8333"/>
+              <a:gd name="adj" fmla="val 6818"/>
             </a:avLst>
           </a:prstGeom>
           <a:solidFill>
@@ -13488,14 +13371,14 @@
       </p:sp>
       <p:sp>
         <p:nvSpPr>
-          <p:cNvPr id="31" name="Text 29"/>
+          <p:cNvPr id="30" name="Text 28"/>
           <p:cNvSpPr/>
           <p:nvPr/>
         </p:nvSpPr>
         <p:spPr>
           <a:xfrm>
             <a:off x="365760" y="4096512"/>
-            <a:ext cx="1371600" cy="658368"/>
+            <a:ext cx="1371600" cy="804672"/>
           </a:xfrm>
           <a:prstGeom prst="rect">
             <a:avLst/>
@@ -13527,18 +13410,18 @@
       </p:sp>
       <p:sp>
         <p:nvSpPr>
-          <p:cNvPr id="32" name="Shape 30"/>
+          <p:cNvPr id="31" name="Shape 29"/>
           <p:cNvSpPr/>
           <p:nvPr/>
         </p:nvSpPr>
         <p:spPr>
           <a:xfrm>
             <a:off x="1874520" y="4096512"/>
-            <a:ext cx="6903720" cy="658368"/>
+            <a:ext cx="6903720" cy="804672"/>
           </a:xfrm>
           <a:prstGeom prst="rect">
             <a:avLst>
-              <a:gd name="adj" fmla="val 8333"/>
+              <a:gd name="adj" fmla="val 6818"/>
             </a:avLst>
           </a:prstGeom>
           <a:solidFill>
@@ -13554,14 +13437,14 @@
       </p:sp>
       <p:sp>
         <p:nvSpPr>
-          <p:cNvPr id="33" name="Text 31"/>
+          <p:cNvPr id="32" name="Text 30"/>
           <p:cNvSpPr/>
           <p:nvPr/>
         </p:nvSpPr>
         <p:spPr>
           <a:xfrm>
             <a:off x="1874520" y="4096512"/>
-            <a:ext cx="6903720" cy="658368"/>
+            <a:ext cx="6903720" cy="804672"/>
           </a:xfrm>
           <a:prstGeom prst="rect">
             <a:avLst/>
@@ -13877,7 +13760,7 @@
                 <a:ea typeface="Calibri" pitchFamily="34" charset="-122"/>
                 <a:cs typeface="Calibri" pitchFamily="34" charset="-120"/>
               </a:rPr>
-              <a:t>Word Labs  •  wordlabs.app  •  Suffix: '-tion' = act, state, or result</a:t>
+              <a:t>Word Labs  •  wordlabs.app  •  Suffix: '-tion' = act, process, or state</a:t>
             </a:r>
             <a:endParaRPr lang="en-US" sz="800" dirty="0"/>
           </a:p>
@@ -14016,7 +13899,7 @@
                 <a:ea typeface="Trebuchet MS" pitchFamily="34" charset="-122"/>
                 <a:cs typeface="Trebuchet MS" pitchFamily="34" charset="-120"/>
               </a:rPr>
-              <a:t>attraction</a:t>
+              <a:t>direction</a:t>
             </a:r>
             <a:endParaRPr lang="en-US" sz="2800" dirty="0"/>
           </a:p>
@@ -14155,7 +14038,7 @@
                 <a:ea typeface="Trebuchet MS" pitchFamily="34" charset="-122"/>
                 <a:cs typeface="Trebuchet MS" pitchFamily="34" charset="-120"/>
               </a:rPr>
-              <a:t>at</a:t>
+              <a:t>di</a:t>
             </a:r>
             <a:endParaRPr lang="en-US" sz="1300" dirty="0"/>
           </a:p>
@@ -14194,7 +14077,7 @@
                 <a:ea typeface="Calibri" pitchFamily="34" charset="-122"/>
                 <a:cs typeface="Calibri" pitchFamily="34" charset="-120"/>
               </a:rPr>
-              <a:t>toward</a:t>
+              <a:t>apart / away</a:t>
             </a:r>
             <a:endParaRPr lang="en-US" sz="850" dirty="0"/>
           </a:p>
@@ -14202,46 +14085,7 @@
       </p:sp>
       <p:sp>
         <p:nvSpPr>
-          <p:cNvPr id="19" name="Text 17"/>
-          <p:cNvSpPr/>
-          <p:nvPr/>
-        </p:nvSpPr>
-        <p:spPr>
-          <a:xfrm>
-            <a:off x="2221992" y="2752344"/>
-            <a:ext cx="1828800" cy="182880"/>
-          </a:xfrm>
-          <a:prstGeom prst="rect">
-            <a:avLst/>
-          </a:prstGeom>
-          <a:noFill/>
-          <a:ln/>
-        </p:spPr>
-        <p:txBody>
-          <a:bodyPr wrap="square" lIns="0" tIns="0" rIns="0" bIns="0" rtlCol="0" anchor="t"/>
-          <a:lstStyle/>
-          <a:p>
-            <a:pPr algn="ctr" indent="0" marL="0">
-              <a:buNone/>
-            </a:pPr>
-            <a:r>
-              <a:rPr lang="en-US" sz="700" i="1" dirty="0">
-                <a:solidFill>
-                  <a:srgbClr val="94A3B8"/>
-                </a:solidFill>
-                <a:latin typeface="Calibri" pitchFamily="34" charset="0"/>
-                <a:ea typeface="Calibri" pitchFamily="34" charset="-122"/>
-                <a:cs typeface="Calibri" pitchFamily="34" charset="-120"/>
-              </a:rPr>
-              <a:t>ad → at before 't'</a:t>
-            </a:r>
-            <a:endParaRPr lang="en-US" sz="700" dirty="0"/>
-          </a:p>
-        </p:txBody>
-      </p:sp>
-      <p:sp>
-        <p:nvSpPr>
-          <p:cNvPr id="20" name="Shape 18"/>
+          <p:cNvPr id="19" name="Shape 17"/>
           <p:cNvSpPr/>
           <p:nvPr/>
         </p:nvSpPr>
@@ -14275,7 +14119,7 @@
       </p:sp>
       <p:sp>
         <p:nvSpPr>
-          <p:cNvPr id="21" name="Text 19"/>
+          <p:cNvPr id="20" name="Text 18"/>
           <p:cNvSpPr/>
           <p:nvPr/>
         </p:nvSpPr>
@@ -14306,7 +14150,7 @@
                 <a:ea typeface="Trebuchet MS" pitchFamily="34" charset="-122"/>
                 <a:cs typeface="Trebuchet MS" pitchFamily="34" charset="-120"/>
               </a:rPr>
-              <a:t>tract</a:t>
+              <a:t>rect</a:t>
             </a:r>
             <a:endParaRPr lang="en-US" sz="1300" dirty="0"/>
           </a:p>
@@ -14314,7 +14158,7 @@
       </p:sp>
       <p:sp>
         <p:nvSpPr>
-          <p:cNvPr id="22" name="Text 20"/>
+          <p:cNvPr id="21" name="Text 19"/>
           <p:cNvSpPr/>
           <p:nvPr/>
         </p:nvSpPr>
@@ -14345,7 +14189,7 @@
                 <a:ea typeface="Calibri" pitchFamily="34" charset="-122"/>
                 <a:cs typeface="Calibri" pitchFamily="34" charset="-120"/>
               </a:rPr>
-              <a:t>pull or draw</a:t>
+              <a:t>straight</a:t>
             </a:r>
             <a:endParaRPr lang="en-US" sz="850" dirty="0"/>
           </a:p>
@@ -14353,7 +14197,7 @@
       </p:sp>
       <p:sp>
         <p:nvSpPr>
-          <p:cNvPr id="23" name="Shape 21"/>
+          <p:cNvPr id="22" name="Shape 20"/>
           <p:cNvSpPr/>
           <p:nvPr/>
         </p:nvSpPr>
@@ -14368,11 +14212,11 @@
             </a:avLst>
           </a:prstGeom>
           <a:solidFill>
-            <a:srgbClr val="FCE7F3"/>
+            <a:srgbClr val="CCFBF1"/>
           </a:solidFill>
           <a:ln w="19050">
             <a:solidFill>
-              <a:srgbClr val="DB2777"/>
+              <a:srgbClr val="0D9488"/>
             </a:solidFill>
             <a:prstDash val="solid"/>
           </a:ln>
@@ -14387,7 +14231,7 @@
       </p:sp>
       <p:sp>
         <p:nvSpPr>
-          <p:cNvPr id="24" name="Text 22"/>
+          <p:cNvPr id="23" name="Text 21"/>
           <p:cNvSpPr/>
           <p:nvPr/>
         </p:nvSpPr>
@@ -14412,13 +14256,13 @@
             <a:r>
               <a:rPr lang="en-US" sz="1300" b="1" dirty="0">
                 <a:solidFill>
-                  <a:srgbClr val="9D174D"/>
+                  <a:srgbClr val="0F766E"/>
                 </a:solidFill>
                 <a:latin typeface="Trebuchet MS" pitchFamily="34" charset="0"/>
                 <a:ea typeface="Trebuchet MS" pitchFamily="34" charset="-122"/>
                 <a:cs typeface="Trebuchet MS" pitchFamily="34" charset="-120"/>
               </a:rPr>
-              <a:t>ion</a:t>
+              <a:t>tion</a:t>
             </a:r>
             <a:endParaRPr lang="en-US" sz="1300" dirty="0"/>
           </a:p>
@@ -14426,7 +14270,7 @@
       </p:sp>
       <p:sp>
         <p:nvSpPr>
-          <p:cNvPr id="25" name="Text 23"/>
+          <p:cNvPr id="24" name="Text 22"/>
           <p:cNvSpPr/>
           <p:nvPr/>
         </p:nvSpPr>
@@ -14457,7 +14301,7 @@
                 <a:ea typeface="Calibri" pitchFamily="34" charset="-122"/>
                 <a:cs typeface="Calibri" pitchFamily="34" charset="-120"/>
               </a:rPr>
-              <a:t>act or state of</a:t>
+              <a:t>act or process</a:t>
             </a:r>
             <a:endParaRPr lang="en-US" sz="850" dirty="0"/>
           </a:p>
@@ -14465,7 +14309,7 @@
       </p:sp>
       <p:sp>
         <p:nvSpPr>
-          <p:cNvPr id="26" name="Shape 24"/>
+          <p:cNvPr id="25" name="Shape 23"/>
           <p:cNvSpPr/>
           <p:nvPr/>
         </p:nvSpPr>
@@ -14492,7 +14336,7 @@
       </p:sp>
       <p:sp>
         <p:nvSpPr>
-          <p:cNvPr id="27" name="Text 25"/>
+          <p:cNvPr id="26" name="Text 24"/>
           <p:cNvSpPr/>
           <p:nvPr/>
         </p:nvSpPr>
@@ -14531,7 +14375,7 @@
       </p:sp>
       <p:sp>
         <p:nvSpPr>
-          <p:cNvPr id="28" name="Shape 26"/>
+          <p:cNvPr id="27" name="Shape 25"/>
           <p:cNvSpPr/>
           <p:nvPr/>
         </p:nvSpPr>
@@ -14558,7 +14402,7 @@
       </p:sp>
       <p:sp>
         <p:nvSpPr>
-          <p:cNvPr id="29" name="Shape 27"/>
+          <p:cNvPr id="28" name="Shape 26"/>
           <p:cNvSpPr/>
           <p:nvPr/>
         </p:nvSpPr>
@@ -14585,7 +14429,7 @@
       </p:sp>
       <p:sp>
         <p:nvSpPr>
-          <p:cNvPr id="30" name="Text 28"/>
+          <p:cNvPr id="29" name="Text 27"/>
           <p:cNvSpPr/>
           <p:nvPr/>
         </p:nvSpPr>
@@ -14616,7 +14460,7 @@
                 <a:ea typeface="Trebuchet MS" pitchFamily="34" charset="-122"/>
                 <a:cs typeface="Trebuchet MS" pitchFamily="34" charset="-120"/>
               </a:rPr>
-              <a:t>at</a:t>
+              <a:t>di</a:t>
             </a:r>
             <a:endParaRPr lang="en-US" sz="1400" dirty="0"/>
           </a:p>
@@ -14624,7 +14468,7 @@
       </p:sp>
       <p:sp>
         <p:nvSpPr>
-          <p:cNvPr id="31" name="Text 29"/>
+          <p:cNvPr id="30" name="Text 28"/>
           <p:cNvSpPr/>
           <p:nvPr/>
         </p:nvSpPr>
@@ -14663,7 +14507,7 @@
       </p:sp>
       <p:sp>
         <p:nvSpPr>
-          <p:cNvPr id="32" name="Shape 30"/>
+          <p:cNvPr id="31" name="Shape 29"/>
           <p:cNvSpPr/>
           <p:nvPr/>
         </p:nvSpPr>
@@ -14690,7 +14534,7 @@
       </p:sp>
       <p:sp>
         <p:nvSpPr>
-          <p:cNvPr id="33" name="Text 31"/>
+          <p:cNvPr id="32" name="Text 30"/>
           <p:cNvSpPr/>
           <p:nvPr/>
         </p:nvSpPr>
@@ -14721,7 +14565,7 @@
                 <a:ea typeface="Trebuchet MS" pitchFamily="34" charset="-122"/>
                 <a:cs typeface="Trebuchet MS" pitchFamily="34" charset="-120"/>
               </a:rPr>
-              <a:t>trac</a:t>
+              <a:t>rec</a:t>
             </a:r>
             <a:endParaRPr lang="en-US" sz="1400" dirty="0"/>
           </a:p>
@@ -14729,7 +14573,7 @@
       </p:sp>
       <p:sp>
         <p:nvSpPr>
-          <p:cNvPr id="34" name="Text 32"/>
+          <p:cNvPr id="33" name="Text 31"/>
           <p:cNvSpPr/>
           <p:nvPr/>
         </p:nvSpPr>
@@ -14768,7 +14612,7 @@
       </p:sp>
       <p:sp>
         <p:nvSpPr>
-          <p:cNvPr id="35" name="Shape 33"/>
+          <p:cNvPr id="34" name="Shape 32"/>
           <p:cNvSpPr/>
           <p:nvPr/>
         </p:nvSpPr>
@@ -14795,7 +14639,7 @@
       </p:sp>
       <p:sp>
         <p:nvSpPr>
-          <p:cNvPr id="36" name="Text 34"/>
+          <p:cNvPr id="35" name="Text 33"/>
           <p:cNvSpPr/>
           <p:nvPr/>
         </p:nvSpPr>
@@ -14834,18 +14678,18 @@
       </p:sp>
       <p:sp>
         <p:nvSpPr>
-          <p:cNvPr id="37" name="Shape 35"/>
+          <p:cNvPr id="36" name="Shape 34"/>
           <p:cNvSpPr/>
           <p:nvPr/>
         </p:nvSpPr>
         <p:spPr>
           <a:xfrm>
             <a:off x="365760" y="4096512"/>
-            <a:ext cx="1371600" cy="658368"/>
+            <a:ext cx="1371600" cy="804672"/>
           </a:xfrm>
           <a:prstGeom prst="rect">
             <a:avLst>
-              <a:gd name="adj" fmla="val 8333"/>
+              <a:gd name="adj" fmla="val 6818"/>
             </a:avLst>
           </a:prstGeom>
           <a:solidFill>
@@ -14861,14 +14705,14 @@
       </p:sp>
       <p:sp>
         <p:nvSpPr>
-          <p:cNvPr id="38" name="Text 36"/>
+          <p:cNvPr id="37" name="Text 35"/>
           <p:cNvSpPr/>
           <p:nvPr/>
         </p:nvSpPr>
         <p:spPr>
           <a:xfrm>
             <a:off x="365760" y="4096512"/>
-            <a:ext cx="1371600" cy="658368"/>
+            <a:ext cx="1371600" cy="804672"/>
           </a:xfrm>
           <a:prstGeom prst="rect">
             <a:avLst/>
@@ -14900,18 +14744,18 @@
       </p:sp>
       <p:sp>
         <p:nvSpPr>
-          <p:cNvPr id="39" name="Shape 37"/>
+          <p:cNvPr id="38" name="Shape 36"/>
           <p:cNvSpPr/>
           <p:nvPr/>
         </p:nvSpPr>
         <p:spPr>
           <a:xfrm>
             <a:off x="1874520" y="4096512"/>
-            <a:ext cx="6903720" cy="658368"/>
+            <a:ext cx="6903720" cy="804672"/>
           </a:xfrm>
           <a:prstGeom prst="rect">
             <a:avLst>
-              <a:gd name="adj" fmla="val 8333"/>
+              <a:gd name="adj" fmla="val 6818"/>
             </a:avLst>
           </a:prstGeom>
           <a:solidFill>
@@ -14927,14 +14771,14 @@
       </p:sp>
       <p:sp>
         <p:nvSpPr>
-          <p:cNvPr id="40" name="Text 38"/>
+          <p:cNvPr id="39" name="Text 37"/>
           <p:cNvSpPr/>
           <p:nvPr/>
         </p:nvSpPr>
         <p:spPr>
           <a:xfrm>
             <a:off x="1874520" y="4096512"/>
-            <a:ext cx="6903720" cy="658368"/>
+            <a:ext cx="6903720" cy="804672"/>
           </a:xfrm>
           <a:prstGeom prst="rect">
             <a:avLst/>
@@ -15159,7 +15003,7 @@
                 <a:ea typeface="Calibri" pitchFamily="34" charset="-122"/>
                 <a:cs typeface="Calibri" pitchFamily="34" charset="-120"/>
               </a:rPr>
-              <a:t>Suffix '-tion' — act, state, or result</a:t>
+              <a:t>Suffix '-tion' — act, process, or state</a:t>
             </a:r>
             <a:endParaRPr lang="en-US" sz="1600" dirty="0"/>
           </a:p>
@@ -15515,7 +15359,7 @@
                 <a:ea typeface="Calibri" pitchFamily="34" charset="-122"/>
                 <a:cs typeface="Calibri" pitchFamily="34" charset="-120"/>
               </a:rPr>
-              <a:t>Word Labs  •  wordlabs.app  •  Suffix: '-tion' = act, state, or result</a:t>
+              <a:t>Word Labs  •  wordlabs.app  •  Suffix: '-tion' = act, process, or state</a:t>
             </a:r>
             <a:endParaRPr lang="en-US" sz="800" dirty="0"/>
           </a:p>
@@ -15654,7 +15498,7 @@
                 <a:ea typeface="Trebuchet MS" pitchFamily="34" charset="-122"/>
                 <a:cs typeface="Trebuchet MS" pitchFamily="34" charset="-120"/>
               </a:rPr>
-              <a:t>attraction</a:t>
+              <a:t>direction</a:t>
             </a:r>
             <a:endParaRPr lang="en-US" sz="2800" dirty="0"/>
           </a:p>
@@ -15793,7 +15637,7 @@
                 <a:ea typeface="Trebuchet MS" pitchFamily="34" charset="-122"/>
                 <a:cs typeface="Trebuchet MS" pitchFamily="34" charset="-120"/>
               </a:rPr>
-              <a:t>at</a:t>
+              <a:t>di</a:t>
             </a:r>
             <a:endParaRPr lang="en-US" sz="1300" dirty="0"/>
           </a:p>
@@ -15832,7 +15676,7 @@
                 <a:ea typeface="Calibri" pitchFamily="34" charset="-122"/>
                 <a:cs typeface="Calibri" pitchFamily="34" charset="-120"/>
               </a:rPr>
-              <a:t>toward</a:t>
+              <a:t>apart / away</a:t>
             </a:r>
             <a:endParaRPr lang="en-US" sz="850" dirty="0"/>
           </a:p>
@@ -15840,46 +15684,7 @@
       </p:sp>
       <p:sp>
         <p:nvSpPr>
-          <p:cNvPr id="19" name="Text 17"/>
-          <p:cNvSpPr/>
-          <p:nvPr/>
-        </p:nvSpPr>
-        <p:spPr>
-          <a:xfrm>
-            <a:off x="2221992" y="2752344"/>
-            <a:ext cx="1828800" cy="182880"/>
-          </a:xfrm>
-          <a:prstGeom prst="rect">
-            <a:avLst/>
-          </a:prstGeom>
-          <a:noFill/>
-          <a:ln/>
-        </p:spPr>
-        <p:txBody>
-          <a:bodyPr wrap="square" lIns="0" tIns="0" rIns="0" bIns="0" rtlCol="0" anchor="t"/>
-          <a:lstStyle/>
-          <a:p>
-            <a:pPr algn="ctr" indent="0" marL="0">
-              <a:buNone/>
-            </a:pPr>
-            <a:r>
-              <a:rPr lang="en-US" sz="700" i="1" dirty="0">
-                <a:solidFill>
-                  <a:srgbClr val="94A3B8"/>
-                </a:solidFill>
-                <a:latin typeface="Calibri" pitchFamily="34" charset="0"/>
-                <a:ea typeface="Calibri" pitchFamily="34" charset="-122"/>
-                <a:cs typeface="Calibri" pitchFamily="34" charset="-120"/>
-              </a:rPr>
-              <a:t>ad → at before 't'</a:t>
-            </a:r>
-            <a:endParaRPr lang="en-US" sz="700" dirty="0"/>
-          </a:p>
-        </p:txBody>
-      </p:sp>
-      <p:sp>
-        <p:nvSpPr>
-          <p:cNvPr id="20" name="Shape 18"/>
+          <p:cNvPr id="19" name="Shape 17"/>
           <p:cNvSpPr/>
           <p:nvPr/>
         </p:nvSpPr>
@@ -15913,7 +15718,7 @@
       </p:sp>
       <p:sp>
         <p:nvSpPr>
-          <p:cNvPr id="21" name="Text 19"/>
+          <p:cNvPr id="20" name="Text 18"/>
           <p:cNvSpPr/>
           <p:nvPr/>
         </p:nvSpPr>
@@ -15944,7 +15749,7 @@
                 <a:ea typeface="Trebuchet MS" pitchFamily="34" charset="-122"/>
                 <a:cs typeface="Trebuchet MS" pitchFamily="34" charset="-120"/>
               </a:rPr>
-              <a:t>tract</a:t>
+              <a:t>rect</a:t>
             </a:r>
             <a:endParaRPr lang="en-US" sz="1300" dirty="0"/>
           </a:p>
@@ -15952,7 +15757,7 @@
       </p:sp>
       <p:sp>
         <p:nvSpPr>
-          <p:cNvPr id="22" name="Text 20"/>
+          <p:cNvPr id="21" name="Text 19"/>
           <p:cNvSpPr/>
           <p:nvPr/>
         </p:nvSpPr>
@@ -15983,7 +15788,7 @@
                 <a:ea typeface="Calibri" pitchFamily="34" charset="-122"/>
                 <a:cs typeface="Calibri" pitchFamily="34" charset="-120"/>
               </a:rPr>
-              <a:t>pull or draw</a:t>
+              <a:t>straight</a:t>
             </a:r>
             <a:endParaRPr lang="en-US" sz="850" dirty="0"/>
           </a:p>
@@ -15991,7 +15796,7 @@
       </p:sp>
       <p:sp>
         <p:nvSpPr>
-          <p:cNvPr id="23" name="Shape 21"/>
+          <p:cNvPr id="22" name="Shape 20"/>
           <p:cNvSpPr/>
           <p:nvPr/>
         </p:nvSpPr>
@@ -16006,11 +15811,11 @@
             </a:avLst>
           </a:prstGeom>
           <a:solidFill>
-            <a:srgbClr val="FCE7F3"/>
+            <a:srgbClr val="CCFBF1"/>
           </a:solidFill>
           <a:ln w="19050">
             <a:solidFill>
-              <a:srgbClr val="DB2777"/>
+              <a:srgbClr val="0D9488"/>
             </a:solidFill>
             <a:prstDash val="solid"/>
           </a:ln>
@@ -16025,7 +15830,7 @@
       </p:sp>
       <p:sp>
         <p:nvSpPr>
-          <p:cNvPr id="24" name="Text 22"/>
+          <p:cNvPr id="23" name="Text 21"/>
           <p:cNvSpPr/>
           <p:nvPr/>
         </p:nvSpPr>
@@ -16050,13 +15855,13 @@
             <a:r>
               <a:rPr lang="en-US" sz="1300" b="1" dirty="0">
                 <a:solidFill>
-                  <a:srgbClr val="9D174D"/>
+                  <a:srgbClr val="0F766E"/>
                 </a:solidFill>
                 <a:latin typeface="Trebuchet MS" pitchFamily="34" charset="0"/>
                 <a:ea typeface="Trebuchet MS" pitchFamily="34" charset="-122"/>
                 <a:cs typeface="Trebuchet MS" pitchFamily="34" charset="-120"/>
               </a:rPr>
-              <a:t>ion</a:t>
+              <a:t>tion</a:t>
             </a:r>
             <a:endParaRPr lang="en-US" sz="1300" dirty="0"/>
           </a:p>
@@ -16064,7 +15869,7 @@
       </p:sp>
       <p:sp>
         <p:nvSpPr>
-          <p:cNvPr id="25" name="Text 23"/>
+          <p:cNvPr id="24" name="Text 22"/>
           <p:cNvSpPr/>
           <p:nvPr/>
         </p:nvSpPr>
@@ -16095,7 +15900,7 @@
                 <a:ea typeface="Calibri" pitchFamily="34" charset="-122"/>
                 <a:cs typeface="Calibri" pitchFamily="34" charset="-120"/>
               </a:rPr>
-              <a:t>act or state of</a:t>
+              <a:t>act or process</a:t>
             </a:r>
             <a:endParaRPr lang="en-US" sz="850" dirty="0"/>
           </a:p>
@@ -16103,7 +15908,7 @@
       </p:sp>
       <p:sp>
         <p:nvSpPr>
-          <p:cNvPr id="26" name="Shape 24"/>
+          <p:cNvPr id="25" name="Shape 23"/>
           <p:cNvSpPr/>
           <p:nvPr/>
         </p:nvSpPr>
@@ -16130,7 +15935,7 @@
       </p:sp>
       <p:sp>
         <p:nvSpPr>
-          <p:cNvPr id="27" name="Text 25"/>
+          <p:cNvPr id="26" name="Text 24"/>
           <p:cNvSpPr/>
           <p:nvPr/>
         </p:nvSpPr>
@@ -16169,7 +15974,7 @@
       </p:sp>
       <p:sp>
         <p:nvSpPr>
-          <p:cNvPr id="28" name="Shape 26"/>
+          <p:cNvPr id="27" name="Shape 25"/>
           <p:cNvSpPr/>
           <p:nvPr/>
         </p:nvSpPr>
@@ -16196,7 +16001,7 @@
       </p:sp>
       <p:sp>
         <p:nvSpPr>
-          <p:cNvPr id="29" name="Shape 27"/>
+          <p:cNvPr id="28" name="Shape 26"/>
           <p:cNvSpPr/>
           <p:nvPr/>
         </p:nvSpPr>
@@ -16223,7 +16028,7 @@
       </p:sp>
       <p:sp>
         <p:nvSpPr>
-          <p:cNvPr id="30" name="Text 28"/>
+          <p:cNvPr id="29" name="Text 27"/>
           <p:cNvSpPr/>
           <p:nvPr/>
         </p:nvSpPr>
@@ -16254,7 +16059,7 @@
                 <a:ea typeface="Trebuchet MS" pitchFamily="34" charset="-122"/>
                 <a:cs typeface="Trebuchet MS" pitchFamily="34" charset="-120"/>
               </a:rPr>
-              <a:t>at</a:t>
+              <a:t>di</a:t>
             </a:r>
             <a:endParaRPr lang="en-US" sz="1400" dirty="0"/>
           </a:p>
@@ -16262,7 +16067,7 @@
       </p:sp>
       <p:sp>
         <p:nvSpPr>
-          <p:cNvPr id="31" name="Text 29"/>
+          <p:cNvPr id="30" name="Text 28"/>
           <p:cNvSpPr/>
           <p:nvPr/>
         </p:nvSpPr>
@@ -16301,7 +16106,7 @@
       </p:sp>
       <p:sp>
         <p:nvSpPr>
-          <p:cNvPr id="32" name="Shape 30"/>
+          <p:cNvPr id="31" name="Shape 29"/>
           <p:cNvSpPr/>
           <p:nvPr/>
         </p:nvSpPr>
@@ -16328,7 +16133,7 @@
       </p:sp>
       <p:sp>
         <p:nvSpPr>
-          <p:cNvPr id="33" name="Text 31"/>
+          <p:cNvPr id="32" name="Text 30"/>
           <p:cNvSpPr/>
           <p:nvPr/>
         </p:nvSpPr>
@@ -16359,7 +16164,7 @@
                 <a:ea typeface="Trebuchet MS" pitchFamily="34" charset="-122"/>
                 <a:cs typeface="Trebuchet MS" pitchFamily="34" charset="-120"/>
               </a:rPr>
-              <a:t>trac</a:t>
+              <a:t>rec</a:t>
             </a:r>
             <a:endParaRPr lang="en-US" sz="1400" dirty="0"/>
           </a:p>
@@ -16367,7 +16172,7 @@
       </p:sp>
       <p:sp>
         <p:nvSpPr>
-          <p:cNvPr id="34" name="Text 32"/>
+          <p:cNvPr id="33" name="Text 31"/>
           <p:cNvSpPr/>
           <p:nvPr/>
         </p:nvSpPr>
@@ -16406,7 +16211,7 @@
       </p:sp>
       <p:sp>
         <p:nvSpPr>
-          <p:cNvPr id="35" name="Shape 33"/>
+          <p:cNvPr id="34" name="Shape 32"/>
           <p:cNvSpPr/>
           <p:nvPr/>
         </p:nvSpPr>
@@ -16433,7 +16238,7 @@
       </p:sp>
       <p:sp>
         <p:nvSpPr>
-          <p:cNvPr id="36" name="Text 34"/>
+          <p:cNvPr id="35" name="Text 33"/>
           <p:cNvSpPr/>
           <p:nvPr/>
         </p:nvSpPr>
@@ -16472,18 +16277,18 @@
       </p:sp>
       <p:sp>
         <p:nvSpPr>
-          <p:cNvPr id="37" name="Shape 35"/>
+          <p:cNvPr id="36" name="Shape 34"/>
           <p:cNvSpPr/>
           <p:nvPr/>
         </p:nvSpPr>
         <p:spPr>
           <a:xfrm>
             <a:off x="365760" y="4096512"/>
-            <a:ext cx="1371600" cy="658368"/>
+            <a:ext cx="1371600" cy="804672"/>
           </a:xfrm>
           <a:prstGeom prst="rect">
             <a:avLst>
-              <a:gd name="adj" fmla="val 8333"/>
+              <a:gd name="adj" fmla="val 6818"/>
             </a:avLst>
           </a:prstGeom>
           <a:solidFill>
@@ -16499,14 +16304,14 @@
       </p:sp>
       <p:sp>
         <p:nvSpPr>
-          <p:cNvPr id="38" name="Text 36"/>
+          <p:cNvPr id="37" name="Text 35"/>
           <p:cNvSpPr/>
           <p:nvPr/>
         </p:nvSpPr>
         <p:spPr>
           <a:xfrm>
             <a:off x="365760" y="4096512"/>
-            <a:ext cx="1371600" cy="658368"/>
+            <a:ext cx="1371600" cy="804672"/>
           </a:xfrm>
           <a:prstGeom prst="rect">
             <a:avLst/>
@@ -16538,22 +16343,49 @@
       </p:sp>
       <p:sp>
         <p:nvSpPr>
+          <p:cNvPr id="38" name="Shape 36"/>
+          <p:cNvSpPr/>
+          <p:nvPr/>
+        </p:nvSpPr>
+        <p:spPr>
+          <a:xfrm>
+            <a:off x="1874520" y="4096512"/>
+            <a:ext cx="6903720" cy="804672"/>
+          </a:xfrm>
+          <a:prstGeom prst="rect">
+            <a:avLst>
+              <a:gd name="adj" fmla="val 6818"/>
+            </a:avLst>
+          </a:prstGeom>
+          <a:solidFill>
+            <a:srgbClr val="FCE7F3"/>
+          </a:solidFill>
+          <a:ln w="12700">
+            <a:solidFill>
+              <a:srgbClr val="DB2777"/>
+            </a:solidFill>
+            <a:prstDash val="solid"/>
+          </a:ln>
+        </p:spPr>
+      </p:sp>
+      <p:sp>
+        <p:nvSpPr>
           <p:cNvPr id="39" name="Shape 37"/>
           <p:cNvSpPr/>
           <p:nvPr/>
         </p:nvSpPr>
         <p:spPr>
           <a:xfrm>
-            <a:off x="1874520" y="4096512"/>
-            <a:ext cx="6903720" cy="658368"/>
+            <a:off x="2023872" y="4169664"/>
+            <a:ext cx="685800" cy="384048"/>
           </a:xfrm>
           <a:prstGeom prst="rect">
             <a:avLst>
-              <a:gd name="adj" fmla="val 8333"/>
+              <a:gd name="adj" fmla="val 9524"/>
             </a:avLst>
           </a:prstGeom>
           <a:solidFill>
-            <a:srgbClr val="FCE7F3"/>
+            <a:srgbClr val="FFFFFF"/>
           </a:solidFill>
           <a:ln w="12700">
             <a:solidFill>
@@ -16565,41 +16397,14 @@
       </p:sp>
       <p:sp>
         <p:nvSpPr>
-          <p:cNvPr id="40" name="Shape 38"/>
-          <p:cNvSpPr/>
-          <p:nvPr/>
-        </p:nvSpPr>
-        <p:spPr>
-          <a:xfrm>
-            <a:off x="2023872" y="4187952"/>
-            <a:ext cx="685800" cy="475488"/>
-          </a:xfrm>
-          <a:prstGeom prst="rect">
-            <a:avLst>
-              <a:gd name="adj" fmla="val 7692"/>
-            </a:avLst>
-          </a:prstGeom>
-          <a:solidFill>
-            <a:srgbClr val="FFFFFF"/>
-          </a:solidFill>
-          <a:ln w="12700">
-            <a:solidFill>
-              <a:srgbClr val="DB2777"/>
-            </a:solidFill>
-            <a:prstDash val="solid"/>
-          </a:ln>
-        </p:spPr>
-      </p:sp>
-      <p:sp>
-        <p:nvSpPr>
-          <p:cNvPr id="41" name="Text 39"/>
-          <p:cNvSpPr/>
-          <p:nvPr/>
-        </p:nvSpPr>
-        <p:spPr>
-          <a:xfrm>
-            <a:off x="2023872" y="4187952"/>
-            <a:ext cx="685800" cy="475488"/>
+          <p:cNvPr id="40" name="Text 38"/>
+          <p:cNvSpPr/>
+          <p:nvPr/>
+        </p:nvSpPr>
+        <p:spPr>
+          <a:xfrm>
+            <a:off x="2023872" y="4169664"/>
+            <a:ext cx="685800" cy="384048"/>
           </a:xfrm>
           <a:prstGeom prst="rect">
             <a:avLst/>
@@ -16623,7 +16428,7 @@
                 <a:ea typeface="Trebuchet MS" pitchFamily="34" charset="-122"/>
                 <a:cs typeface="Trebuchet MS" pitchFamily="34" charset="-120"/>
               </a:rPr>
-              <a:t>a</a:t>
+              <a:t>d</a:t>
             </a:r>
             <a:endParaRPr lang="en-US" sz="900" dirty="0"/>
           </a:p>
@@ -16631,18 +16436,18 @@
       </p:sp>
       <p:sp>
         <p:nvSpPr>
-          <p:cNvPr id="42" name="Shape 40"/>
-          <p:cNvSpPr/>
-          <p:nvPr/>
-        </p:nvSpPr>
-        <p:spPr>
-          <a:xfrm>
-            <a:off x="2831592" y="4187952"/>
-            <a:ext cx="685800" cy="475488"/>
+          <p:cNvPr id="41" name="Shape 39"/>
+          <p:cNvSpPr/>
+          <p:nvPr/>
+        </p:nvSpPr>
+        <p:spPr>
+          <a:xfrm>
+            <a:off x="2831592" y="4169664"/>
+            <a:ext cx="685800" cy="384048"/>
           </a:xfrm>
           <a:prstGeom prst="rect">
             <a:avLst>
-              <a:gd name="adj" fmla="val 7692"/>
+              <a:gd name="adj" fmla="val 9524"/>
             </a:avLst>
           </a:prstGeom>
           <a:solidFill>
@@ -16658,14 +16463,14 @@
       </p:sp>
       <p:sp>
         <p:nvSpPr>
-          <p:cNvPr id="43" name="Text 41"/>
-          <p:cNvSpPr/>
-          <p:nvPr/>
-        </p:nvSpPr>
-        <p:spPr>
-          <a:xfrm>
-            <a:off x="2831592" y="4187952"/>
-            <a:ext cx="685800" cy="475488"/>
+          <p:cNvPr id="42" name="Text 40"/>
+          <p:cNvSpPr/>
+          <p:nvPr/>
+        </p:nvSpPr>
+        <p:spPr>
+          <a:xfrm>
+            <a:off x="2831592" y="4169664"/>
+            <a:ext cx="685800" cy="384048"/>
           </a:xfrm>
           <a:prstGeom prst="rect">
             <a:avLst/>
@@ -16689,7 +16494,7 @@
                 <a:ea typeface="Trebuchet MS" pitchFamily="34" charset="-122"/>
                 <a:cs typeface="Trebuchet MS" pitchFamily="34" charset="-120"/>
               </a:rPr>
-              <a:t>tt</a:t>
+              <a:t>i</a:t>
             </a:r>
             <a:endParaRPr lang="en-US" sz="900" dirty="0"/>
           </a:p>
@@ -16697,18 +16502,18 @@
       </p:sp>
       <p:sp>
         <p:nvSpPr>
-          <p:cNvPr id="44" name="Shape 42"/>
-          <p:cNvSpPr/>
-          <p:nvPr/>
-        </p:nvSpPr>
-        <p:spPr>
-          <a:xfrm>
-            <a:off x="3639312" y="4187952"/>
-            <a:ext cx="685800" cy="475488"/>
+          <p:cNvPr id="43" name="Shape 41"/>
+          <p:cNvSpPr/>
+          <p:nvPr/>
+        </p:nvSpPr>
+        <p:spPr>
+          <a:xfrm>
+            <a:off x="3639312" y="4169664"/>
+            <a:ext cx="685800" cy="384048"/>
           </a:xfrm>
           <a:prstGeom prst="rect">
             <a:avLst>
-              <a:gd name="adj" fmla="val 7692"/>
+              <a:gd name="adj" fmla="val 9524"/>
             </a:avLst>
           </a:prstGeom>
           <a:solidFill>
@@ -16724,14 +16529,14 @@
       </p:sp>
       <p:sp>
         <p:nvSpPr>
-          <p:cNvPr id="45" name="Text 43"/>
-          <p:cNvSpPr/>
-          <p:nvPr/>
-        </p:nvSpPr>
-        <p:spPr>
-          <a:xfrm>
-            <a:off x="3639312" y="4187952"/>
-            <a:ext cx="685800" cy="475488"/>
+          <p:cNvPr id="44" name="Text 42"/>
+          <p:cNvSpPr/>
+          <p:nvPr/>
+        </p:nvSpPr>
+        <p:spPr>
+          <a:xfrm>
+            <a:off x="3639312" y="4169664"/>
+            <a:ext cx="685800" cy="384048"/>
           </a:xfrm>
           <a:prstGeom prst="rect">
             <a:avLst/>
@@ -16763,18 +16568,18 @@
       </p:sp>
       <p:sp>
         <p:nvSpPr>
-          <p:cNvPr id="46" name="Shape 44"/>
-          <p:cNvSpPr/>
-          <p:nvPr/>
-        </p:nvSpPr>
-        <p:spPr>
-          <a:xfrm>
-            <a:off x="4447032" y="4187952"/>
-            <a:ext cx="685800" cy="475488"/>
+          <p:cNvPr id="45" name="Shape 43"/>
+          <p:cNvSpPr/>
+          <p:nvPr/>
+        </p:nvSpPr>
+        <p:spPr>
+          <a:xfrm>
+            <a:off x="4447032" y="4169664"/>
+            <a:ext cx="685800" cy="384048"/>
           </a:xfrm>
           <a:prstGeom prst="rect">
             <a:avLst>
-              <a:gd name="adj" fmla="val 7692"/>
+              <a:gd name="adj" fmla="val 9524"/>
             </a:avLst>
           </a:prstGeom>
           <a:solidFill>
@@ -16790,14 +16595,14 @@
       </p:sp>
       <p:sp>
         <p:nvSpPr>
-          <p:cNvPr id="47" name="Text 45"/>
-          <p:cNvSpPr/>
-          <p:nvPr/>
-        </p:nvSpPr>
-        <p:spPr>
-          <a:xfrm>
-            <a:off x="4447032" y="4187952"/>
-            <a:ext cx="685800" cy="475488"/>
+          <p:cNvPr id="46" name="Text 44"/>
+          <p:cNvSpPr/>
+          <p:nvPr/>
+        </p:nvSpPr>
+        <p:spPr>
+          <a:xfrm>
+            <a:off x="4447032" y="4169664"/>
+            <a:ext cx="685800" cy="384048"/>
           </a:xfrm>
           <a:prstGeom prst="rect">
             <a:avLst/>
@@ -16821,7 +16626,7 @@
                 <a:ea typeface="Trebuchet MS" pitchFamily="34" charset="-122"/>
                 <a:cs typeface="Trebuchet MS" pitchFamily="34" charset="-120"/>
               </a:rPr>
-              <a:t>a</a:t>
+              <a:t>e</a:t>
             </a:r>
             <a:endParaRPr lang="en-US" sz="900" dirty="0"/>
           </a:p>
@@ -16829,18 +16634,18 @@
       </p:sp>
       <p:sp>
         <p:nvSpPr>
-          <p:cNvPr id="48" name="Shape 46"/>
-          <p:cNvSpPr/>
-          <p:nvPr/>
-        </p:nvSpPr>
-        <p:spPr>
-          <a:xfrm>
-            <a:off x="5254752" y="4187952"/>
-            <a:ext cx="685800" cy="475488"/>
+          <p:cNvPr id="47" name="Shape 45"/>
+          <p:cNvSpPr/>
+          <p:nvPr/>
+        </p:nvSpPr>
+        <p:spPr>
+          <a:xfrm>
+            <a:off x="5254752" y="4169664"/>
+            <a:ext cx="685800" cy="384048"/>
           </a:xfrm>
           <a:prstGeom prst="rect">
             <a:avLst>
-              <a:gd name="adj" fmla="val 7692"/>
+              <a:gd name="adj" fmla="val 9524"/>
             </a:avLst>
           </a:prstGeom>
           <a:solidFill>
@@ -16856,14 +16661,14 @@
       </p:sp>
       <p:sp>
         <p:nvSpPr>
-          <p:cNvPr id="49" name="Text 47"/>
-          <p:cNvSpPr/>
-          <p:nvPr/>
-        </p:nvSpPr>
-        <p:spPr>
-          <a:xfrm>
-            <a:off x="5254752" y="4187952"/>
-            <a:ext cx="685800" cy="475488"/>
+          <p:cNvPr id="48" name="Text 46"/>
+          <p:cNvSpPr/>
+          <p:nvPr/>
+        </p:nvSpPr>
+        <p:spPr>
+          <a:xfrm>
+            <a:off x="5254752" y="4169664"/>
+            <a:ext cx="685800" cy="384048"/>
           </a:xfrm>
           <a:prstGeom prst="rect">
             <a:avLst/>
@@ -16895,18 +16700,57 @@
       </p:sp>
       <p:sp>
         <p:nvSpPr>
+          <p:cNvPr id="49" name="Text 47"/>
+          <p:cNvSpPr/>
+          <p:nvPr/>
+        </p:nvSpPr>
+        <p:spPr>
+          <a:xfrm>
+            <a:off x="5254752" y="4572000"/>
+            <a:ext cx="685800" cy="219456"/>
+          </a:xfrm>
+          <a:prstGeom prst="rect">
+            <a:avLst/>
+          </a:prstGeom>
+          <a:noFill/>
+          <a:ln/>
+        </p:spPr>
+        <p:txBody>
+          <a:bodyPr wrap="square" lIns="0" tIns="0" rIns="0" bIns="0" rtlCol="0" anchor="t"/>
+          <a:lstStyle/>
+          <a:p>
+            <a:pPr algn="ctr" indent="0" marL="0">
+              <a:buNone/>
+            </a:pPr>
+            <a:r>
+              <a:rPr lang="en-US" sz="750" i="1" dirty="0">
+                <a:solidFill>
+                  <a:srgbClr val="94A3B8"/>
+                </a:solidFill>
+                <a:latin typeface="Calibri" pitchFamily="34" charset="0"/>
+                <a:ea typeface="Calibri" pitchFamily="34" charset="-122"/>
+                <a:cs typeface="Calibri" pitchFamily="34" charset="-120"/>
+              </a:rPr>
+              <a:t>/k/</a:t>
+            </a:r>
+            <a:endParaRPr lang="en-US" sz="750" dirty="0"/>
+          </a:p>
+        </p:txBody>
+      </p:sp>
+      <p:sp>
+        <p:nvSpPr>
           <p:cNvPr id="50" name="Shape 48"/>
           <p:cNvSpPr/>
           <p:nvPr/>
         </p:nvSpPr>
         <p:spPr>
           <a:xfrm>
-            <a:off x="6062472" y="4187952"/>
-            <a:ext cx="685800" cy="475488"/>
+            <a:off x="6062472" y="4169664"/>
+            <a:ext cx="685800" cy="384048"/>
           </a:xfrm>
           <a:prstGeom prst="rect">
             <a:avLst>
-              <a:gd name="adj" fmla="val 7692"/>
+              <a:gd name="adj" fmla="val 9524"/>
             </a:avLst>
           </a:prstGeom>
           <a:solidFill>
@@ -16928,8 +16772,8 @@
         </p:nvSpPr>
         <p:spPr>
           <a:xfrm>
-            <a:off x="6062472" y="4187952"/>
-            <a:ext cx="685800" cy="475488"/>
+            <a:off x="6062472" y="4169664"/>
+            <a:ext cx="685800" cy="384048"/>
           </a:xfrm>
           <a:prstGeom prst="rect">
             <a:avLst/>
@@ -16961,18 +16805,57 @@
       </p:sp>
       <p:sp>
         <p:nvSpPr>
-          <p:cNvPr id="52" name="Shape 50"/>
-          <p:cNvSpPr/>
-          <p:nvPr/>
-        </p:nvSpPr>
-        <p:spPr>
-          <a:xfrm>
-            <a:off x="6870192" y="4187952"/>
-            <a:ext cx="685800" cy="475488"/>
+          <p:cNvPr id="52" name="Text 50"/>
+          <p:cNvSpPr/>
+          <p:nvPr/>
+        </p:nvSpPr>
+        <p:spPr>
+          <a:xfrm>
+            <a:off x="6062472" y="4572000"/>
+            <a:ext cx="685800" cy="219456"/>
+          </a:xfrm>
+          <a:prstGeom prst="rect">
+            <a:avLst/>
+          </a:prstGeom>
+          <a:noFill/>
+          <a:ln/>
+        </p:spPr>
+        <p:txBody>
+          <a:bodyPr wrap="square" lIns="0" tIns="0" rIns="0" bIns="0" rtlCol="0" anchor="t"/>
+          <a:lstStyle/>
+          <a:p>
+            <a:pPr algn="ctr" indent="0" marL="0">
+              <a:buNone/>
+            </a:pPr>
+            <a:r>
+              <a:rPr lang="en-US" sz="750" i="1" dirty="0">
+                <a:solidFill>
+                  <a:srgbClr val="94A3B8"/>
+                </a:solidFill>
+                <a:latin typeface="Calibri" pitchFamily="34" charset="0"/>
+                <a:ea typeface="Calibri" pitchFamily="34" charset="-122"/>
+                <a:cs typeface="Calibri" pitchFamily="34" charset="-120"/>
+              </a:rPr>
+              <a:t>/sh/</a:t>
+            </a:r>
+            <a:endParaRPr lang="en-US" sz="750" dirty="0"/>
+          </a:p>
+        </p:txBody>
+      </p:sp>
+      <p:sp>
+        <p:nvSpPr>
+          <p:cNvPr id="53" name="Shape 51"/>
+          <p:cNvSpPr/>
+          <p:nvPr/>
+        </p:nvSpPr>
+        <p:spPr>
+          <a:xfrm>
+            <a:off x="6870192" y="4169664"/>
+            <a:ext cx="685800" cy="384048"/>
           </a:xfrm>
           <a:prstGeom prst="rect">
             <a:avLst>
-              <a:gd name="adj" fmla="val 7692"/>
+              <a:gd name="adj" fmla="val 9524"/>
             </a:avLst>
           </a:prstGeom>
           <a:solidFill>
@@ -16988,14 +16871,14 @@
       </p:sp>
       <p:sp>
         <p:nvSpPr>
-          <p:cNvPr id="53" name="Text 51"/>
-          <p:cNvSpPr/>
-          <p:nvPr/>
-        </p:nvSpPr>
-        <p:spPr>
-          <a:xfrm>
-            <a:off x="6870192" y="4187952"/>
-            <a:ext cx="685800" cy="475488"/>
+          <p:cNvPr id="54" name="Text 52"/>
+          <p:cNvSpPr/>
+          <p:nvPr/>
+        </p:nvSpPr>
+        <p:spPr>
+          <a:xfrm>
+            <a:off x="6870192" y="4169664"/>
+            <a:ext cx="685800" cy="384048"/>
           </a:xfrm>
           <a:prstGeom prst="rect">
             <a:avLst/>
@@ -17027,18 +16910,18 @@
       </p:sp>
       <p:sp>
         <p:nvSpPr>
-          <p:cNvPr id="54" name="Shape 52"/>
-          <p:cNvSpPr/>
-          <p:nvPr/>
-        </p:nvSpPr>
-        <p:spPr>
-          <a:xfrm>
-            <a:off x="7677912" y="4187952"/>
-            <a:ext cx="685800" cy="475488"/>
+          <p:cNvPr id="55" name="Shape 53"/>
+          <p:cNvSpPr/>
+          <p:nvPr/>
+        </p:nvSpPr>
+        <p:spPr>
+          <a:xfrm>
+            <a:off x="7677912" y="4169664"/>
+            <a:ext cx="685800" cy="384048"/>
           </a:xfrm>
           <a:prstGeom prst="rect">
             <a:avLst>
-              <a:gd name="adj" fmla="val 7692"/>
+              <a:gd name="adj" fmla="val 9524"/>
             </a:avLst>
           </a:prstGeom>
           <a:solidFill>
@@ -17054,14 +16937,14 @@
       </p:sp>
       <p:sp>
         <p:nvSpPr>
-          <p:cNvPr id="55" name="Text 53"/>
-          <p:cNvSpPr/>
-          <p:nvPr/>
-        </p:nvSpPr>
-        <p:spPr>
-          <a:xfrm>
-            <a:off x="7677912" y="4187952"/>
-            <a:ext cx="685800" cy="475488"/>
+          <p:cNvPr id="56" name="Text 54"/>
+          <p:cNvSpPr/>
+          <p:nvPr/>
+        </p:nvSpPr>
+        <p:spPr>
+          <a:xfrm>
+            <a:off x="7677912" y="4169664"/>
+            <a:ext cx="685800" cy="384048"/>
           </a:xfrm>
           <a:prstGeom prst="rect">
             <a:avLst/>
@@ -17659,7 +17542,7 @@
                 <a:ea typeface="Calibri" pitchFamily="34" charset="-122"/>
                 <a:cs typeface="Calibri" pitchFamily="34" charset="-120"/>
               </a:rPr>
-              <a:t>Word Labs  •  wordlabs.app  •  Suffix: '-tion' = act, state, or result</a:t>
+              <a:t>Word Labs  •  wordlabs.app  •  Suffix: '-tion' = act, process, or state</a:t>
             </a:r>
             <a:endParaRPr lang="en-US" sz="800" dirty="0"/>
           </a:p>
@@ -18299,7 +18182,7 @@
                 <a:ea typeface="Calibri" pitchFamily="34" charset="-122"/>
                 <a:cs typeface="Calibri" pitchFamily="34" charset="-120"/>
               </a:rPr>
-              <a:t>Word Labs  •  wordlabs.app  •  Suffix: '-tion' = act, state, or result</a:t>
+              <a:t>Word Labs  •  wordlabs.app  •  Suffix: '-tion' = act, process, or state</a:t>
             </a:r>
             <a:endParaRPr lang="en-US" sz="800" dirty="0"/>
           </a:p>
@@ -18428,7 +18311,7 @@
                 <a:ea typeface="Calibri" pitchFamily="34" charset="-122"/>
                 <a:cs typeface="Calibri" pitchFamily="34" charset="-120"/>
               </a:rPr>
-              <a:t>determination</a:t>
+              <a:t>concentration</a:t>
             </a:r>
             <a:pPr algn="l" indent="0" marL="0">
               <a:buNone/>
@@ -18459,7 +18342,7 @@
                 <a:ea typeface="Calibri" pitchFamily="34" charset="-122"/>
                 <a:cs typeface="Calibri" pitchFamily="34" charset="-120"/>
               </a:rPr>
-              <a:t>concentration</a:t>
+              <a:t>determination</a:t>
             </a:r>
             <a:pPr algn="l" indent="0" marL="0">
               <a:buNone/>
@@ -18473,7 +18356,7 @@
                 <a:ea typeface="Calibri" pitchFamily="34" charset="-122"/>
                 <a:cs typeface="Calibri" pitchFamily="34" charset="-120"/>
               </a:rPr>
-              <a:t>, Maya found a </a:t>
+              <a:t>, the team found a </a:t>
             </a:r>
             <a:pPr algn="l" indent="0" marL="0">
               <a:buNone/>
@@ -18504,7 +18387,7 @@
                 <a:ea typeface="Calibri" pitchFamily="34" charset="-122"/>
                 <a:cs typeface="Calibri" pitchFamily="34" charset="-120"/>
               </a:rPr>
-              <a:t> to the tricky maths problem.</a:t>
+              <a:t> to the difficult problem.</a:t>
             </a:r>
             <a:endParaRPr lang="en-US" sz="1800" dirty="0"/>
           </a:p>
@@ -18659,7 +18542,7 @@
                 <a:ea typeface="Trebuchet MS" pitchFamily="34" charset="-122"/>
                 <a:cs typeface="Trebuchet MS" pitchFamily="34" charset="-120"/>
               </a:rPr>
-              <a:t>determination</a:t>
+              <a:t>concentration</a:t>
             </a:r>
             <a:endParaRPr lang="en-US" sz="1400" dirty="0"/>
           </a:p>
@@ -18787,7 +18670,7 @@
                 <a:ea typeface="Trebuchet MS" pitchFamily="34" charset="-122"/>
                 <a:cs typeface="Trebuchet MS" pitchFamily="34" charset="-120"/>
               </a:rPr>
-              <a:t>concentration</a:t>
+              <a:t>determination</a:t>
             </a:r>
             <a:endParaRPr lang="en-US" sz="1400" dirty="0"/>
           </a:p>
@@ -19246,7 +19129,7 @@
                 <a:ea typeface="Calibri" pitchFamily="34" charset="-122"/>
                 <a:cs typeface="Calibri" pitchFamily="34" charset="-120"/>
               </a:rPr>
-              <a:t>Word Labs  •  wordlabs.app  •  Suffix: '-tion' = act, state, or result</a:t>
+              <a:t>Word Labs  •  wordlabs.app  •  Suffix: '-tion' = act, process, or state</a:t>
             </a:r>
             <a:endParaRPr lang="en-US" sz="800" dirty="0"/>
           </a:p>
@@ -19385,7 +19268,7 @@
                 <a:ea typeface="Trebuchet MS" pitchFamily="34" charset="-122"/>
                 <a:cs typeface="Trebuchet MS" pitchFamily="34" charset="-120"/>
               </a:rPr>
-              <a:t>determination</a:t>
+              <a:t>concentration</a:t>
             </a:r>
             <a:endParaRPr lang="en-US" sz="2800" dirty="0"/>
           </a:p>
@@ -19664,11 +19547,11 @@
         <p:spPr>
           <a:xfrm>
             <a:off x="365760" y="4096512"/>
-            <a:ext cx="1371600" cy="658368"/>
+            <a:ext cx="1371600" cy="804672"/>
           </a:xfrm>
           <a:prstGeom prst="rect">
             <a:avLst>
-              <a:gd name="adj" fmla="val 8333"/>
+              <a:gd name="adj" fmla="val 6818"/>
             </a:avLst>
           </a:prstGeom>
           <a:solidFill>
@@ -19691,7 +19574,7 @@
         <p:spPr>
           <a:xfrm>
             <a:off x="365760" y="4096512"/>
-            <a:ext cx="1371600" cy="658368"/>
+            <a:ext cx="1371600" cy="804672"/>
           </a:xfrm>
           <a:prstGeom prst="rect">
             <a:avLst/>
@@ -19730,11 +19613,11 @@
         <p:spPr>
           <a:xfrm>
             <a:off x="1874520" y="4096512"/>
-            <a:ext cx="6903720" cy="658368"/>
+            <a:ext cx="6903720" cy="804672"/>
           </a:xfrm>
           <a:prstGeom prst="rect">
             <a:avLst>
-              <a:gd name="adj" fmla="val 8333"/>
+              <a:gd name="adj" fmla="val 6818"/>
             </a:avLst>
           </a:prstGeom>
           <a:solidFill>
@@ -19757,7 +19640,7 @@
         <p:spPr>
           <a:xfrm>
             <a:off x="1874520" y="4096512"/>
-            <a:ext cx="6903720" cy="658368"/>
+            <a:ext cx="6903720" cy="804672"/>
           </a:xfrm>
           <a:prstGeom prst="rect">
             <a:avLst/>
@@ -20073,7 +19956,7 @@
                 <a:ea typeface="Calibri" pitchFamily="34" charset="-122"/>
                 <a:cs typeface="Calibri" pitchFamily="34" charset="-120"/>
               </a:rPr>
-              <a:t>Word Labs  •  wordlabs.app  •  Suffix: '-tion' = act, state, or result</a:t>
+              <a:t>Word Labs  •  wordlabs.app  •  Suffix: '-tion' = act, process, or state</a:t>
             </a:r>
             <a:endParaRPr lang="en-US" sz="800" dirty="0"/>
           </a:p>
@@ -20212,7 +20095,7 @@
                 <a:ea typeface="Trebuchet MS" pitchFamily="34" charset="-122"/>
                 <a:cs typeface="Trebuchet MS" pitchFamily="34" charset="-120"/>
               </a:rPr>
-              <a:t>determination</a:t>
+              <a:t>concentration</a:t>
             </a:r>
             <a:endParaRPr lang="en-US" sz="2800" dirty="0"/>
           </a:p>
@@ -20351,7 +20234,7 @@
                 <a:ea typeface="Trebuchet MS" pitchFamily="34" charset="-122"/>
                 <a:cs typeface="Trebuchet MS" pitchFamily="34" charset="-120"/>
               </a:rPr>
-              <a:t>de</a:t>
+              <a:t>con</a:t>
             </a:r>
             <a:endParaRPr lang="en-US" sz="1300" dirty="0"/>
           </a:p>
@@ -20390,7 +20273,7 @@
                 <a:ea typeface="Calibri" pitchFamily="34" charset="-122"/>
                 <a:cs typeface="Calibri" pitchFamily="34" charset="-120"/>
               </a:rPr>
-              <a:t>completely</a:t>
+              <a:t>together / with</a:t>
             </a:r>
             <a:endParaRPr lang="en-US" sz="850" dirty="0"/>
           </a:p>
@@ -20463,7 +20346,7 @@
                 <a:ea typeface="Trebuchet MS" pitchFamily="34" charset="-122"/>
                 <a:cs typeface="Trebuchet MS" pitchFamily="34" charset="-120"/>
               </a:rPr>
-              <a:t>termin</a:t>
+              <a:t>centr</a:t>
             </a:r>
             <a:endParaRPr lang="en-US" sz="1300" dirty="0"/>
           </a:p>
@@ -20502,7 +20385,7 @@
                 <a:ea typeface="Calibri" pitchFamily="34" charset="-122"/>
                 <a:cs typeface="Calibri" pitchFamily="34" charset="-120"/>
               </a:rPr>
-              <a:t>limit or end</a:t>
+              <a:t>centre</a:t>
             </a:r>
             <a:endParaRPr lang="en-US" sz="850" dirty="0"/>
           </a:p>
@@ -20765,7 +20648,7 @@
                 <a:ea typeface="Calibri" pitchFamily="34" charset="-122"/>
                 <a:cs typeface="Calibri" pitchFamily="34" charset="-120"/>
               </a:rPr>
-              <a:t>act or state of</a:t>
+              <a:t>act or process</a:t>
             </a:r>
             <a:endParaRPr lang="en-US" sz="850" dirty="0"/>
           </a:p>
@@ -20912,11 +20795,11 @@
         <p:spPr>
           <a:xfrm>
             <a:off x="365760" y="4096512"/>
-            <a:ext cx="1371600" cy="658368"/>
+            <a:ext cx="1371600" cy="804672"/>
           </a:xfrm>
           <a:prstGeom prst="rect">
             <a:avLst>
-              <a:gd name="adj" fmla="val 8333"/>
+              <a:gd name="adj" fmla="val 6818"/>
             </a:avLst>
           </a:prstGeom>
           <a:solidFill>
@@ -20939,7 +20822,7 @@
         <p:spPr>
           <a:xfrm>
             <a:off x="365760" y="4096512"/>
-            <a:ext cx="1371600" cy="658368"/>
+            <a:ext cx="1371600" cy="804672"/>
           </a:xfrm>
           <a:prstGeom prst="rect">
             <a:avLst/>
@@ -20978,11 +20861,11 @@
         <p:spPr>
           <a:xfrm>
             <a:off x="1874520" y="4096512"/>
-            <a:ext cx="6903720" cy="658368"/>
+            <a:ext cx="6903720" cy="804672"/>
           </a:xfrm>
           <a:prstGeom prst="rect">
             <a:avLst>
-              <a:gd name="adj" fmla="val 8333"/>
+              <a:gd name="adj" fmla="val 6818"/>
             </a:avLst>
           </a:prstGeom>
           <a:solidFill>
@@ -21005,7 +20888,7 @@
         <p:spPr>
           <a:xfrm>
             <a:off x="1874520" y="4096512"/>
-            <a:ext cx="6903720" cy="658368"/>
+            <a:ext cx="6903720" cy="804672"/>
           </a:xfrm>
           <a:prstGeom prst="rect">
             <a:avLst/>
@@ -21321,7 +21204,7 @@
                 <a:ea typeface="Calibri" pitchFamily="34" charset="-122"/>
                 <a:cs typeface="Calibri" pitchFamily="34" charset="-120"/>
               </a:rPr>
-              <a:t>Word Labs  •  wordlabs.app  •  Suffix: '-tion' = act, state, or result</a:t>
+              <a:t>Word Labs  •  wordlabs.app  •  Suffix: '-tion' = act, process, or state</a:t>
             </a:r>
             <a:endParaRPr lang="en-US" sz="800" dirty="0"/>
           </a:p>
@@ -21460,7 +21343,7 @@
                 <a:ea typeface="Trebuchet MS" pitchFamily="34" charset="-122"/>
                 <a:cs typeface="Trebuchet MS" pitchFamily="34" charset="-120"/>
               </a:rPr>
-              <a:t>determination</a:t>
+              <a:t>concentration</a:t>
             </a:r>
             <a:endParaRPr lang="en-US" sz="2800" dirty="0"/>
           </a:p>
@@ -21599,7 +21482,7 @@
                 <a:ea typeface="Trebuchet MS" pitchFamily="34" charset="-122"/>
                 <a:cs typeface="Trebuchet MS" pitchFamily="34" charset="-120"/>
               </a:rPr>
-              <a:t>de</a:t>
+              <a:t>con</a:t>
             </a:r>
             <a:endParaRPr lang="en-US" sz="1300" dirty="0"/>
           </a:p>
@@ -21638,7 +21521,7 @@
                 <a:ea typeface="Calibri" pitchFamily="34" charset="-122"/>
                 <a:cs typeface="Calibri" pitchFamily="34" charset="-120"/>
               </a:rPr>
-              <a:t>completely</a:t>
+              <a:t>together / with</a:t>
             </a:r>
             <a:endParaRPr lang="en-US" sz="850" dirty="0"/>
           </a:p>
@@ -21711,7 +21594,7 @@
                 <a:ea typeface="Trebuchet MS" pitchFamily="34" charset="-122"/>
                 <a:cs typeface="Trebuchet MS" pitchFamily="34" charset="-120"/>
               </a:rPr>
-              <a:t>termin</a:t>
+              <a:t>centr</a:t>
             </a:r>
             <a:endParaRPr lang="en-US" sz="1300" dirty="0"/>
           </a:p>
@@ -21750,7 +21633,7 @@
                 <a:ea typeface="Calibri" pitchFamily="34" charset="-122"/>
                 <a:cs typeface="Calibri" pitchFamily="34" charset="-120"/>
               </a:rPr>
-              <a:t>limit or end</a:t>
+              <a:t>centre</a:t>
             </a:r>
             <a:endParaRPr lang="en-US" sz="850" dirty="0"/>
           </a:p>
@@ -22013,7 +21896,7 @@
                 <a:ea typeface="Calibri" pitchFamily="34" charset="-122"/>
                 <a:cs typeface="Calibri" pitchFamily="34" charset="-120"/>
               </a:rPr>
-              <a:t>act or state of</a:t>
+              <a:t>act or process</a:t>
             </a:r>
             <a:endParaRPr lang="en-US" sz="850" dirty="0"/>
           </a:p>
@@ -22120,8 +22003,8 @@
         </p:nvSpPr>
         <p:spPr>
           <a:xfrm>
-            <a:off x="1978152" y="3364992"/>
-            <a:ext cx="1225296" cy="475488"/>
+            <a:off x="1975104" y="3364992"/>
+            <a:ext cx="1554480" cy="475488"/>
           </a:xfrm>
           <a:prstGeom prst="rect">
             <a:avLst>
@@ -22147,8 +22030,8 @@
         </p:nvSpPr>
         <p:spPr>
           <a:xfrm>
-            <a:off x="1978152" y="3364992"/>
-            <a:ext cx="1225296" cy="475488"/>
+            <a:off x="1975104" y="3364992"/>
+            <a:ext cx="1554480" cy="475488"/>
           </a:xfrm>
           <a:prstGeom prst="rect">
             <a:avLst/>
@@ -22172,7 +22055,7 @@
                 <a:ea typeface="Trebuchet MS" pitchFamily="34" charset="-122"/>
                 <a:cs typeface="Trebuchet MS" pitchFamily="34" charset="-120"/>
               </a:rPr>
-              <a:t>de</a:t>
+              <a:t>con</a:t>
             </a:r>
             <a:endParaRPr lang="en-US" sz="1400" dirty="0"/>
           </a:p>
@@ -22186,8 +22069,8 @@
         </p:nvSpPr>
         <p:spPr>
           <a:xfrm>
-            <a:off x="3203448" y="3364992"/>
-            <a:ext cx="76200" cy="475488"/>
+            <a:off x="3529584" y="3364992"/>
+            <a:ext cx="73152" cy="475488"/>
           </a:xfrm>
           <a:prstGeom prst="rect">
             <a:avLst/>
@@ -22225,8 +22108,8 @@
         </p:nvSpPr>
         <p:spPr>
           <a:xfrm>
-            <a:off x="3279648" y="3364992"/>
-            <a:ext cx="1225296" cy="475488"/>
+            <a:off x="3602736" y="3364992"/>
+            <a:ext cx="1554480" cy="475488"/>
           </a:xfrm>
           <a:prstGeom prst="rect">
             <a:avLst>
@@ -22252,8 +22135,8 @@
         </p:nvSpPr>
         <p:spPr>
           <a:xfrm>
-            <a:off x="3279648" y="3364992"/>
-            <a:ext cx="1225296" cy="475488"/>
+            <a:off x="3602736" y="3364992"/>
+            <a:ext cx="1554480" cy="475488"/>
           </a:xfrm>
           <a:prstGeom prst="rect">
             <a:avLst/>
@@ -22277,7 +22160,7 @@
                 <a:ea typeface="Trebuchet MS" pitchFamily="34" charset="-122"/>
                 <a:cs typeface="Trebuchet MS" pitchFamily="34" charset="-120"/>
               </a:rPr>
-              <a:t>ter</a:t>
+              <a:t>cen</a:t>
             </a:r>
             <a:endParaRPr lang="en-US" sz="1400" dirty="0"/>
           </a:p>
@@ -22291,8 +22174,8 @@
         </p:nvSpPr>
         <p:spPr>
           <a:xfrm>
-            <a:off x="4504944" y="3364992"/>
-            <a:ext cx="76200" cy="475488"/>
+            <a:off x="5157216" y="3364992"/>
+            <a:ext cx="73152" cy="475488"/>
           </a:xfrm>
           <a:prstGeom prst="rect">
             <a:avLst/>
@@ -22330,8 +22213,8 @@
         </p:nvSpPr>
         <p:spPr>
           <a:xfrm>
-            <a:off x="4581144" y="3364992"/>
-            <a:ext cx="1225296" cy="475488"/>
+            <a:off x="5230368" y="3364992"/>
+            <a:ext cx="1554480" cy="475488"/>
           </a:xfrm>
           <a:prstGeom prst="rect">
             <a:avLst>
@@ -22357,8 +22240,8 @@
         </p:nvSpPr>
         <p:spPr>
           <a:xfrm>
-            <a:off x="4581144" y="3364992"/>
-            <a:ext cx="1225296" cy="475488"/>
+            <a:off x="5230368" y="3364992"/>
+            <a:ext cx="1554480" cy="475488"/>
           </a:xfrm>
           <a:prstGeom prst="rect">
             <a:avLst/>
@@ -22382,7 +22265,7 @@
                 <a:ea typeface="Trebuchet MS" pitchFamily="34" charset="-122"/>
                 <a:cs typeface="Trebuchet MS" pitchFamily="34" charset="-120"/>
               </a:rPr>
-              <a:t>mi</a:t>
+              <a:t>tra</a:t>
             </a:r>
             <a:endParaRPr lang="en-US" sz="1400" dirty="0"/>
           </a:p>
@@ -22396,8 +22279,8 @@
         </p:nvSpPr>
         <p:spPr>
           <a:xfrm>
-            <a:off x="5806440" y="3364992"/>
-            <a:ext cx="76200" cy="475488"/>
+            <a:off x="6784848" y="3364992"/>
+            <a:ext cx="73152" cy="475488"/>
           </a:xfrm>
           <a:prstGeom prst="rect">
             <a:avLst/>
@@ -22435,8 +22318,8 @@
         </p:nvSpPr>
         <p:spPr>
           <a:xfrm>
-            <a:off x="5882640" y="3364992"/>
-            <a:ext cx="1225296" cy="475488"/>
+            <a:off x="6858000" y="3364992"/>
+            <a:ext cx="1554480" cy="475488"/>
           </a:xfrm>
           <a:prstGeom prst="rect">
             <a:avLst>
@@ -22462,8 +22345,8 @@
         </p:nvSpPr>
         <p:spPr>
           <a:xfrm>
-            <a:off x="5882640" y="3364992"/>
-            <a:ext cx="1225296" cy="475488"/>
+            <a:off x="6858000" y="3364992"/>
+            <a:ext cx="1554480" cy="475488"/>
           </a:xfrm>
           <a:prstGeom prst="rect">
             <a:avLst/>
@@ -22487,7 +22370,7 @@
                 <a:ea typeface="Trebuchet MS" pitchFamily="34" charset="-122"/>
                 <a:cs typeface="Trebuchet MS" pitchFamily="34" charset="-120"/>
               </a:rPr>
-              <a:t>na</a:t>
+              <a:t>tion</a:t>
             </a:r>
             <a:endParaRPr lang="en-US" sz="1400" dirty="0"/>
           </a:p>
@@ -22495,212 +22378,107 @@
       </p:sp>
       <p:sp>
         <p:nvSpPr>
-          <p:cNvPr id="43" name="Text 41"/>
-          <p:cNvSpPr/>
-          <p:nvPr/>
-        </p:nvSpPr>
-        <p:spPr>
-          <a:xfrm>
-            <a:off x="7107936" y="3364992"/>
-            <a:ext cx="76200" cy="475488"/>
-          </a:xfrm>
-          <a:prstGeom prst="rect">
-            <a:avLst/>
-          </a:prstGeom>
-          <a:noFill/>
-          <a:ln/>
-        </p:spPr>
-        <p:txBody>
-          <a:bodyPr wrap="square" lIns="0" tIns="0" rIns="0" bIns="0" rtlCol="0" anchor="ctr"/>
-          <a:lstStyle/>
-          <a:p>
-            <a:pPr algn="ctr" indent="0" marL="0">
-              <a:buNone/>
-            </a:pPr>
-            <a:r>
-              <a:rPr lang="en-US" sz="1600" b="1" dirty="0">
-                <a:solidFill>
-                  <a:srgbClr val="0D9488"/>
+          <p:cNvPr id="43" name="Shape 41"/>
+          <p:cNvSpPr/>
+          <p:nvPr/>
+        </p:nvSpPr>
+        <p:spPr>
+          <a:xfrm>
+            <a:off x="365760" y="4096512"/>
+            <a:ext cx="1371600" cy="804672"/>
+          </a:xfrm>
+          <a:prstGeom prst="rect">
+            <a:avLst>
+              <a:gd name="adj" fmla="val 6818"/>
+            </a:avLst>
+          </a:prstGeom>
+          <a:solidFill>
+            <a:srgbClr val="E2E8F0"/>
+          </a:solidFill>
+          <a:ln w="12700">
+            <a:solidFill>
+              <a:srgbClr val="E2E8F0"/>
+            </a:solidFill>
+            <a:prstDash val="solid"/>
+          </a:ln>
+        </p:spPr>
+      </p:sp>
+      <p:sp>
+        <p:nvSpPr>
+          <p:cNvPr id="44" name="Text 42"/>
+          <p:cNvSpPr/>
+          <p:nvPr/>
+        </p:nvSpPr>
+        <p:spPr>
+          <a:xfrm>
+            <a:off x="365760" y="4096512"/>
+            <a:ext cx="1371600" cy="804672"/>
+          </a:xfrm>
+          <a:prstGeom prst="rect">
+            <a:avLst/>
+          </a:prstGeom>
+          <a:noFill/>
+          <a:ln/>
+        </p:spPr>
+        <p:txBody>
+          <a:bodyPr wrap="square" lIns="0" tIns="0" rIns="0" bIns="0" rtlCol="0" anchor="ctr"/>
+          <a:lstStyle/>
+          <a:p>
+            <a:pPr algn="ctr" indent="0" marL="0">
+              <a:buNone/>
+            </a:pPr>
+            <a:r>
+              <a:rPr lang="en-US" sz="1100" b="1" dirty="0">
+                <a:solidFill>
+                  <a:srgbClr val="475569"/>
                 </a:solidFill>
                 <a:latin typeface="Trebuchet MS" pitchFamily="34" charset="0"/>
                 <a:ea typeface="Trebuchet MS" pitchFamily="34" charset="-122"/>
                 <a:cs typeface="Trebuchet MS" pitchFamily="34" charset="-120"/>
               </a:rPr>
-              <a:t>·</a:t>
-            </a:r>
-            <a:endParaRPr lang="en-US" sz="1600" dirty="0"/>
-          </a:p>
-        </p:txBody>
-      </p:sp>
-      <p:sp>
-        <p:nvSpPr>
-          <p:cNvPr id="44" name="Shape 42"/>
-          <p:cNvSpPr/>
-          <p:nvPr/>
-        </p:nvSpPr>
-        <p:spPr>
-          <a:xfrm>
-            <a:off x="7184136" y="3364992"/>
-            <a:ext cx="1225296" cy="475488"/>
+              <a:t>Phonemes</a:t>
+            </a:r>
+            <a:endParaRPr lang="en-US" sz="1100" dirty="0"/>
+          </a:p>
+        </p:txBody>
+      </p:sp>
+      <p:sp>
+        <p:nvSpPr>
+          <p:cNvPr id="45" name="Shape 43"/>
+          <p:cNvSpPr/>
+          <p:nvPr/>
+        </p:nvSpPr>
+        <p:spPr>
+          <a:xfrm>
+            <a:off x="1874520" y="4096512"/>
+            <a:ext cx="6903720" cy="804672"/>
           </a:xfrm>
           <a:prstGeom prst="rect">
             <a:avLst>
-              <a:gd name="adj" fmla="val 9615"/>
+              <a:gd name="adj" fmla="val 6818"/>
             </a:avLst>
           </a:prstGeom>
           <a:solidFill>
-            <a:srgbClr val="FFFFFF"/>
-          </a:solidFill>
-          <a:ln w="12700">
-            <a:solidFill>
-              <a:srgbClr val="0D9488"/>
-            </a:solidFill>
-            <a:prstDash val="solid"/>
-          </a:ln>
-        </p:spPr>
-      </p:sp>
-      <p:sp>
-        <p:nvSpPr>
-          <p:cNvPr id="45" name="Text 43"/>
-          <p:cNvSpPr/>
-          <p:nvPr/>
-        </p:nvSpPr>
-        <p:spPr>
-          <a:xfrm>
-            <a:off x="7184136" y="3364992"/>
-            <a:ext cx="1225296" cy="475488"/>
-          </a:xfrm>
-          <a:prstGeom prst="rect">
-            <a:avLst/>
-          </a:prstGeom>
-          <a:noFill/>
-          <a:ln/>
-        </p:spPr>
-        <p:txBody>
-          <a:bodyPr wrap="square" lIns="0" tIns="0" rIns="0" bIns="0" rtlCol="0" anchor="ctr"/>
-          <a:lstStyle/>
-          <a:p>
-            <a:pPr algn="ctr" indent="0" marL="0">
-              <a:buNone/>
-            </a:pPr>
-            <a:r>
-              <a:rPr lang="en-US" sz="1400" b="1" dirty="0">
-                <a:solidFill>
-                  <a:srgbClr val="0D9488"/>
-                </a:solidFill>
-                <a:latin typeface="Trebuchet MS" pitchFamily="34" charset="0"/>
-                <a:ea typeface="Trebuchet MS" pitchFamily="34" charset="-122"/>
-                <a:cs typeface="Trebuchet MS" pitchFamily="34" charset="-120"/>
-              </a:rPr>
-              <a:t>tion</a:t>
-            </a:r>
-            <a:endParaRPr lang="en-US" sz="1400" dirty="0"/>
-          </a:p>
-        </p:txBody>
-      </p:sp>
-      <p:sp>
-        <p:nvSpPr>
-          <p:cNvPr id="46" name="Shape 44"/>
-          <p:cNvSpPr/>
-          <p:nvPr/>
-        </p:nvSpPr>
-        <p:spPr>
-          <a:xfrm>
-            <a:off x="365760" y="4096512"/>
-            <a:ext cx="1371600" cy="658368"/>
-          </a:xfrm>
-          <a:prstGeom prst="rect">
-            <a:avLst>
-              <a:gd name="adj" fmla="val 8333"/>
-            </a:avLst>
-          </a:prstGeom>
-          <a:solidFill>
-            <a:srgbClr val="E2E8F0"/>
+            <a:srgbClr val="F8FAFC"/>
           </a:solidFill>
           <a:ln w="12700">
             <a:solidFill>
               <a:srgbClr val="E2E8F0"/>
             </a:solidFill>
-            <a:prstDash val="solid"/>
-          </a:ln>
-        </p:spPr>
-      </p:sp>
-      <p:sp>
-        <p:nvSpPr>
-          <p:cNvPr id="47" name="Text 45"/>
-          <p:cNvSpPr/>
-          <p:nvPr/>
-        </p:nvSpPr>
-        <p:spPr>
-          <a:xfrm>
-            <a:off x="365760" y="4096512"/>
-            <a:ext cx="1371600" cy="658368"/>
-          </a:xfrm>
-          <a:prstGeom prst="rect">
-            <a:avLst/>
-          </a:prstGeom>
-          <a:noFill/>
-          <a:ln/>
-        </p:spPr>
-        <p:txBody>
-          <a:bodyPr wrap="square" lIns="0" tIns="0" rIns="0" bIns="0" rtlCol="0" anchor="ctr"/>
-          <a:lstStyle/>
-          <a:p>
-            <a:pPr algn="ctr" indent="0" marL="0">
-              <a:buNone/>
-            </a:pPr>
-            <a:r>
-              <a:rPr lang="en-US" sz="1100" b="1" dirty="0">
-                <a:solidFill>
-                  <a:srgbClr val="475569"/>
-                </a:solidFill>
-                <a:latin typeface="Trebuchet MS" pitchFamily="34" charset="0"/>
-                <a:ea typeface="Trebuchet MS" pitchFamily="34" charset="-122"/>
-                <a:cs typeface="Trebuchet MS" pitchFamily="34" charset="-120"/>
-              </a:rPr>
-              <a:t>Phonemes</a:t>
-            </a:r>
-            <a:endParaRPr lang="en-US" sz="1100" dirty="0"/>
-          </a:p>
-        </p:txBody>
-      </p:sp>
-      <p:sp>
-        <p:nvSpPr>
-          <p:cNvPr id="48" name="Shape 46"/>
+            <a:prstDash val="dash"/>
+          </a:ln>
+        </p:spPr>
+      </p:sp>
+      <p:sp>
+        <p:nvSpPr>
+          <p:cNvPr id="46" name="Text 44"/>
           <p:cNvSpPr/>
           <p:nvPr/>
         </p:nvSpPr>
         <p:spPr>
           <a:xfrm>
             <a:off x="1874520" y="4096512"/>
-            <a:ext cx="6903720" cy="658368"/>
-          </a:xfrm>
-          <a:prstGeom prst="rect">
-            <a:avLst>
-              <a:gd name="adj" fmla="val 8333"/>
-            </a:avLst>
-          </a:prstGeom>
-          <a:solidFill>
-            <a:srgbClr val="F8FAFC"/>
-          </a:solidFill>
-          <a:ln w="12700">
-            <a:solidFill>
-              <a:srgbClr val="E2E8F0"/>
-            </a:solidFill>
-            <a:prstDash val="dash"/>
-          </a:ln>
-        </p:spPr>
-      </p:sp>
-      <p:sp>
-        <p:nvSpPr>
-          <p:cNvPr id="49" name="Text 47"/>
-          <p:cNvSpPr/>
-          <p:nvPr/>
-        </p:nvSpPr>
-        <p:spPr>
-          <a:xfrm>
-            <a:off x="1874520" y="4096512"/>
-            <a:ext cx="6903720" cy="658368"/>
+            <a:ext cx="6903720" cy="804672"/>
           </a:xfrm>
           <a:prstGeom prst="rect">
             <a:avLst/>
@@ -23016,7 +22794,7 @@
                 <a:ea typeface="Calibri" pitchFamily="34" charset="-122"/>
                 <a:cs typeface="Calibri" pitchFamily="34" charset="-120"/>
               </a:rPr>
-              <a:t>Word Labs  •  wordlabs.app  •  Suffix: '-tion' = act, state, or result</a:t>
+              <a:t>Word Labs  •  wordlabs.app  •  Suffix: '-tion' = act, process, or state</a:t>
             </a:r>
             <a:endParaRPr lang="en-US" sz="800" dirty="0"/>
           </a:p>
@@ -23155,7 +22933,7 @@
                 <a:ea typeface="Trebuchet MS" pitchFamily="34" charset="-122"/>
                 <a:cs typeface="Trebuchet MS" pitchFamily="34" charset="-120"/>
               </a:rPr>
-              <a:t>determination</a:t>
+              <a:t>concentration</a:t>
             </a:r>
             <a:endParaRPr lang="en-US" sz="2800" dirty="0"/>
           </a:p>
@@ -23294,7 +23072,7 @@
                 <a:ea typeface="Trebuchet MS" pitchFamily="34" charset="-122"/>
                 <a:cs typeface="Trebuchet MS" pitchFamily="34" charset="-120"/>
               </a:rPr>
-              <a:t>de</a:t>
+              <a:t>con</a:t>
             </a:r>
             <a:endParaRPr lang="en-US" sz="1300" dirty="0"/>
           </a:p>
@@ -23333,7 +23111,7 @@
                 <a:ea typeface="Calibri" pitchFamily="34" charset="-122"/>
                 <a:cs typeface="Calibri" pitchFamily="34" charset="-120"/>
               </a:rPr>
-              <a:t>completely</a:t>
+              <a:t>together / with</a:t>
             </a:r>
             <a:endParaRPr lang="en-US" sz="850" dirty="0"/>
           </a:p>
@@ -23406,7 +23184,7 @@
                 <a:ea typeface="Trebuchet MS" pitchFamily="34" charset="-122"/>
                 <a:cs typeface="Trebuchet MS" pitchFamily="34" charset="-120"/>
               </a:rPr>
-              <a:t>termin</a:t>
+              <a:t>centr</a:t>
             </a:r>
             <a:endParaRPr lang="en-US" sz="1300" dirty="0"/>
           </a:p>
@@ -23445,7 +23223,7 @@
                 <a:ea typeface="Calibri" pitchFamily="34" charset="-122"/>
                 <a:cs typeface="Calibri" pitchFamily="34" charset="-120"/>
               </a:rPr>
-              <a:t>limit or end</a:t>
+              <a:t>centre</a:t>
             </a:r>
             <a:endParaRPr lang="en-US" sz="850" dirty="0"/>
           </a:p>
@@ -23708,7 +23486,7 @@
                 <a:ea typeface="Calibri" pitchFamily="34" charset="-122"/>
                 <a:cs typeface="Calibri" pitchFamily="34" charset="-120"/>
               </a:rPr>
-              <a:t>act or state of</a:t>
+              <a:t>act or process</a:t>
             </a:r>
             <a:endParaRPr lang="en-US" sz="850" dirty="0"/>
           </a:p>
@@ -23815,8 +23593,8 @@
         </p:nvSpPr>
         <p:spPr>
           <a:xfrm>
-            <a:off x="1978152" y="3364992"/>
-            <a:ext cx="1225296" cy="475488"/>
+            <a:off x="1975104" y="3364992"/>
+            <a:ext cx="1554480" cy="475488"/>
           </a:xfrm>
           <a:prstGeom prst="rect">
             <a:avLst>
@@ -23842,8 +23620,8 @@
         </p:nvSpPr>
         <p:spPr>
           <a:xfrm>
-            <a:off x="1978152" y="3364992"/>
-            <a:ext cx="1225296" cy="475488"/>
+            <a:off x="1975104" y="3364992"/>
+            <a:ext cx="1554480" cy="475488"/>
           </a:xfrm>
           <a:prstGeom prst="rect">
             <a:avLst/>
@@ -23867,7 +23645,7 @@
                 <a:ea typeface="Trebuchet MS" pitchFamily="34" charset="-122"/>
                 <a:cs typeface="Trebuchet MS" pitchFamily="34" charset="-120"/>
               </a:rPr>
-              <a:t>de</a:t>
+              <a:t>con</a:t>
             </a:r>
             <a:endParaRPr lang="en-US" sz="1400" dirty="0"/>
           </a:p>
@@ -23881,8 +23659,8 @@
         </p:nvSpPr>
         <p:spPr>
           <a:xfrm>
-            <a:off x="3203448" y="3364992"/>
-            <a:ext cx="76200" cy="475488"/>
+            <a:off x="3529584" y="3364992"/>
+            <a:ext cx="73152" cy="475488"/>
           </a:xfrm>
           <a:prstGeom prst="rect">
             <a:avLst/>
@@ -23920,8 +23698,8 @@
         </p:nvSpPr>
         <p:spPr>
           <a:xfrm>
-            <a:off x="3279648" y="3364992"/>
-            <a:ext cx="1225296" cy="475488"/>
+            <a:off x="3602736" y="3364992"/>
+            <a:ext cx="1554480" cy="475488"/>
           </a:xfrm>
           <a:prstGeom prst="rect">
             <a:avLst>
@@ -23947,8 +23725,8 @@
         </p:nvSpPr>
         <p:spPr>
           <a:xfrm>
-            <a:off x="3279648" y="3364992"/>
-            <a:ext cx="1225296" cy="475488"/>
+            <a:off x="3602736" y="3364992"/>
+            <a:ext cx="1554480" cy="475488"/>
           </a:xfrm>
           <a:prstGeom prst="rect">
             <a:avLst/>
@@ -23972,7 +23750,7 @@
                 <a:ea typeface="Trebuchet MS" pitchFamily="34" charset="-122"/>
                 <a:cs typeface="Trebuchet MS" pitchFamily="34" charset="-120"/>
               </a:rPr>
-              <a:t>ter</a:t>
+              <a:t>cen</a:t>
             </a:r>
             <a:endParaRPr lang="en-US" sz="1400" dirty="0"/>
           </a:p>
@@ -23986,8 +23764,8 @@
         </p:nvSpPr>
         <p:spPr>
           <a:xfrm>
-            <a:off x="4504944" y="3364992"/>
-            <a:ext cx="76200" cy="475488"/>
+            <a:off x="5157216" y="3364992"/>
+            <a:ext cx="73152" cy="475488"/>
           </a:xfrm>
           <a:prstGeom prst="rect">
             <a:avLst/>
@@ -24025,8 +23803,8 @@
         </p:nvSpPr>
         <p:spPr>
           <a:xfrm>
-            <a:off x="4581144" y="3364992"/>
-            <a:ext cx="1225296" cy="475488"/>
+            <a:off x="5230368" y="3364992"/>
+            <a:ext cx="1554480" cy="475488"/>
           </a:xfrm>
           <a:prstGeom prst="rect">
             <a:avLst>
@@ -24052,8 +23830,8 @@
         </p:nvSpPr>
         <p:spPr>
           <a:xfrm>
-            <a:off x="4581144" y="3364992"/>
-            <a:ext cx="1225296" cy="475488"/>
+            <a:off x="5230368" y="3364992"/>
+            <a:ext cx="1554480" cy="475488"/>
           </a:xfrm>
           <a:prstGeom prst="rect">
             <a:avLst/>
@@ -24077,7 +23855,7 @@
                 <a:ea typeface="Trebuchet MS" pitchFamily="34" charset="-122"/>
                 <a:cs typeface="Trebuchet MS" pitchFamily="34" charset="-120"/>
               </a:rPr>
-              <a:t>mi</a:t>
+              <a:t>tra</a:t>
             </a:r>
             <a:endParaRPr lang="en-US" sz="1400" dirty="0"/>
           </a:p>
@@ -24091,8 +23869,8 @@
         </p:nvSpPr>
         <p:spPr>
           <a:xfrm>
-            <a:off x="5806440" y="3364992"/>
-            <a:ext cx="76200" cy="475488"/>
+            <a:off x="6784848" y="3364992"/>
+            <a:ext cx="73152" cy="475488"/>
           </a:xfrm>
           <a:prstGeom prst="rect">
             <a:avLst/>
@@ -24130,8 +23908,8 @@
         </p:nvSpPr>
         <p:spPr>
           <a:xfrm>
-            <a:off x="5882640" y="3364992"/>
-            <a:ext cx="1225296" cy="475488"/>
+            <a:off x="6858000" y="3364992"/>
+            <a:ext cx="1554480" cy="475488"/>
           </a:xfrm>
           <a:prstGeom prst="rect">
             <a:avLst>
@@ -24157,8 +23935,8 @@
         </p:nvSpPr>
         <p:spPr>
           <a:xfrm>
-            <a:off x="5882640" y="3364992"/>
-            <a:ext cx="1225296" cy="475488"/>
+            <a:off x="6858000" y="3364992"/>
+            <a:ext cx="1554480" cy="475488"/>
           </a:xfrm>
           <a:prstGeom prst="rect">
             <a:avLst/>
@@ -24182,7 +23960,7 @@
                 <a:ea typeface="Trebuchet MS" pitchFamily="34" charset="-122"/>
                 <a:cs typeface="Trebuchet MS" pitchFamily="34" charset="-120"/>
               </a:rPr>
-              <a:t>na</a:t>
+              <a:t>tion</a:t>
             </a:r>
             <a:endParaRPr lang="en-US" sz="1400" dirty="0"/>
           </a:p>
@@ -24190,193 +23968,286 @@
       </p:sp>
       <p:sp>
         <p:nvSpPr>
-          <p:cNvPr id="43" name="Text 41"/>
-          <p:cNvSpPr/>
-          <p:nvPr/>
-        </p:nvSpPr>
-        <p:spPr>
-          <a:xfrm>
-            <a:off x="7107936" y="3364992"/>
-            <a:ext cx="76200" cy="475488"/>
-          </a:xfrm>
-          <a:prstGeom prst="rect">
-            <a:avLst/>
-          </a:prstGeom>
-          <a:noFill/>
-          <a:ln/>
-        </p:spPr>
-        <p:txBody>
-          <a:bodyPr wrap="square" lIns="0" tIns="0" rIns="0" bIns="0" rtlCol="0" anchor="ctr"/>
-          <a:lstStyle/>
-          <a:p>
-            <a:pPr algn="ctr" indent="0" marL="0">
-              <a:buNone/>
-            </a:pPr>
-            <a:r>
-              <a:rPr lang="en-US" sz="1600" b="1" dirty="0">
-                <a:solidFill>
-                  <a:srgbClr val="0D9488"/>
+          <p:cNvPr id="43" name="Shape 41"/>
+          <p:cNvSpPr/>
+          <p:nvPr/>
+        </p:nvSpPr>
+        <p:spPr>
+          <a:xfrm>
+            <a:off x="365760" y="4096512"/>
+            <a:ext cx="1371600" cy="804672"/>
+          </a:xfrm>
+          <a:prstGeom prst="rect">
+            <a:avLst>
+              <a:gd name="adj" fmla="val 6818"/>
+            </a:avLst>
+          </a:prstGeom>
+          <a:solidFill>
+            <a:srgbClr val="E2E8F0"/>
+          </a:solidFill>
+          <a:ln w="12700">
+            <a:solidFill>
+              <a:srgbClr val="E2E8F0"/>
+            </a:solidFill>
+            <a:prstDash val="solid"/>
+          </a:ln>
+        </p:spPr>
+      </p:sp>
+      <p:sp>
+        <p:nvSpPr>
+          <p:cNvPr id="44" name="Text 42"/>
+          <p:cNvSpPr/>
+          <p:nvPr/>
+        </p:nvSpPr>
+        <p:spPr>
+          <a:xfrm>
+            <a:off x="365760" y="4096512"/>
+            <a:ext cx="1371600" cy="804672"/>
+          </a:xfrm>
+          <a:prstGeom prst="rect">
+            <a:avLst/>
+          </a:prstGeom>
+          <a:noFill/>
+          <a:ln/>
+        </p:spPr>
+        <p:txBody>
+          <a:bodyPr wrap="square" lIns="0" tIns="0" rIns="0" bIns="0" rtlCol="0" anchor="ctr"/>
+          <a:lstStyle/>
+          <a:p>
+            <a:pPr algn="ctr" indent="0" marL="0">
+              <a:buNone/>
+            </a:pPr>
+            <a:r>
+              <a:rPr lang="en-US" sz="1100" b="1" dirty="0">
+                <a:solidFill>
+                  <a:srgbClr val="475569"/>
                 </a:solidFill>
                 <a:latin typeface="Trebuchet MS" pitchFamily="34" charset="0"/>
                 <a:ea typeface="Trebuchet MS" pitchFamily="34" charset="-122"/>
                 <a:cs typeface="Trebuchet MS" pitchFamily="34" charset="-120"/>
               </a:rPr>
-              <a:t>·</a:t>
-            </a:r>
-            <a:endParaRPr lang="en-US" sz="1600" dirty="0"/>
-          </a:p>
-        </p:txBody>
-      </p:sp>
-      <p:sp>
-        <p:nvSpPr>
-          <p:cNvPr id="44" name="Shape 42"/>
-          <p:cNvSpPr/>
-          <p:nvPr/>
-        </p:nvSpPr>
-        <p:spPr>
-          <a:xfrm>
-            <a:off x="7184136" y="3364992"/>
-            <a:ext cx="1225296" cy="475488"/>
+              <a:t>Phonemes</a:t>
+            </a:r>
+            <a:endParaRPr lang="en-US" sz="1100" dirty="0"/>
+          </a:p>
+        </p:txBody>
+      </p:sp>
+      <p:sp>
+        <p:nvSpPr>
+          <p:cNvPr id="45" name="Shape 43"/>
+          <p:cNvSpPr/>
+          <p:nvPr/>
+        </p:nvSpPr>
+        <p:spPr>
+          <a:xfrm>
+            <a:off x="1874520" y="4096512"/>
+            <a:ext cx="6903720" cy="804672"/>
           </a:xfrm>
           <a:prstGeom prst="rect">
             <a:avLst>
-              <a:gd name="adj" fmla="val 9615"/>
+              <a:gd name="adj" fmla="val 6818"/>
             </a:avLst>
           </a:prstGeom>
           <a:solidFill>
+            <a:srgbClr val="FCE7F3"/>
+          </a:solidFill>
+          <a:ln w="12700">
+            <a:solidFill>
+              <a:srgbClr val="DB2777"/>
+            </a:solidFill>
+            <a:prstDash val="solid"/>
+          </a:ln>
+        </p:spPr>
+      </p:sp>
+      <p:sp>
+        <p:nvSpPr>
+          <p:cNvPr id="46" name="Shape 44"/>
+          <p:cNvSpPr/>
+          <p:nvPr/>
+        </p:nvSpPr>
+        <p:spPr>
+          <a:xfrm>
+            <a:off x="1952244" y="4169664"/>
+            <a:ext cx="543652" cy="384048"/>
+          </a:xfrm>
+          <a:prstGeom prst="rect">
+            <a:avLst>
+              <a:gd name="adj" fmla="val 9524"/>
+            </a:avLst>
+          </a:prstGeom>
+          <a:solidFill>
             <a:srgbClr val="FFFFFF"/>
           </a:solidFill>
           <a:ln w="12700">
             <a:solidFill>
-              <a:srgbClr val="0D9488"/>
-            </a:solidFill>
-            <a:prstDash val="solid"/>
-          </a:ln>
-        </p:spPr>
-      </p:sp>
-      <p:sp>
-        <p:nvSpPr>
-          <p:cNvPr id="45" name="Text 43"/>
-          <p:cNvSpPr/>
-          <p:nvPr/>
-        </p:nvSpPr>
-        <p:spPr>
-          <a:xfrm>
-            <a:off x="7184136" y="3364992"/>
-            <a:ext cx="1225296" cy="475488"/>
-          </a:xfrm>
-          <a:prstGeom prst="rect">
-            <a:avLst/>
-          </a:prstGeom>
-          <a:noFill/>
-          <a:ln/>
-        </p:spPr>
-        <p:txBody>
-          <a:bodyPr wrap="square" lIns="0" tIns="0" rIns="0" bIns="0" rtlCol="0" anchor="ctr"/>
-          <a:lstStyle/>
-          <a:p>
-            <a:pPr algn="ctr" indent="0" marL="0">
-              <a:buNone/>
-            </a:pPr>
-            <a:r>
-              <a:rPr lang="en-US" sz="1400" b="1" dirty="0">
-                <a:solidFill>
-                  <a:srgbClr val="0D9488"/>
+              <a:srgbClr val="DB2777"/>
+            </a:solidFill>
+            <a:prstDash val="solid"/>
+          </a:ln>
+        </p:spPr>
+      </p:sp>
+      <p:sp>
+        <p:nvSpPr>
+          <p:cNvPr id="47" name="Text 45"/>
+          <p:cNvSpPr/>
+          <p:nvPr/>
+        </p:nvSpPr>
+        <p:spPr>
+          <a:xfrm>
+            <a:off x="1952244" y="4169664"/>
+            <a:ext cx="543652" cy="384048"/>
+          </a:xfrm>
+          <a:prstGeom prst="rect">
+            <a:avLst/>
+          </a:prstGeom>
+          <a:noFill/>
+          <a:ln/>
+        </p:spPr>
+        <p:txBody>
+          <a:bodyPr wrap="square" lIns="0" tIns="0" rIns="0" bIns="0" rtlCol="0" anchor="ctr"/>
+          <a:lstStyle/>
+          <a:p>
+            <a:pPr algn="ctr" indent="0" marL="0">
+              <a:buNone/>
+            </a:pPr>
+            <a:r>
+              <a:rPr lang="en-US" sz="900" b="1" dirty="0">
+                <a:solidFill>
+                  <a:srgbClr val="9D174D"/>
                 </a:solidFill>
                 <a:latin typeface="Trebuchet MS" pitchFamily="34" charset="0"/>
                 <a:ea typeface="Trebuchet MS" pitchFamily="34" charset="-122"/>
                 <a:cs typeface="Trebuchet MS" pitchFamily="34" charset="-120"/>
               </a:rPr>
-              <a:t>tion</a:t>
-            </a:r>
-            <a:endParaRPr lang="en-US" sz="1400" dirty="0"/>
-          </a:p>
-        </p:txBody>
-      </p:sp>
-      <p:sp>
-        <p:nvSpPr>
-          <p:cNvPr id="46" name="Shape 44"/>
-          <p:cNvSpPr/>
-          <p:nvPr/>
-        </p:nvSpPr>
-        <p:spPr>
-          <a:xfrm>
-            <a:off x="365760" y="4096512"/>
-            <a:ext cx="1371600" cy="658368"/>
+              <a:t>c</a:t>
+            </a:r>
+            <a:endParaRPr lang="en-US" sz="900" dirty="0"/>
+          </a:p>
+        </p:txBody>
+      </p:sp>
+      <p:sp>
+        <p:nvSpPr>
+          <p:cNvPr id="48" name="Text 46"/>
+          <p:cNvSpPr/>
+          <p:nvPr/>
+        </p:nvSpPr>
+        <p:spPr>
+          <a:xfrm>
+            <a:off x="1952244" y="4572000"/>
+            <a:ext cx="543652" cy="219456"/>
+          </a:xfrm>
+          <a:prstGeom prst="rect">
+            <a:avLst/>
+          </a:prstGeom>
+          <a:noFill/>
+          <a:ln/>
+        </p:spPr>
+        <p:txBody>
+          <a:bodyPr wrap="square" lIns="0" tIns="0" rIns="0" bIns="0" rtlCol="0" anchor="t"/>
+          <a:lstStyle/>
+          <a:p>
+            <a:pPr algn="ctr" indent="0" marL="0">
+              <a:buNone/>
+            </a:pPr>
+            <a:r>
+              <a:rPr lang="en-US" sz="750" i="1" dirty="0">
+                <a:solidFill>
+                  <a:srgbClr val="94A3B8"/>
+                </a:solidFill>
+                <a:latin typeface="Calibri" pitchFamily="34" charset="0"/>
+                <a:ea typeface="Calibri" pitchFamily="34" charset="-122"/>
+                <a:cs typeface="Calibri" pitchFamily="34" charset="-120"/>
+              </a:rPr>
+              <a:t>/k/</a:t>
+            </a:r>
+            <a:endParaRPr lang="en-US" sz="750" dirty="0"/>
+          </a:p>
+        </p:txBody>
+      </p:sp>
+      <p:sp>
+        <p:nvSpPr>
+          <p:cNvPr id="49" name="Shape 47"/>
+          <p:cNvSpPr/>
+          <p:nvPr/>
+        </p:nvSpPr>
+        <p:spPr>
+          <a:xfrm>
+            <a:off x="2546188" y="4169664"/>
+            <a:ext cx="543652" cy="384048"/>
           </a:xfrm>
           <a:prstGeom prst="rect">
             <a:avLst>
-              <a:gd name="adj" fmla="val 8333"/>
+              <a:gd name="adj" fmla="val 9524"/>
             </a:avLst>
           </a:prstGeom>
           <a:solidFill>
-            <a:srgbClr val="E2E8F0"/>
-          </a:solidFill>
-          <a:ln w="12700">
-            <a:solidFill>
-              <a:srgbClr val="E2E8F0"/>
-            </a:solidFill>
-            <a:prstDash val="solid"/>
-          </a:ln>
-        </p:spPr>
-      </p:sp>
-      <p:sp>
-        <p:nvSpPr>
-          <p:cNvPr id="47" name="Text 45"/>
-          <p:cNvSpPr/>
-          <p:nvPr/>
-        </p:nvSpPr>
-        <p:spPr>
-          <a:xfrm>
-            <a:off x="365760" y="4096512"/>
-            <a:ext cx="1371600" cy="658368"/>
-          </a:xfrm>
-          <a:prstGeom prst="rect">
-            <a:avLst/>
-          </a:prstGeom>
-          <a:noFill/>
-          <a:ln/>
-        </p:spPr>
-        <p:txBody>
-          <a:bodyPr wrap="square" lIns="0" tIns="0" rIns="0" bIns="0" rtlCol="0" anchor="ctr"/>
-          <a:lstStyle/>
-          <a:p>
-            <a:pPr algn="ctr" indent="0" marL="0">
-              <a:buNone/>
-            </a:pPr>
-            <a:r>
-              <a:rPr lang="en-US" sz="1100" b="1" dirty="0">
-                <a:solidFill>
-                  <a:srgbClr val="475569"/>
+            <a:srgbClr val="FFFFFF"/>
+          </a:solidFill>
+          <a:ln w="12700">
+            <a:solidFill>
+              <a:srgbClr val="DB2777"/>
+            </a:solidFill>
+            <a:prstDash val="solid"/>
+          </a:ln>
+        </p:spPr>
+      </p:sp>
+      <p:sp>
+        <p:nvSpPr>
+          <p:cNvPr id="50" name="Text 48"/>
+          <p:cNvSpPr/>
+          <p:nvPr/>
+        </p:nvSpPr>
+        <p:spPr>
+          <a:xfrm>
+            <a:off x="2546188" y="4169664"/>
+            <a:ext cx="543652" cy="384048"/>
+          </a:xfrm>
+          <a:prstGeom prst="rect">
+            <a:avLst/>
+          </a:prstGeom>
+          <a:noFill/>
+          <a:ln/>
+        </p:spPr>
+        <p:txBody>
+          <a:bodyPr wrap="square" lIns="0" tIns="0" rIns="0" bIns="0" rtlCol="0" anchor="ctr"/>
+          <a:lstStyle/>
+          <a:p>
+            <a:pPr algn="ctr" indent="0" marL="0">
+              <a:buNone/>
+            </a:pPr>
+            <a:r>
+              <a:rPr lang="en-US" sz="900" b="1" dirty="0">
+                <a:solidFill>
+                  <a:srgbClr val="9D174D"/>
                 </a:solidFill>
                 <a:latin typeface="Trebuchet MS" pitchFamily="34" charset="0"/>
                 <a:ea typeface="Trebuchet MS" pitchFamily="34" charset="-122"/>
                 <a:cs typeface="Trebuchet MS" pitchFamily="34" charset="-120"/>
               </a:rPr>
-              <a:t>Phonemes</a:t>
-            </a:r>
-            <a:endParaRPr lang="en-US" sz="1100" dirty="0"/>
-          </a:p>
-        </p:txBody>
-      </p:sp>
-      <p:sp>
-        <p:nvSpPr>
-          <p:cNvPr id="48" name="Shape 46"/>
-          <p:cNvSpPr/>
-          <p:nvPr/>
-        </p:nvSpPr>
-        <p:spPr>
-          <a:xfrm>
-            <a:off x="1874520" y="4096512"/>
-            <a:ext cx="6903720" cy="658368"/>
+              <a:t>o</a:t>
+            </a:r>
+            <a:endParaRPr lang="en-US" sz="900" dirty="0"/>
+          </a:p>
+        </p:txBody>
+      </p:sp>
+      <p:sp>
+        <p:nvSpPr>
+          <p:cNvPr id="51" name="Shape 49"/>
+          <p:cNvSpPr/>
+          <p:nvPr/>
+        </p:nvSpPr>
+        <p:spPr>
+          <a:xfrm>
+            <a:off x="3140133" y="4169664"/>
+            <a:ext cx="543652" cy="384048"/>
           </a:xfrm>
           <a:prstGeom prst="rect">
             <a:avLst>
-              <a:gd name="adj" fmla="val 8333"/>
+              <a:gd name="adj" fmla="val 9524"/>
             </a:avLst>
           </a:prstGeom>
           <a:solidFill>
-            <a:srgbClr val="FCE7F3"/>
+            <a:srgbClr val="FFFFFF"/>
           </a:solidFill>
           <a:ln w="12700">
             <a:solidFill>
@@ -24388,41 +24259,14 @@
       </p:sp>
       <p:sp>
         <p:nvSpPr>
-          <p:cNvPr id="49" name="Shape 47"/>
-          <p:cNvSpPr/>
-          <p:nvPr/>
-        </p:nvSpPr>
-        <p:spPr>
-          <a:xfrm>
-            <a:off x="1952244" y="4187952"/>
-            <a:ext cx="543652" cy="475488"/>
-          </a:xfrm>
-          <a:prstGeom prst="rect">
-            <a:avLst>
-              <a:gd name="adj" fmla="val 7692"/>
-            </a:avLst>
-          </a:prstGeom>
-          <a:solidFill>
-            <a:srgbClr val="FFFFFF"/>
-          </a:solidFill>
-          <a:ln w="12700">
-            <a:solidFill>
-              <a:srgbClr val="DB2777"/>
-            </a:solidFill>
-            <a:prstDash val="solid"/>
-          </a:ln>
-        </p:spPr>
-      </p:sp>
-      <p:sp>
-        <p:nvSpPr>
-          <p:cNvPr id="50" name="Text 48"/>
-          <p:cNvSpPr/>
-          <p:nvPr/>
-        </p:nvSpPr>
-        <p:spPr>
-          <a:xfrm>
-            <a:off x="1952244" y="4187952"/>
-            <a:ext cx="543652" cy="475488"/>
+          <p:cNvPr id="52" name="Text 50"/>
+          <p:cNvSpPr/>
+          <p:nvPr/>
+        </p:nvSpPr>
+        <p:spPr>
+          <a:xfrm>
+            <a:off x="3140133" y="4169664"/>
+            <a:ext cx="543652" cy="384048"/>
           </a:xfrm>
           <a:prstGeom prst="rect">
             <a:avLst/>
@@ -24446,7 +24290,7 @@
                 <a:ea typeface="Trebuchet MS" pitchFamily="34" charset="-122"/>
                 <a:cs typeface="Trebuchet MS" pitchFamily="34" charset="-120"/>
               </a:rPr>
-              <a:t>d</a:t>
+              <a:t>n</a:t>
             </a:r>
             <a:endParaRPr lang="en-US" sz="900" dirty="0"/>
           </a:p>
@@ -24454,18 +24298,18 @@
       </p:sp>
       <p:sp>
         <p:nvSpPr>
-          <p:cNvPr id="51" name="Shape 49"/>
-          <p:cNvSpPr/>
-          <p:nvPr/>
-        </p:nvSpPr>
-        <p:spPr>
-          <a:xfrm>
-            <a:off x="2546188" y="4187952"/>
-            <a:ext cx="543652" cy="475488"/>
+          <p:cNvPr id="53" name="Shape 51"/>
+          <p:cNvSpPr/>
+          <p:nvPr/>
+        </p:nvSpPr>
+        <p:spPr>
+          <a:xfrm>
+            <a:off x="3734077" y="4169664"/>
+            <a:ext cx="543652" cy="384048"/>
           </a:xfrm>
           <a:prstGeom prst="rect">
             <a:avLst>
-              <a:gd name="adj" fmla="val 7692"/>
+              <a:gd name="adj" fmla="val 9524"/>
             </a:avLst>
           </a:prstGeom>
           <a:solidFill>
@@ -24481,14 +24325,14 @@
       </p:sp>
       <p:sp>
         <p:nvSpPr>
-          <p:cNvPr id="52" name="Text 50"/>
-          <p:cNvSpPr/>
-          <p:nvPr/>
-        </p:nvSpPr>
-        <p:spPr>
-          <a:xfrm>
-            <a:off x="2546188" y="4187952"/>
-            <a:ext cx="543652" cy="475488"/>
+          <p:cNvPr id="54" name="Text 52"/>
+          <p:cNvSpPr/>
+          <p:nvPr/>
+        </p:nvSpPr>
+        <p:spPr>
+          <a:xfrm>
+            <a:off x="3734077" y="4169664"/>
+            <a:ext cx="543652" cy="384048"/>
           </a:xfrm>
           <a:prstGeom prst="rect">
             <a:avLst/>
@@ -24512,7 +24356,7 @@
                 <a:ea typeface="Trebuchet MS" pitchFamily="34" charset="-122"/>
                 <a:cs typeface="Trebuchet MS" pitchFamily="34" charset="-120"/>
               </a:rPr>
-              <a:t>e</a:t>
+              <a:t>c</a:t>
             </a:r>
             <a:endParaRPr lang="en-US" sz="900" dirty="0"/>
           </a:p>
@@ -24520,18 +24364,57 @@
       </p:sp>
       <p:sp>
         <p:nvSpPr>
-          <p:cNvPr id="53" name="Shape 51"/>
-          <p:cNvSpPr/>
-          <p:nvPr/>
-        </p:nvSpPr>
-        <p:spPr>
-          <a:xfrm>
-            <a:off x="3140133" y="4187952"/>
-            <a:ext cx="543652" cy="475488"/>
+          <p:cNvPr id="55" name="Text 53"/>
+          <p:cNvSpPr/>
+          <p:nvPr/>
+        </p:nvSpPr>
+        <p:spPr>
+          <a:xfrm>
+            <a:off x="3734077" y="4572000"/>
+            <a:ext cx="543652" cy="219456"/>
+          </a:xfrm>
+          <a:prstGeom prst="rect">
+            <a:avLst/>
+          </a:prstGeom>
+          <a:noFill/>
+          <a:ln/>
+        </p:spPr>
+        <p:txBody>
+          <a:bodyPr wrap="square" lIns="0" tIns="0" rIns="0" bIns="0" rtlCol="0" anchor="t"/>
+          <a:lstStyle/>
+          <a:p>
+            <a:pPr algn="ctr" indent="0" marL="0">
+              <a:buNone/>
+            </a:pPr>
+            <a:r>
+              <a:rPr lang="en-US" sz="750" i="1" dirty="0">
+                <a:solidFill>
+                  <a:srgbClr val="94A3B8"/>
+                </a:solidFill>
+                <a:latin typeface="Calibri" pitchFamily="34" charset="0"/>
+                <a:ea typeface="Calibri" pitchFamily="34" charset="-122"/>
+                <a:cs typeface="Calibri" pitchFamily="34" charset="-120"/>
+              </a:rPr>
+              <a:t>/s/</a:t>
+            </a:r>
+            <a:endParaRPr lang="en-US" sz="750" dirty="0"/>
+          </a:p>
+        </p:txBody>
+      </p:sp>
+      <p:sp>
+        <p:nvSpPr>
+          <p:cNvPr id="56" name="Shape 54"/>
+          <p:cNvSpPr/>
+          <p:nvPr/>
+        </p:nvSpPr>
+        <p:spPr>
+          <a:xfrm>
+            <a:off x="4328021" y="4169664"/>
+            <a:ext cx="543652" cy="384048"/>
           </a:xfrm>
           <a:prstGeom prst="rect">
             <a:avLst>
-              <a:gd name="adj" fmla="val 7692"/>
+              <a:gd name="adj" fmla="val 9524"/>
             </a:avLst>
           </a:prstGeom>
           <a:solidFill>
@@ -24547,14 +24430,14 @@
       </p:sp>
       <p:sp>
         <p:nvSpPr>
-          <p:cNvPr id="54" name="Text 52"/>
-          <p:cNvSpPr/>
-          <p:nvPr/>
-        </p:nvSpPr>
-        <p:spPr>
-          <a:xfrm>
-            <a:off x="3140133" y="4187952"/>
-            <a:ext cx="543652" cy="475488"/>
+          <p:cNvPr id="57" name="Text 55"/>
+          <p:cNvSpPr/>
+          <p:nvPr/>
+        </p:nvSpPr>
+        <p:spPr>
+          <a:xfrm>
+            <a:off x="4328021" y="4169664"/>
+            <a:ext cx="543652" cy="384048"/>
           </a:xfrm>
           <a:prstGeom prst="rect">
             <a:avLst/>
@@ -24578,7 +24461,7 @@
                 <a:ea typeface="Trebuchet MS" pitchFamily="34" charset="-122"/>
                 <a:cs typeface="Trebuchet MS" pitchFamily="34" charset="-120"/>
               </a:rPr>
-              <a:t>t</a:t>
+              <a:t>e</a:t>
             </a:r>
             <a:endParaRPr lang="en-US" sz="900" dirty="0"/>
           </a:p>
@@ -24586,18 +24469,18 @@
       </p:sp>
       <p:sp>
         <p:nvSpPr>
-          <p:cNvPr id="55" name="Shape 53"/>
-          <p:cNvSpPr/>
-          <p:nvPr/>
-        </p:nvSpPr>
-        <p:spPr>
-          <a:xfrm>
-            <a:off x="3734077" y="4187952"/>
-            <a:ext cx="543652" cy="475488"/>
+          <p:cNvPr id="58" name="Shape 56"/>
+          <p:cNvSpPr/>
+          <p:nvPr/>
+        </p:nvSpPr>
+        <p:spPr>
+          <a:xfrm>
+            <a:off x="4921966" y="4169664"/>
+            <a:ext cx="543652" cy="384048"/>
           </a:xfrm>
           <a:prstGeom prst="rect">
             <a:avLst>
-              <a:gd name="adj" fmla="val 7692"/>
+              <a:gd name="adj" fmla="val 9524"/>
             </a:avLst>
           </a:prstGeom>
           <a:solidFill>
@@ -24613,14 +24496,14 @@
       </p:sp>
       <p:sp>
         <p:nvSpPr>
-          <p:cNvPr id="56" name="Text 54"/>
-          <p:cNvSpPr/>
-          <p:nvPr/>
-        </p:nvSpPr>
-        <p:spPr>
-          <a:xfrm>
-            <a:off x="3734077" y="4187952"/>
-            <a:ext cx="543652" cy="475488"/>
+          <p:cNvPr id="59" name="Text 57"/>
+          <p:cNvSpPr/>
+          <p:nvPr/>
+        </p:nvSpPr>
+        <p:spPr>
+          <a:xfrm>
+            <a:off x="4921966" y="4169664"/>
+            <a:ext cx="543652" cy="384048"/>
           </a:xfrm>
           <a:prstGeom prst="rect">
             <a:avLst/>
@@ -24644,7 +24527,7 @@
                 <a:ea typeface="Trebuchet MS" pitchFamily="34" charset="-122"/>
                 <a:cs typeface="Trebuchet MS" pitchFamily="34" charset="-120"/>
               </a:rPr>
-              <a:t>er</a:t>
+              <a:t>n</a:t>
             </a:r>
             <a:endParaRPr lang="en-US" sz="900" dirty="0"/>
           </a:p>
@@ -24652,18 +24535,18 @@
       </p:sp>
       <p:sp>
         <p:nvSpPr>
-          <p:cNvPr id="57" name="Shape 55"/>
-          <p:cNvSpPr/>
-          <p:nvPr/>
-        </p:nvSpPr>
-        <p:spPr>
-          <a:xfrm>
-            <a:off x="4328021" y="4187952"/>
-            <a:ext cx="543652" cy="475488"/>
+          <p:cNvPr id="60" name="Shape 58"/>
+          <p:cNvSpPr/>
+          <p:nvPr/>
+        </p:nvSpPr>
+        <p:spPr>
+          <a:xfrm>
+            <a:off x="5515910" y="4169664"/>
+            <a:ext cx="543652" cy="384048"/>
           </a:xfrm>
           <a:prstGeom prst="rect">
             <a:avLst>
-              <a:gd name="adj" fmla="val 7692"/>
+              <a:gd name="adj" fmla="val 9524"/>
             </a:avLst>
           </a:prstGeom>
           <a:solidFill>
@@ -24679,14 +24562,14 @@
       </p:sp>
       <p:sp>
         <p:nvSpPr>
-          <p:cNvPr id="58" name="Text 56"/>
-          <p:cNvSpPr/>
-          <p:nvPr/>
-        </p:nvSpPr>
-        <p:spPr>
-          <a:xfrm>
-            <a:off x="4328021" y="4187952"/>
-            <a:ext cx="543652" cy="475488"/>
+          <p:cNvPr id="61" name="Text 59"/>
+          <p:cNvSpPr/>
+          <p:nvPr/>
+        </p:nvSpPr>
+        <p:spPr>
+          <a:xfrm>
+            <a:off x="5515910" y="4169664"/>
+            <a:ext cx="543652" cy="384048"/>
           </a:xfrm>
           <a:prstGeom prst="rect">
             <a:avLst/>
@@ -24710,7 +24593,7 @@
                 <a:ea typeface="Trebuchet MS" pitchFamily="34" charset="-122"/>
                 <a:cs typeface="Trebuchet MS" pitchFamily="34" charset="-120"/>
               </a:rPr>
-              <a:t>m</a:t>
+              <a:t>tr</a:t>
             </a:r>
             <a:endParaRPr lang="en-US" sz="900" dirty="0"/>
           </a:p>
@@ -24718,18 +24601,18 @@
       </p:sp>
       <p:sp>
         <p:nvSpPr>
-          <p:cNvPr id="59" name="Shape 57"/>
-          <p:cNvSpPr/>
-          <p:nvPr/>
-        </p:nvSpPr>
-        <p:spPr>
-          <a:xfrm>
-            <a:off x="4921966" y="4187952"/>
-            <a:ext cx="543652" cy="475488"/>
+          <p:cNvPr id="62" name="Shape 60"/>
+          <p:cNvSpPr/>
+          <p:nvPr/>
+        </p:nvSpPr>
+        <p:spPr>
+          <a:xfrm>
+            <a:off x="6109855" y="4169664"/>
+            <a:ext cx="543652" cy="384048"/>
           </a:xfrm>
           <a:prstGeom prst="rect">
             <a:avLst>
-              <a:gd name="adj" fmla="val 7692"/>
+              <a:gd name="adj" fmla="val 9524"/>
             </a:avLst>
           </a:prstGeom>
           <a:solidFill>
@@ -24745,14 +24628,14 @@
       </p:sp>
       <p:sp>
         <p:nvSpPr>
-          <p:cNvPr id="60" name="Text 58"/>
-          <p:cNvSpPr/>
-          <p:nvPr/>
-        </p:nvSpPr>
-        <p:spPr>
-          <a:xfrm>
-            <a:off x="4921966" y="4187952"/>
-            <a:ext cx="543652" cy="475488"/>
+          <p:cNvPr id="63" name="Text 61"/>
+          <p:cNvSpPr/>
+          <p:nvPr/>
+        </p:nvSpPr>
+        <p:spPr>
+          <a:xfrm>
+            <a:off x="6109855" y="4169664"/>
+            <a:ext cx="543652" cy="384048"/>
           </a:xfrm>
           <a:prstGeom prst="rect">
             <a:avLst/>
@@ -24776,7 +24659,7 @@
                 <a:ea typeface="Trebuchet MS" pitchFamily="34" charset="-122"/>
                 <a:cs typeface="Trebuchet MS" pitchFamily="34" charset="-120"/>
               </a:rPr>
-              <a:t>i</a:t>
+              <a:t>a</a:t>
             </a:r>
             <a:endParaRPr lang="en-US" sz="900" dirty="0"/>
           </a:p>
@@ -24784,18 +24667,18 @@
       </p:sp>
       <p:sp>
         <p:nvSpPr>
-          <p:cNvPr id="61" name="Shape 59"/>
-          <p:cNvSpPr/>
-          <p:nvPr/>
-        </p:nvSpPr>
-        <p:spPr>
-          <a:xfrm>
-            <a:off x="5515910" y="4187952"/>
-            <a:ext cx="543652" cy="475488"/>
+          <p:cNvPr id="64" name="Shape 62"/>
+          <p:cNvSpPr/>
+          <p:nvPr/>
+        </p:nvSpPr>
+        <p:spPr>
+          <a:xfrm>
+            <a:off x="6703799" y="4169664"/>
+            <a:ext cx="543652" cy="384048"/>
           </a:xfrm>
           <a:prstGeom prst="rect">
             <a:avLst>
-              <a:gd name="adj" fmla="val 7692"/>
+              <a:gd name="adj" fmla="val 9524"/>
             </a:avLst>
           </a:prstGeom>
           <a:solidFill>
@@ -24811,14 +24694,14 @@
       </p:sp>
       <p:sp>
         <p:nvSpPr>
-          <p:cNvPr id="62" name="Text 60"/>
-          <p:cNvSpPr/>
-          <p:nvPr/>
-        </p:nvSpPr>
-        <p:spPr>
-          <a:xfrm>
-            <a:off x="5515910" y="4187952"/>
-            <a:ext cx="543652" cy="475488"/>
+          <p:cNvPr id="65" name="Text 63"/>
+          <p:cNvSpPr/>
+          <p:nvPr/>
+        </p:nvSpPr>
+        <p:spPr>
+          <a:xfrm>
+            <a:off x="6703799" y="4169664"/>
+            <a:ext cx="543652" cy="384048"/>
           </a:xfrm>
           <a:prstGeom prst="rect">
             <a:avLst/>
@@ -24842,7 +24725,7 @@
                 <a:ea typeface="Trebuchet MS" pitchFamily="34" charset="-122"/>
                 <a:cs typeface="Trebuchet MS" pitchFamily="34" charset="-120"/>
               </a:rPr>
-              <a:t>n</a:t>
+              <a:t>t</a:t>
             </a:r>
             <a:endParaRPr lang="en-US" sz="900" dirty="0"/>
           </a:p>
@@ -24850,18 +24733,57 @@
       </p:sp>
       <p:sp>
         <p:nvSpPr>
-          <p:cNvPr id="63" name="Shape 61"/>
-          <p:cNvSpPr/>
-          <p:nvPr/>
-        </p:nvSpPr>
-        <p:spPr>
-          <a:xfrm>
-            <a:off x="6109855" y="4187952"/>
-            <a:ext cx="543652" cy="475488"/>
+          <p:cNvPr id="66" name="Text 64"/>
+          <p:cNvSpPr/>
+          <p:nvPr/>
+        </p:nvSpPr>
+        <p:spPr>
+          <a:xfrm>
+            <a:off x="6703799" y="4572000"/>
+            <a:ext cx="543652" cy="219456"/>
+          </a:xfrm>
+          <a:prstGeom prst="rect">
+            <a:avLst/>
+          </a:prstGeom>
+          <a:noFill/>
+          <a:ln/>
+        </p:spPr>
+        <p:txBody>
+          <a:bodyPr wrap="square" lIns="0" tIns="0" rIns="0" bIns="0" rtlCol="0" anchor="t"/>
+          <a:lstStyle/>
+          <a:p>
+            <a:pPr algn="ctr" indent="0" marL="0">
+              <a:buNone/>
+            </a:pPr>
+            <a:r>
+              <a:rPr lang="en-US" sz="750" i="1" dirty="0">
+                <a:solidFill>
+                  <a:srgbClr val="94A3B8"/>
+                </a:solidFill>
+                <a:latin typeface="Calibri" pitchFamily="34" charset="0"/>
+                <a:ea typeface="Calibri" pitchFamily="34" charset="-122"/>
+                <a:cs typeface="Calibri" pitchFamily="34" charset="-120"/>
+              </a:rPr>
+              <a:t>/sh/</a:t>
+            </a:r>
+            <a:endParaRPr lang="en-US" sz="750" dirty="0"/>
+          </a:p>
+        </p:txBody>
+      </p:sp>
+      <p:sp>
+        <p:nvSpPr>
+          <p:cNvPr id="67" name="Shape 65"/>
+          <p:cNvSpPr/>
+          <p:nvPr/>
+        </p:nvSpPr>
+        <p:spPr>
+          <a:xfrm>
+            <a:off x="7297743" y="4169664"/>
+            <a:ext cx="543652" cy="384048"/>
           </a:xfrm>
           <a:prstGeom prst="rect">
             <a:avLst>
-              <a:gd name="adj" fmla="val 7692"/>
+              <a:gd name="adj" fmla="val 9524"/>
             </a:avLst>
           </a:prstGeom>
           <a:solidFill>
@@ -24877,14 +24799,14 @@
       </p:sp>
       <p:sp>
         <p:nvSpPr>
-          <p:cNvPr id="64" name="Text 62"/>
-          <p:cNvSpPr/>
-          <p:nvPr/>
-        </p:nvSpPr>
-        <p:spPr>
-          <a:xfrm>
-            <a:off x="6109855" y="4187952"/>
-            <a:ext cx="543652" cy="475488"/>
+          <p:cNvPr id="68" name="Text 66"/>
+          <p:cNvSpPr/>
+          <p:nvPr/>
+        </p:nvSpPr>
+        <p:spPr>
+          <a:xfrm>
+            <a:off x="7297743" y="4169664"/>
+            <a:ext cx="543652" cy="384048"/>
           </a:xfrm>
           <a:prstGeom prst="rect">
             <a:avLst/>
@@ -24908,7 +24830,7 @@
                 <a:ea typeface="Trebuchet MS" pitchFamily="34" charset="-122"/>
                 <a:cs typeface="Trebuchet MS" pitchFamily="34" charset="-120"/>
               </a:rPr>
-              <a:t>a</a:t>
+              <a:t>io</a:t>
             </a:r>
             <a:endParaRPr lang="en-US" sz="900" dirty="0"/>
           </a:p>
@@ -24916,18 +24838,18 @@
       </p:sp>
       <p:sp>
         <p:nvSpPr>
-          <p:cNvPr id="65" name="Shape 63"/>
-          <p:cNvSpPr/>
-          <p:nvPr/>
-        </p:nvSpPr>
-        <p:spPr>
-          <a:xfrm>
-            <a:off x="6703799" y="4187952"/>
-            <a:ext cx="543652" cy="475488"/>
+          <p:cNvPr id="69" name="Shape 67"/>
+          <p:cNvSpPr/>
+          <p:nvPr/>
+        </p:nvSpPr>
+        <p:spPr>
+          <a:xfrm>
+            <a:off x="7891688" y="4169664"/>
+            <a:ext cx="543652" cy="384048"/>
           </a:xfrm>
           <a:prstGeom prst="rect">
             <a:avLst>
-              <a:gd name="adj" fmla="val 7692"/>
+              <a:gd name="adj" fmla="val 9524"/>
             </a:avLst>
           </a:prstGeom>
           <a:solidFill>
@@ -24943,146 +24865,14 @@
       </p:sp>
       <p:sp>
         <p:nvSpPr>
-          <p:cNvPr id="66" name="Text 64"/>
-          <p:cNvSpPr/>
-          <p:nvPr/>
-        </p:nvSpPr>
-        <p:spPr>
-          <a:xfrm>
-            <a:off x="6703799" y="4187952"/>
-            <a:ext cx="543652" cy="475488"/>
-          </a:xfrm>
-          <a:prstGeom prst="rect">
-            <a:avLst/>
-          </a:prstGeom>
-          <a:noFill/>
-          <a:ln/>
-        </p:spPr>
-        <p:txBody>
-          <a:bodyPr wrap="square" lIns="0" tIns="0" rIns="0" bIns="0" rtlCol="0" anchor="ctr"/>
-          <a:lstStyle/>
-          <a:p>
-            <a:pPr algn="ctr" indent="0" marL="0">
-              <a:buNone/>
-            </a:pPr>
-            <a:r>
-              <a:rPr lang="en-US" sz="900" b="1" dirty="0">
-                <a:solidFill>
-                  <a:srgbClr val="9D174D"/>
-                </a:solidFill>
-                <a:latin typeface="Trebuchet MS" pitchFamily="34" charset="0"/>
-                <a:ea typeface="Trebuchet MS" pitchFamily="34" charset="-122"/>
-                <a:cs typeface="Trebuchet MS" pitchFamily="34" charset="-120"/>
-              </a:rPr>
-              <a:t>t</a:t>
-            </a:r>
-            <a:endParaRPr lang="en-US" sz="900" dirty="0"/>
-          </a:p>
-        </p:txBody>
-      </p:sp>
-      <p:sp>
-        <p:nvSpPr>
-          <p:cNvPr id="67" name="Shape 65"/>
-          <p:cNvSpPr/>
-          <p:nvPr/>
-        </p:nvSpPr>
-        <p:spPr>
-          <a:xfrm>
-            <a:off x="7297743" y="4187952"/>
-            <a:ext cx="543652" cy="475488"/>
-          </a:xfrm>
-          <a:prstGeom prst="rect">
-            <a:avLst>
-              <a:gd name="adj" fmla="val 7692"/>
-            </a:avLst>
-          </a:prstGeom>
-          <a:solidFill>
-            <a:srgbClr val="FFFFFF"/>
-          </a:solidFill>
-          <a:ln w="12700">
-            <a:solidFill>
-              <a:srgbClr val="DB2777"/>
-            </a:solidFill>
-            <a:prstDash val="solid"/>
-          </a:ln>
-        </p:spPr>
-      </p:sp>
-      <p:sp>
-        <p:nvSpPr>
-          <p:cNvPr id="68" name="Text 66"/>
-          <p:cNvSpPr/>
-          <p:nvPr/>
-        </p:nvSpPr>
-        <p:spPr>
-          <a:xfrm>
-            <a:off x="7297743" y="4187952"/>
-            <a:ext cx="543652" cy="475488"/>
-          </a:xfrm>
-          <a:prstGeom prst="rect">
-            <a:avLst/>
-          </a:prstGeom>
-          <a:noFill/>
-          <a:ln/>
-        </p:spPr>
-        <p:txBody>
-          <a:bodyPr wrap="square" lIns="0" tIns="0" rIns="0" bIns="0" rtlCol="0" anchor="ctr"/>
-          <a:lstStyle/>
-          <a:p>
-            <a:pPr algn="ctr" indent="0" marL="0">
-              <a:buNone/>
-            </a:pPr>
-            <a:r>
-              <a:rPr lang="en-US" sz="900" b="1" dirty="0">
-                <a:solidFill>
-                  <a:srgbClr val="9D174D"/>
-                </a:solidFill>
-                <a:latin typeface="Trebuchet MS" pitchFamily="34" charset="0"/>
-                <a:ea typeface="Trebuchet MS" pitchFamily="34" charset="-122"/>
-                <a:cs typeface="Trebuchet MS" pitchFamily="34" charset="-120"/>
-              </a:rPr>
-              <a:t>io</a:t>
-            </a:r>
-            <a:endParaRPr lang="en-US" sz="900" dirty="0"/>
-          </a:p>
-        </p:txBody>
-      </p:sp>
-      <p:sp>
-        <p:nvSpPr>
-          <p:cNvPr id="69" name="Shape 67"/>
-          <p:cNvSpPr/>
-          <p:nvPr/>
-        </p:nvSpPr>
-        <p:spPr>
-          <a:xfrm>
-            <a:off x="7891688" y="4187952"/>
-            <a:ext cx="543652" cy="475488"/>
-          </a:xfrm>
-          <a:prstGeom prst="rect">
-            <a:avLst>
-              <a:gd name="adj" fmla="val 7692"/>
-            </a:avLst>
-          </a:prstGeom>
-          <a:solidFill>
-            <a:srgbClr val="FFFFFF"/>
-          </a:solidFill>
-          <a:ln w="12700">
-            <a:solidFill>
-              <a:srgbClr val="DB2777"/>
-            </a:solidFill>
-            <a:prstDash val="solid"/>
-          </a:ln>
-        </p:spPr>
-      </p:sp>
-      <p:sp>
-        <p:nvSpPr>
           <p:cNvPr id="70" name="Text 68"/>
           <p:cNvSpPr/>
           <p:nvPr/>
         </p:nvSpPr>
         <p:spPr>
           <a:xfrm>
-            <a:off x="7891688" y="4187952"/>
-            <a:ext cx="543652" cy="475488"/>
+            <a:off x="7891688" y="4169664"/>
+            <a:ext cx="543652" cy="384048"/>
           </a:xfrm>
           <a:prstGeom prst="rect">
             <a:avLst/>
@@ -25398,7 +25188,7 @@
                 <a:ea typeface="Calibri" pitchFamily="34" charset="-122"/>
                 <a:cs typeface="Calibri" pitchFamily="34" charset="-120"/>
               </a:rPr>
-              <a:t>Word Labs  •  wordlabs.app  •  Suffix: '-tion' = act, state, or result</a:t>
+              <a:t>Word Labs  •  wordlabs.app  •  Suffix: '-tion' = act, process, or state</a:t>
             </a:r>
             <a:endParaRPr lang="en-US" sz="800" dirty="0"/>
           </a:p>
@@ -25537,7 +25327,7 @@
                 <a:ea typeface="Trebuchet MS" pitchFamily="34" charset="-122"/>
                 <a:cs typeface="Trebuchet MS" pitchFamily="34" charset="-120"/>
               </a:rPr>
-              <a:t>concentration</a:t>
+              <a:t>determination</a:t>
             </a:r>
             <a:endParaRPr lang="en-US" sz="2800" dirty="0"/>
           </a:p>
@@ -25816,11 +25606,11 @@
         <p:spPr>
           <a:xfrm>
             <a:off x="365760" y="4096512"/>
-            <a:ext cx="1371600" cy="658368"/>
+            <a:ext cx="1371600" cy="804672"/>
           </a:xfrm>
           <a:prstGeom prst="rect">
             <a:avLst>
-              <a:gd name="adj" fmla="val 8333"/>
+              <a:gd name="adj" fmla="val 6818"/>
             </a:avLst>
           </a:prstGeom>
           <a:solidFill>
@@ -25843,7 +25633,7 @@
         <p:spPr>
           <a:xfrm>
             <a:off x="365760" y="4096512"/>
-            <a:ext cx="1371600" cy="658368"/>
+            <a:ext cx="1371600" cy="804672"/>
           </a:xfrm>
           <a:prstGeom prst="rect">
             <a:avLst/>
@@ -25882,11 +25672,11 @@
         <p:spPr>
           <a:xfrm>
             <a:off x="1874520" y="4096512"/>
-            <a:ext cx="6903720" cy="658368"/>
+            <a:ext cx="6903720" cy="804672"/>
           </a:xfrm>
           <a:prstGeom prst="rect">
             <a:avLst>
-              <a:gd name="adj" fmla="val 8333"/>
+              <a:gd name="adj" fmla="val 6818"/>
             </a:avLst>
           </a:prstGeom>
           <a:solidFill>
@@ -25909,7 +25699,7 @@
         <p:spPr>
           <a:xfrm>
             <a:off x="1874520" y="4096512"/>
-            <a:ext cx="6903720" cy="658368"/>
+            <a:ext cx="6903720" cy="804672"/>
           </a:xfrm>
           <a:prstGeom prst="rect">
             <a:avLst/>
@@ -26225,7 +26015,7 @@
                 <a:ea typeface="Calibri" pitchFamily="34" charset="-122"/>
                 <a:cs typeface="Calibri" pitchFamily="34" charset="-120"/>
               </a:rPr>
-              <a:t>Word Labs  •  wordlabs.app  •  Suffix: '-tion' = act, state, or result</a:t>
+              <a:t>Word Labs  •  wordlabs.app  •  Suffix: '-tion' = act, process, or state</a:t>
             </a:r>
             <a:endParaRPr lang="en-US" sz="800" dirty="0"/>
           </a:p>
@@ -26364,7 +26154,7 @@
                 <a:ea typeface="Trebuchet MS" pitchFamily="34" charset="-122"/>
                 <a:cs typeface="Trebuchet MS" pitchFamily="34" charset="-120"/>
               </a:rPr>
-              <a:t>concentration</a:t>
+              <a:t>determination</a:t>
             </a:r>
             <a:endParaRPr lang="en-US" sz="2800" dirty="0"/>
           </a:p>
@@ -26503,7 +26293,7 @@
                 <a:ea typeface="Trebuchet MS" pitchFamily="34" charset="-122"/>
                 <a:cs typeface="Trebuchet MS" pitchFamily="34" charset="-120"/>
               </a:rPr>
-              <a:t>con</a:t>
+              <a:t>de</a:t>
             </a:r>
             <a:endParaRPr lang="en-US" sz="1300" dirty="0"/>
           </a:p>
@@ -26542,7 +26332,7 @@
                 <a:ea typeface="Calibri" pitchFamily="34" charset="-122"/>
                 <a:cs typeface="Calibri" pitchFamily="34" charset="-120"/>
               </a:rPr>
-              <a:t>together</a:t>
+              <a:t>fully / down</a:t>
             </a:r>
             <a:endParaRPr lang="en-US" sz="850" dirty="0"/>
           </a:p>
@@ -26615,7 +26405,7 @@
                 <a:ea typeface="Trebuchet MS" pitchFamily="34" charset="-122"/>
                 <a:cs typeface="Trebuchet MS" pitchFamily="34" charset="-120"/>
               </a:rPr>
-              <a:t>centr</a:t>
+              <a:t>termin</a:t>
             </a:r>
             <a:endParaRPr lang="en-US" sz="1300" dirty="0"/>
           </a:p>
@@ -26654,7 +26444,7 @@
                 <a:ea typeface="Calibri" pitchFamily="34" charset="-122"/>
                 <a:cs typeface="Calibri" pitchFamily="34" charset="-120"/>
               </a:rPr>
-              <a:t>centre or middle</a:t>
+              <a:t>limit / end</a:t>
             </a:r>
             <a:endParaRPr lang="en-US" sz="850" dirty="0"/>
           </a:p>
@@ -26917,7 +26707,7 @@
                 <a:ea typeface="Calibri" pitchFamily="34" charset="-122"/>
                 <a:cs typeface="Calibri" pitchFamily="34" charset="-120"/>
               </a:rPr>
-              <a:t>act or state of</a:t>
+              <a:t>act or process</a:t>
             </a:r>
             <a:endParaRPr lang="en-US" sz="850" dirty="0"/>
           </a:p>
@@ -27064,11 +26854,11 @@
         <p:spPr>
           <a:xfrm>
             <a:off x="365760" y="4096512"/>
-            <a:ext cx="1371600" cy="658368"/>
+            <a:ext cx="1371600" cy="804672"/>
           </a:xfrm>
           <a:prstGeom prst="rect">
             <a:avLst>
-              <a:gd name="adj" fmla="val 8333"/>
+              <a:gd name="adj" fmla="val 6818"/>
             </a:avLst>
           </a:prstGeom>
           <a:solidFill>
@@ -27091,7 +26881,7 @@
         <p:spPr>
           <a:xfrm>
             <a:off x="365760" y="4096512"/>
-            <a:ext cx="1371600" cy="658368"/>
+            <a:ext cx="1371600" cy="804672"/>
           </a:xfrm>
           <a:prstGeom prst="rect">
             <a:avLst/>
@@ -27130,11 +26920,11 @@
         <p:spPr>
           <a:xfrm>
             <a:off x="1874520" y="4096512"/>
-            <a:ext cx="6903720" cy="658368"/>
+            <a:ext cx="6903720" cy="804672"/>
           </a:xfrm>
           <a:prstGeom prst="rect">
             <a:avLst>
-              <a:gd name="adj" fmla="val 8333"/>
+              <a:gd name="adj" fmla="val 6818"/>
             </a:avLst>
           </a:prstGeom>
           <a:solidFill>
@@ -27157,7 +26947,7 @@
         <p:spPr>
           <a:xfrm>
             <a:off x="1874520" y="4096512"/>
-            <a:ext cx="6903720" cy="658368"/>
+            <a:ext cx="6903720" cy="804672"/>
           </a:xfrm>
           <a:prstGeom prst="rect">
             <a:avLst/>
@@ -27473,7 +27263,7 @@
                 <a:ea typeface="Calibri" pitchFamily="34" charset="-122"/>
                 <a:cs typeface="Calibri" pitchFamily="34" charset="-120"/>
               </a:rPr>
-              <a:t>Word Labs  •  wordlabs.app  •  Suffix: '-tion' = act, state, or result</a:t>
+              <a:t>Word Labs  •  wordlabs.app  •  Suffix: '-tion' = act, process, or state</a:t>
             </a:r>
             <a:endParaRPr lang="en-US" sz="800" dirty="0"/>
           </a:p>
@@ -27546,7 +27336,7 @@
                 <a:ea typeface="Trebuchet MS" pitchFamily="34" charset="-122"/>
                 <a:cs typeface="Trebuchet MS" pitchFamily="34" charset="-120"/>
               </a:rPr>
-              <a:t>We are learning that the suffix '-tion' means 'act, state, or result'.</a:t>
+              <a:t>We are learning that the suffix '-tion' means 'act, process, or state'.</a:t>
             </a:r>
             <a:endParaRPr lang="en-US" sz="2000" dirty="0"/>
           </a:p>
@@ -28192,7 +27982,7 @@
                 <a:ea typeface="Calibri" pitchFamily="34" charset="-122"/>
                 <a:cs typeface="Calibri" pitchFamily="34" charset="-120"/>
               </a:rPr>
-              <a:t>Word Labs  •  wordlabs.app  •  Suffix: '-tion' = act, state, or result</a:t>
+              <a:t>Word Labs  •  wordlabs.app  •  Suffix: '-tion' = act, process, or state</a:t>
             </a:r>
             <a:endParaRPr lang="en-US" sz="800" dirty="0"/>
           </a:p>
@@ -28331,7 +28121,7 @@
                 <a:ea typeface="Trebuchet MS" pitchFamily="34" charset="-122"/>
                 <a:cs typeface="Trebuchet MS" pitchFamily="34" charset="-120"/>
               </a:rPr>
-              <a:t>concentration</a:t>
+              <a:t>determination</a:t>
             </a:r>
             <a:endParaRPr lang="en-US" sz="2800" dirty="0"/>
           </a:p>
@@ -28470,7 +28260,7 @@
                 <a:ea typeface="Trebuchet MS" pitchFamily="34" charset="-122"/>
                 <a:cs typeface="Trebuchet MS" pitchFamily="34" charset="-120"/>
               </a:rPr>
-              <a:t>con</a:t>
+              <a:t>de</a:t>
             </a:r>
             <a:endParaRPr lang="en-US" sz="1300" dirty="0"/>
           </a:p>
@@ -28509,7 +28299,7 @@
                 <a:ea typeface="Calibri" pitchFamily="34" charset="-122"/>
                 <a:cs typeface="Calibri" pitchFamily="34" charset="-120"/>
               </a:rPr>
-              <a:t>together</a:t>
+              <a:t>fully / down</a:t>
             </a:r>
             <a:endParaRPr lang="en-US" sz="850" dirty="0"/>
           </a:p>
@@ -28582,7 +28372,7 @@
                 <a:ea typeface="Trebuchet MS" pitchFamily="34" charset="-122"/>
                 <a:cs typeface="Trebuchet MS" pitchFamily="34" charset="-120"/>
               </a:rPr>
-              <a:t>centr</a:t>
+              <a:t>termin</a:t>
             </a:r>
             <a:endParaRPr lang="en-US" sz="1300" dirty="0"/>
           </a:p>
@@ -28621,7 +28411,7 @@
                 <a:ea typeface="Calibri" pitchFamily="34" charset="-122"/>
                 <a:cs typeface="Calibri" pitchFamily="34" charset="-120"/>
               </a:rPr>
-              <a:t>centre or middle</a:t>
+              <a:t>limit / end</a:t>
             </a:r>
             <a:endParaRPr lang="en-US" sz="850" dirty="0"/>
           </a:p>
@@ -28884,7 +28674,7 @@
                 <a:ea typeface="Calibri" pitchFamily="34" charset="-122"/>
                 <a:cs typeface="Calibri" pitchFamily="34" charset="-120"/>
               </a:rPr>
-              <a:t>act or state of</a:t>
+              <a:t>act or process</a:t>
             </a:r>
             <a:endParaRPr lang="en-US" sz="850" dirty="0"/>
           </a:p>
@@ -28991,8 +28781,8 @@
         </p:nvSpPr>
         <p:spPr>
           <a:xfrm>
-            <a:off x="1975104" y="3364992"/>
-            <a:ext cx="1554480" cy="475488"/>
+            <a:off x="1978152" y="3364992"/>
+            <a:ext cx="1225296" cy="475488"/>
           </a:xfrm>
           <a:prstGeom prst="rect">
             <a:avLst>
@@ -29018,8 +28808,8 @@
         </p:nvSpPr>
         <p:spPr>
           <a:xfrm>
-            <a:off x="1975104" y="3364992"/>
-            <a:ext cx="1554480" cy="475488"/>
+            <a:off x="1978152" y="3364992"/>
+            <a:ext cx="1225296" cy="475488"/>
           </a:xfrm>
           <a:prstGeom prst="rect">
             <a:avLst/>
@@ -29043,7 +28833,7 @@
                 <a:ea typeface="Trebuchet MS" pitchFamily="34" charset="-122"/>
                 <a:cs typeface="Trebuchet MS" pitchFamily="34" charset="-120"/>
               </a:rPr>
-              <a:t>con</a:t>
+              <a:t>de</a:t>
             </a:r>
             <a:endParaRPr lang="en-US" sz="1400" dirty="0"/>
           </a:p>
@@ -29057,8 +28847,8 @@
         </p:nvSpPr>
         <p:spPr>
           <a:xfrm>
-            <a:off x="3529584" y="3364992"/>
-            <a:ext cx="73152" cy="475488"/>
+            <a:off x="3203448" y="3364992"/>
+            <a:ext cx="76200" cy="475488"/>
           </a:xfrm>
           <a:prstGeom prst="rect">
             <a:avLst/>
@@ -29096,8 +28886,8 @@
         </p:nvSpPr>
         <p:spPr>
           <a:xfrm>
-            <a:off x="3602736" y="3364992"/>
-            <a:ext cx="1554480" cy="475488"/>
+            <a:off x="3279648" y="3364992"/>
+            <a:ext cx="1225296" cy="475488"/>
           </a:xfrm>
           <a:prstGeom prst="rect">
             <a:avLst>
@@ -29123,8 +28913,8 @@
         </p:nvSpPr>
         <p:spPr>
           <a:xfrm>
-            <a:off x="3602736" y="3364992"/>
-            <a:ext cx="1554480" cy="475488"/>
+            <a:off x="3279648" y="3364992"/>
+            <a:ext cx="1225296" cy="475488"/>
           </a:xfrm>
           <a:prstGeom prst="rect">
             <a:avLst/>
@@ -29148,7 +28938,7 @@
                 <a:ea typeface="Trebuchet MS" pitchFamily="34" charset="-122"/>
                 <a:cs typeface="Trebuchet MS" pitchFamily="34" charset="-120"/>
               </a:rPr>
-              <a:t>cen</a:t>
+              <a:t>ter</a:t>
             </a:r>
             <a:endParaRPr lang="en-US" sz="1400" dirty="0"/>
           </a:p>
@@ -29162,8 +28952,8 @@
         </p:nvSpPr>
         <p:spPr>
           <a:xfrm>
-            <a:off x="5157216" y="3364992"/>
-            <a:ext cx="73152" cy="475488"/>
+            <a:off x="4504944" y="3364992"/>
+            <a:ext cx="76200" cy="475488"/>
           </a:xfrm>
           <a:prstGeom prst="rect">
             <a:avLst/>
@@ -29201,8 +28991,8 @@
         </p:nvSpPr>
         <p:spPr>
           <a:xfrm>
-            <a:off x="5230368" y="3364992"/>
-            <a:ext cx="1554480" cy="475488"/>
+            <a:off x="4581144" y="3364992"/>
+            <a:ext cx="1225296" cy="475488"/>
           </a:xfrm>
           <a:prstGeom prst="rect">
             <a:avLst>
@@ -29228,8 +29018,8 @@
         </p:nvSpPr>
         <p:spPr>
           <a:xfrm>
-            <a:off x="5230368" y="3364992"/>
-            <a:ext cx="1554480" cy="475488"/>
+            <a:off x="4581144" y="3364992"/>
+            <a:ext cx="1225296" cy="475488"/>
           </a:xfrm>
           <a:prstGeom prst="rect">
             <a:avLst/>
@@ -29253,7 +29043,7 @@
                 <a:ea typeface="Trebuchet MS" pitchFamily="34" charset="-122"/>
                 <a:cs typeface="Trebuchet MS" pitchFamily="34" charset="-120"/>
               </a:rPr>
-              <a:t>tra</a:t>
+              <a:t>mi</a:t>
             </a:r>
             <a:endParaRPr lang="en-US" sz="1400" dirty="0"/>
           </a:p>
@@ -29267,8 +29057,8 @@
         </p:nvSpPr>
         <p:spPr>
           <a:xfrm>
-            <a:off x="6784848" y="3364992"/>
-            <a:ext cx="73152" cy="475488"/>
+            <a:off x="5806440" y="3364992"/>
+            <a:ext cx="76200" cy="475488"/>
           </a:xfrm>
           <a:prstGeom prst="rect">
             <a:avLst/>
@@ -29306,8 +29096,8 @@
         </p:nvSpPr>
         <p:spPr>
           <a:xfrm>
-            <a:off x="6858000" y="3364992"/>
-            <a:ext cx="1554480" cy="475488"/>
+            <a:off x="5882640" y="3364992"/>
+            <a:ext cx="1225296" cy="475488"/>
           </a:xfrm>
           <a:prstGeom prst="rect">
             <a:avLst>
@@ -29333,8 +29123,8 @@
         </p:nvSpPr>
         <p:spPr>
           <a:xfrm>
-            <a:off x="6858000" y="3364992"/>
-            <a:ext cx="1554480" cy="475488"/>
+            <a:off x="5882640" y="3364992"/>
+            <a:ext cx="1225296" cy="475488"/>
           </a:xfrm>
           <a:prstGeom prst="rect">
             <a:avLst/>
@@ -29358,7 +29148,7 @@
                 <a:ea typeface="Trebuchet MS" pitchFamily="34" charset="-122"/>
                 <a:cs typeface="Trebuchet MS" pitchFamily="34" charset="-120"/>
               </a:rPr>
-              <a:t>tion</a:t>
+              <a:t>na</a:t>
             </a:r>
             <a:endParaRPr lang="en-US" sz="1400" dirty="0"/>
           </a:p>
@@ -29366,64 +29156,169 @@
       </p:sp>
       <p:sp>
         <p:nvSpPr>
-          <p:cNvPr id="43" name="Shape 41"/>
-          <p:cNvSpPr/>
-          <p:nvPr/>
-        </p:nvSpPr>
-        <p:spPr>
-          <a:xfrm>
-            <a:off x="365760" y="4096512"/>
-            <a:ext cx="1371600" cy="658368"/>
-          </a:xfrm>
-          <a:prstGeom prst="rect">
-            <a:avLst>
-              <a:gd name="adj" fmla="val 8333"/>
-            </a:avLst>
-          </a:prstGeom>
-          <a:solidFill>
-            <a:srgbClr val="E2E8F0"/>
-          </a:solidFill>
-          <a:ln w="12700">
-            <a:solidFill>
-              <a:srgbClr val="E2E8F0"/>
-            </a:solidFill>
-            <a:prstDash val="solid"/>
-          </a:ln>
-        </p:spPr>
-      </p:sp>
-      <p:sp>
-        <p:nvSpPr>
-          <p:cNvPr id="44" name="Text 42"/>
-          <p:cNvSpPr/>
-          <p:nvPr/>
-        </p:nvSpPr>
-        <p:spPr>
-          <a:xfrm>
-            <a:off x="365760" y="4096512"/>
-            <a:ext cx="1371600" cy="658368"/>
-          </a:xfrm>
-          <a:prstGeom prst="rect">
-            <a:avLst/>
-          </a:prstGeom>
-          <a:noFill/>
-          <a:ln/>
-        </p:spPr>
-        <p:txBody>
-          <a:bodyPr wrap="square" lIns="0" tIns="0" rIns="0" bIns="0" rtlCol="0" anchor="ctr"/>
-          <a:lstStyle/>
-          <a:p>
-            <a:pPr algn="ctr" indent="0" marL="0">
-              <a:buNone/>
-            </a:pPr>
-            <a:r>
-              <a:rPr lang="en-US" sz="1100" b="1" dirty="0">
-                <a:solidFill>
-                  <a:srgbClr val="475569"/>
+          <p:cNvPr id="43" name="Text 41"/>
+          <p:cNvSpPr/>
+          <p:nvPr/>
+        </p:nvSpPr>
+        <p:spPr>
+          <a:xfrm>
+            <a:off x="7107936" y="3364992"/>
+            <a:ext cx="76200" cy="475488"/>
+          </a:xfrm>
+          <a:prstGeom prst="rect">
+            <a:avLst/>
+          </a:prstGeom>
+          <a:noFill/>
+          <a:ln/>
+        </p:spPr>
+        <p:txBody>
+          <a:bodyPr wrap="square" lIns="0" tIns="0" rIns="0" bIns="0" rtlCol="0" anchor="ctr"/>
+          <a:lstStyle/>
+          <a:p>
+            <a:pPr algn="ctr" indent="0" marL="0">
+              <a:buNone/>
+            </a:pPr>
+            <a:r>
+              <a:rPr lang="en-US" sz="1600" b="1" dirty="0">
+                <a:solidFill>
+                  <a:srgbClr val="0D9488"/>
                 </a:solidFill>
                 <a:latin typeface="Trebuchet MS" pitchFamily="34" charset="0"/>
                 <a:ea typeface="Trebuchet MS" pitchFamily="34" charset="-122"/>
                 <a:cs typeface="Trebuchet MS" pitchFamily="34" charset="-120"/>
               </a:rPr>
+              <a:t>·</a:t>
+            </a:r>
+            <a:endParaRPr lang="en-US" sz="1600" dirty="0"/>
+          </a:p>
+        </p:txBody>
+      </p:sp>
+      <p:sp>
+        <p:nvSpPr>
+          <p:cNvPr id="44" name="Shape 42"/>
+          <p:cNvSpPr/>
+          <p:nvPr/>
+        </p:nvSpPr>
+        <p:spPr>
+          <a:xfrm>
+            <a:off x="7184136" y="3364992"/>
+            <a:ext cx="1225296" cy="475488"/>
+          </a:xfrm>
+          <a:prstGeom prst="rect">
+            <a:avLst>
+              <a:gd name="adj" fmla="val 9615"/>
+            </a:avLst>
+          </a:prstGeom>
+          <a:solidFill>
+            <a:srgbClr val="FFFFFF"/>
+          </a:solidFill>
+          <a:ln w="12700">
+            <a:solidFill>
+              <a:srgbClr val="0D9488"/>
+            </a:solidFill>
+            <a:prstDash val="solid"/>
+          </a:ln>
+        </p:spPr>
+      </p:sp>
+      <p:sp>
+        <p:nvSpPr>
+          <p:cNvPr id="45" name="Text 43"/>
+          <p:cNvSpPr/>
+          <p:nvPr/>
+        </p:nvSpPr>
+        <p:spPr>
+          <a:xfrm>
+            <a:off x="7184136" y="3364992"/>
+            <a:ext cx="1225296" cy="475488"/>
+          </a:xfrm>
+          <a:prstGeom prst="rect">
+            <a:avLst/>
+          </a:prstGeom>
+          <a:noFill/>
+          <a:ln/>
+        </p:spPr>
+        <p:txBody>
+          <a:bodyPr wrap="square" lIns="0" tIns="0" rIns="0" bIns="0" rtlCol="0" anchor="ctr"/>
+          <a:lstStyle/>
+          <a:p>
+            <a:pPr algn="ctr" indent="0" marL="0">
+              <a:buNone/>
+            </a:pPr>
+            <a:r>
+              <a:rPr lang="en-US" sz="1400" b="1" dirty="0">
+                <a:solidFill>
+                  <a:srgbClr val="0D9488"/>
+                </a:solidFill>
+                <a:latin typeface="Trebuchet MS" pitchFamily="34" charset="0"/>
+                <a:ea typeface="Trebuchet MS" pitchFamily="34" charset="-122"/>
+                <a:cs typeface="Trebuchet MS" pitchFamily="34" charset="-120"/>
+              </a:rPr>
+              <a:t>tion</a:t>
+            </a:r>
+            <a:endParaRPr lang="en-US" sz="1400" dirty="0"/>
+          </a:p>
+        </p:txBody>
+      </p:sp>
+      <p:sp>
+        <p:nvSpPr>
+          <p:cNvPr id="46" name="Shape 44"/>
+          <p:cNvSpPr/>
+          <p:nvPr/>
+        </p:nvSpPr>
+        <p:spPr>
+          <a:xfrm>
+            <a:off x="365760" y="4096512"/>
+            <a:ext cx="1371600" cy="804672"/>
+          </a:xfrm>
+          <a:prstGeom prst="rect">
+            <a:avLst>
+              <a:gd name="adj" fmla="val 6818"/>
+            </a:avLst>
+          </a:prstGeom>
+          <a:solidFill>
+            <a:srgbClr val="E2E8F0"/>
+          </a:solidFill>
+          <a:ln w="12700">
+            <a:solidFill>
+              <a:srgbClr val="E2E8F0"/>
+            </a:solidFill>
+            <a:prstDash val="solid"/>
+          </a:ln>
+        </p:spPr>
+      </p:sp>
+      <p:sp>
+        <p:nvSpPr>
+          <p:cNvPr id="47" name="Text 45"/>
+          <p:cNvSpPr/>
+          <p:nvPr/>
+        </p:nvSpPr>
+        <p:spPr>
+          <a:xfrm>
+            <a:off x="365760" y="4096512"/>
+            <a:ext cx="1371600" cy="804672"/>
+          </a:xfrm>
+          <a:prstGeom prst="rect">
+            <a:avLst/>
+          </a:prstGeom>
+          <a:noFill/>
+          <a:ln/>
+        </p:spPr>
+        <p:txBody>
+          <a:bodyPr wrap="square" lIns="0" tIns="0" rIns="0" bIns="0" rtlCol="0" anchor="ctr"/>
+          <a:lstStyle/>
+          <a:p>
+            <a:pPr algn="ctr" indent="0" marL="0">
+              <a:buNone/>
+            </a:pPr>
+            <a:r>
+              <a:rPr lang="en-US" sz="1100" b="1" dirty="0">
+                <a:solidFill>
+                  <a:srgbClr val="475569"/>
+                </a:solidFill>
+                <a:latin typeface="Trebuchet MS" pitchFamily="34" charset="0"/>
+                <a:ea typeface="Trebuchet MS" pitchFamily="34" charset="-122"/>
+                <a:cs typeface="Trebuchet MS" pitchFamily="34" charset="-120"/>
+              </a:rPr>
               <a:t>Phonemes</a:t>
             </a:r>
             <a:endParaRPr lang="en-US" sz="1100" dirty="0"/>
@@ -29432,18 +29327,18 @@
       </p:sp>
       <p:sp>
         <p:nvSpPr>
-          <p:cNvPr id="45" name="Shape 43"/>
+          <p:cNvPr id="48" name="Shape 46"/>
           <p:cNvSpPr/>
           <p:nvPr/>
         </p:nvSpPr>
         <p:spPr>
           <a:xfrm>
             <a:off x="1874520" y="4096512"/>
-            <a:ext cx="6903720" cy="658368"/>
+            <a:ext cx="6903720" cy="804672"/>
           </a:xfrm>
           <a:prstGeom prst="rect">
             <a:avLst>
-              <a:gd name="adj" fmla="val 8333"/>
+              <a:gd name="adj" fmla="val 6818"/>
             </a:avLst>
           </a:prstGeom>
           <a:solidFill>
@@ -29459,14 +29354,14 @@
       </p:sp>
       <p:sp>
         <p:nvSpPr>
-          <p:cNvPr id="46" name="Text 44"/>
+          <p:cNvPr id="49" name="Text 47"/>
           <p:cNvSpPr/>
           <p:nvPr/>
         </p:nvSpPr>
         <p:spPr>
           <a:xfrm>
             <a:off x="1874520" y="4096512"/>
-            <a:ext cx="6903720" cy="658368"/>
+            <a:ext cx="6903720" cy="804672"/>
           </a:xfrm>
           <a:prstGeom prst="rect">
             <a:avLst/>
@@ -29782,7 +29677,7 @@
                 <a:ea typeface="Calibri" pitchFamily="34" charset="-122"/>
                 <a:cs typeface="Calibri" pitchFamily="34" charset="-120"/>
               </a:rPr>
-              <a:t>Word Labs  •  wordlabs.app  •  Suffix: '-tion' = act, state, or result</a:t>
+              <a:t>Word Labs  •  wordlabs.app  •  Suffix: '-tion' = act, process, or state</a:t>
             </a:r>
             <a:endParaRPr lang="en-US" sz="800" dirty="0"/>
           </a:p>
@@ -29921,7 +29816,7 @@
                 <a:ea typeface="Trebuchet MS" pitchFamily="34" charset="-122"/>
                 <a:cs typeface="Trebuchet MS" pitchFamily="34" charset="-120"/>
               </a:rPr>
-              <a:t>concentration</a:t>
+              <a:t>determination</a:t>
             </a:r>
             <a:endParaRPr lang="en-US" sz="2800" dirty="0"/>
           </a:p>
@@ -30060,7 +29955,7 @@
                 <a:ea typeface="Trebuchet MS" pitchFamily="34" charset="-122"/>
                 <a:cs typeface="Trebuchet MS" pitchFamily="34" charset="-120"/>
               </a:rPr>
-              <a:t>con</a:t>
+              <a:t>de</a:t>
             </a:r>
             <a:endParaRPr lang="en-US" sz="1300" dirty="0"/>
           </a:p>
@@ -30099,7 +29994,7 @@
                 <a:ea typeface="Calibri" pitchFamily="34" charset="-122"/>
                 <a:cs typeface="Calibri" pitchFamily="34" charset="-120"/>
               </a:rPr>
-              <a:t>together</a:t>
+              <a:t>fully / down</a:t>
             </a:r>
             <a:endParaRPr lang="en-US" sz="850" dirty="0"/>
           </a:p>
@@ -30172,7 +30067,7 @@
                 <a:ea typeface="Trebuchet MS" pitchFamily="34" charset="-122"/>
                 <a:cs typeface="Trebuchet MS" pitchFamily="34" charset="-120"/>
               </a:rPr>
-              <a:t>centr</a:t>
+              <a:t>termin</a:t>
             </a:r>
             <a:endParaRPr lang="en-US" sz="1300" dirty="0"/>
           </a:p>
@@ -30211,7 +30106,7 @@
                 <a:ea typeface="Calibri" pitchFamily="34" charset="-122"/>
                 <a:cs typeface="Calibri" pitchFamily="34" charset="-120"/>
               </a:rPr>
-              <a:t>centre or middle</a:t>
+              <a:t>limit / end</a:t>
             </a:r>
             <a:endParaRPr lang="en-US" sz="850" dirty="0"/>
           </a:p>
@@ -30474,7 +30369,7 @@
                 <a:ea typeface="Calibri" pitchFamily="34" charset="-122"/>
                 <a:cs typeface="Calibri" pitchFamily="34" charset="-120"/>
               </a:rPr>
-              <a:t>act or state of</a:t>
+              <a:t>act or process</a:t>
             </a:r>
             <a:endParaRPr lang="en-US" sz="850" dirty="0"/>
           </a:p>
@@ -30581,8 +30476,8 @@
         </p:nvSpPr>
         <p:spPr>
           <a:xfrm>
-            <a:off x="1975104" y="3364992"/>
-            <a:ext cx="1554480" cy="475488"/>
+            <a:off x="1978152" y="3364992"/>
+            <a:ext cx="1225296" cy="475488"/>
           </a:xfrm>
           <a:prstGeom prst="rect">
             <a:avLst>
@@ -30608,8 +30503,8 @@
         </p:nvSpPr>
         <p:spPr>
           <a:xfrm>
-            <a:off x="1975104" y="3364992"/>
-            <a:ext cx="1554480" cy="475488"/>
+            <a:off x="1978152" y="3364992"/>
+            <a:ext cx="1225296" cy="475488"/>
           </a:xfrm>
           <a:prstGeom prst="rect">
             <a:avLst/>
@@ -30633,7 +30528,7 @@
                 <a:ea typeface="Trebuchet MS" pitchFamily="34" charset="-122"/>
                 <a:cs typeface="Trebuchet MS" pitchFamily="34" charset="-120"/>
               </a:rPr>
-              <a:t>con</a:t>
+              <a:t>de</a:t>
             </a:r>
             <a:endParaRPr lang="en-US" sz="1400" dirty="0"/>
           </a:p>
@@ -30647,8 +30542,8 @@
         </p:nvSpPr>
         <p:spPr>
           <a:xfrm>
-            <a:off x="3529584" y="3364992"/>
-            <a:ext cx="73152" cy="475488"/>
+            <a:off x="3203448" y="3364992"/>
+            <a:ext cx="76200" cy="475488"/>
           </a:xfrm>
           <a:prstGeom prst="rect">
             <a:avLst/>
@@ -30686,8 +30581,8 @@
         </p:nvSpPr>
         <p:spPr>
           <a:xfrm>
-            <a:off x="3602736" y="3364992"/>
-            <a:ext cx="1554480" cy="475488"/>
+            <a:off x="3279648" y="3364992"/>
+            <a:ext cx="1225296" cy="475488"/>
           </a:xfrm>
           <a:prstGeom prst="rect">
             <a:avLst>
@@ -30713,8 +30608,8 @@
         </p:nvSpPr>
         <p:spPr>
           <a:xfrm>
-            <a:off x="3602736" y="3364992"/>
-            <a:ext cx="1554480" cy="475488"/>
+            <a:off x="3279648" y="3364992"/>
+            <a:ext cx="1225296" cy="475488"/>
           </a:xfrm>
           <a:prstGeom prst="rect">
             <a:avLst/>
@@ -30738,7 +30633,7 @@
                 <a:ea typeface="Trebuchet MS" pitchFamily="34" charset="-122"/>
                 <a:cs typeface="Trebuchet MS" pitchFamily="34" charset="-120"/>
               </a:rPr>
-              <a:t>cen</a:t>
+              <a:t>ter</a:t>
             </a:r>
             <a:endParaRPr lang="en-US" sz="1400" dirty="0"/>
           </a:p>
@@ -30752,8 +30647,8 @@
         </p:nvSpPr>
         <p:spPr>
           <a:xfrm>
-            <a:off x="5157216" y="3364992"/>
-            <a:ext cx="73152" cy="475488"/>
+            <a:off x="4504944" y="3364992"/>
+            <a:ext cx="76200" cy="475488"/>
           </a:xfrm>
           <a:prstGeom prst="rect">
             <a:avLst/>
@@ -30791,8 +30686,8 @@
         </p:nvSpPr>
         <p:spPr>
           <a:xfrm>
-            <a:off x="5230368" y="3364992"/>
-            <a:ext cx="1554480" cy="475488"/>
+            <a:off x="4581144" y="3364992"/>
+            <a:ext cx="1225296" cy="475488"/>
           </a:xfrm>
           <a:prstGeom prst="rect">
             <a:avLst>
@@ -30818,8 +30713,8 @@
         </p:nvSpPr>
         <p:spPr>
           <a:xfrm>
-            <a:off x="5230368" y="3364992"/>
-            <a:ext cx="1554480" cy="475488"/>
+            <a:off x="4581144" y="3364992"/>
+            <a:ext cx="1225296" cy="475488"/>
           </a:xfrm>
           <a:prstGeom prst="rect">
             <a:avLst/>
@@ -30843,7 +30738,7 @@
                 <a:ea typeface="Trebuchet MS" pitchFamily="34" charset="-122"/>
                 <a:cs typeface="Trebuchet MS" pitchFamily="34" charset="-120"/>
               </a:rPr>
-              <a:t>tra</a:t>
+              <a:t>mi</a:t>
             </a:r>
             <a:endParaRPr lang="en-US" sz="1400" dirty="0"/>
           </a:p>
@@ -30857,8 +30752,8 @@
         </p:nvSpPr>
         <p:spPr>
           <a:xfrm>
-            <a:off x="6784848" y="3364992"/>
-            <a:ext cx="73152" cy="475488"/>
+            <a:off x="5806440" y="3364992"/>
+            <a:ext cx="76200" cy="475488"/>
           </a:xfrm>
           <a:prstGeom prst="rect">
             <a:avLst/>
@@ -30896,8 +30791,8 @@
         </p:nvSpPr>
         <p:spPr>
           <a:xfrm>
-            <a:off x="6858000" y="3364992"/>
-            <a:ext cx="1554480" cy="475488"/>
+            <a:off x="5882640" y="3364992"/>
+            <a:ext cx="1225296" cy="475488"/>
           </a:xfrm>
           <a:prstGeom prst="rect">
             <a:avLst>
@@ -30923,8 +30818,8 @@
         </p:nvSpPr>
         <p:spPr>
           <a:xfrm>
-            <a:off x="6858000" y="3364992"/>
-            <a:ext cx="1554480" cy="475488"/>
+            <a:off x="5882640" y="3364992"/>
+            <a:ext cx="1225296" cy="475488"/>
           </a:xfrm>
           <a:prstGeom prst="rect">
             <a:avLst/>
@@ -30948,7 +30843,7 @@
                 <a:ea typeface="Trebuchet MS" pitchFamily="34" charset="-122"/>
                 <a:cs typeface="Trebuchet MS" pitchFamily="34" charset="-120"/>
               </a:rPr>
-              <a:t>tion</a:t>
+              <a:t>na</a:t>
             </a:r>
             <a:endParaRPr lang="en-US" sz="1400" dirty="0"/>
           </a:p>
@@ -30956,246 +30851,219 @@
       </p:sp>
       <p:sp>
         <p:nvSpPr>
-          <p:cNvPr id="43" name="Shape 41"/>
-          <p:cNvSpPr/>
-          <p:nvPr/>
-        </p:nvSpPr>
-        <p:spPr>
-          <a:xfrm>
-            <a:off x="365760" y="4096512"/>
-            <a:ext cx="1371600" cy="658368"/>
-          </a:xfrm>
-          <a:prstGeom prst="rect">
-            <a:avLst>
-              <a:gd name="adj" fmla="val 8333"/>
-            </a:avLst>
-          </a:prstGeom>
-          <a:solidFill>
-            <a:srgbClr val="E2E8F0"/>
-          </a:solidFill>
-          <a:ln w="12700">
-            <a:solidFill>
-              <a:srgbClr val="E2E8F0"/>
-            </a:solidFill>
-            <a:prstDash val="solid"/>
-          </a:ln>
-        </p:spPr>
-      </p:sp>
-      <p:sp>
-        <p:nvSpPr>
-          <p:cNvPr id="44" name="Text 42"/>
-          <p:cNvSpPr/>
-          <p:nvPr/>
-        </p:nvSpPr>
-        <p:spPr>
-          <a:xfrm>
-            <a:off x="365760" y="4096512"/>
-            <a:ext cx="1371600" cy="658368"/>
-          </a:xfrm>
-          <a:prstGeom prst="rect">
-            <a:avLst/>
-          </a:prstGeom>
-          <a:noFill/>
-          <a:ln/>
-        </p:spPr>
-        <p:txBody>
-          <a:bodyPr wrap="square" lIns="0" tIns="0" rIns="0" bIns="0" rtlCol="0" anchor="ctr"/>
-          <a:lstStyle/>
-          <a:p>
-            <a:pPr algn="ctr" indent="0" marL="0">
-              <a:buNone/>
-            </a:pPr>
-            <a:r>
-              <a:rPr lang="en-US" sz="1100" b="1" dirty="0">
-                <a:solidFill>
-                  <a:srgbClr val="475569"/>
+          <p:cNvPr id="43" name="Text 41"/>
+          <p:cNvSpPr/>
+          <p:nvPr/>
+        </p:nvSpPr>
+        <p:spPr>
+          <a:xfrm>
+            <a:off x="7107936" y="3364992"/>
+            <a:ext cx="76200" cy="475488"/>
+          </a:xfrm>
+          <a:prstGeom prst="rect">
+            <a:avLst/>
+          </a:prstGeom>
+          <a:noFill/>
+          <a:ln/>
+        </p:spPr>
+        <p:txBody>
+          <a:bodyPr wrap="square" lIns="0" tIns="0" rIns="0" bIns="0" rtlCol="0" anchor="ctr"/>
+          <a:lstStyle/>
+          <a:p>
+            <a:pPr algn="ctr" indent="0" marL="0">
+              <a:buNone/>
+            </a:pPr>
+            <a:r>
+              <a:rPr lang="en-US" sz="1600" b="1" dirty="0">
+                <a:solidFill>
+                  <a:srgbClr val="0D9488"/>
                 </a:solidFill>
                 <a:latin typeface="Trebuchet MS" pitchFamily="34" charset="0"/>
                 <a:ea typeface="Trebuchet MS" pitchFamily="34" charset="-122"/>
                 <a:cs typeface="Trebuchet MS" pitchFamily="34" charset="-120"/>
               </a:rPr>
-              <a:t>Phonemes</a:t>
-            </a:r>
-            <a:endParaRPr lang="en-US" sz="1100" dirty="0"/>
-          </a:p>
-        </p:txBody>
-      </p:sp>
-      <p:sp>
-        <p:nvSpPr>
-          <p:cNvPr id="45" name="Shape 43"/>
-          <p:cNvSpPr/>
-          <p:nvPr/>
-        </p:nvSpPr>
-        <p:spPr>
-          <a:xfrm>
-            <a:off x="1874520" y="4096512"/>
-            <a:ext cx="6903720" cy="658368"/>
+              <a:t>·</a:t>
+            </a:r>
+            <a:endParaRPr lang="en-US" sz="1600" dirty="0"/>
+          </a:p>
+        </p:txBody>
+      </p:sp>
+      <p:sp>
+        <p:nvSpPr>
+          <p:cNvPr id="44" name="Shape 42"/>
+          <p:cNvSpPr/>
+          <p:nvPr/>
+        </p:nvSpPr>
+        <p:spPr>
+          <a:xfrm>
+            <a:off x="7184136" y="3364992"/>
+            <a:ext cx="1225296" cy="475488"/>
           </a:xfrm>
           <a:prstGeom prst="rect">
             <a:avLst>
-              <a:gd name="adj" fmla="val 8333"/>
+              <a:gd name="adj" fmla="val 9615"/>
             </a:avLst>
           </a:prstGeom>
           <a:solidFill>
-            <a:srgbClr val="FCE7F3"/>
-          </a:solidFill>
-          <a:ln w="12700">
-            <a:solidFill>
-              <a:srgbClr val="DB2777"/>
-            </a:solidFill>
-            <a:prstDash val="solid"/>
-          </a:ln>
-        </p:spPr>
-      </p:sp>
-      <p:sp>
-        <p:nvSpPr>
-          <p:cNvPr id="46" name="Shape 44"/>
-          <p:cNvSpPr/>
-          <p:nvPr/>
-        </p:nvSpPr>
-        <p:spPr>
-          <a:xfrm>
-            <a:off x="1952596" y="4187952"/>
-            <a:ext cx="493776" cy="475488"/>
-          </a:xfrm>
-          <a:prstGeom prst="rect">
-            <a:avLst>
-              <a:gd name="adj" fmla="val 7692"/>
-            </a:avLst>
-          </a:prstGeom>
-          <a:solidFill>
             <a:srgbClr val="FFFFFF"/>
           </a:solidFill>
           <a:ln w="12700">
             <a:solidFill>
-              <a:srgbClr val="DB2777"/>
-            </a:solidFill>
-            <a:prstDash val="solid"/>
-          </a:ln>
-        </p:spPr>
-      </p:sp>
-      <p:sp>
-        <p:nvSpPr>
-          <p:cNvPr id="47" name="Text 45"/>
-          <p:cNvSpPr/>
-          <p:nvPr/>
-        </p:nvSpPr>
-        <p:spPr>
-          <a:xfrm>
-            <a:off x="1952596" y="4187952"/>
-            <a:ext cx="493776" cy="475488"/>
-          </a:xfrm>
-          <a:prstGeom prst="rect">
-            <a:avLst/>
-          </a:prstGeom>
-          <a:noFill/>
-          <a:ln/>
-        </p:spPr>
-        <p:txBody>
-          <a:bodyPr wrap="square" lIns="0" tIns="0" rIns="0" bIns="0" rtlCol="0" anchor="ctr"/>
-          <a:lstStyle/>
-          <a:p>
-            <a:pPr algn="ctr" indent="0" marL="0">
-              <a:buNone/>
-            </a:pPr>
-            <a:r>
-              <a:rPr lang="en-US" sz="900" b="1" dirty="0">
-                <a:solidFill>
-                  <a:srgbClr val="9D174D"/>
+              <a:srgbClr val="0D9488"/>
+            </a:solidFill>
+            <a:prstDash val="solid"/>
+          </a:ln>
+        </p:spPr>
+      </p:sp>
+      <p:sp>
+        <p:nvSpPr>
+          <p:cNvPr id="45" name="Text 43"/>
+          <p:cNvSpPr/>
+          <p:nvPr/>
+        </p:nvSpPr>
+        <p:spPr>
+          <a:xfrm>
+            <a:off x="7184136" y="3364992"/>
+            <a:ext cx="1225296" cy="475488"/>
+          </a:xfrm>
+          <a:prstGeom prst="rect">
+            <a:avLst/>
+          </a:prstGeom>
+          <a:noFill/>
+          <a:ln/>
+        </p:spPr>
+        <p:txBody>
+          <a:bodyPr wrap="square" lIns="0" tIns="0" rIns="0" bIns="0" rtlCol="0" anchor="ctr"/>
+          <a:lstStyle/>
+          <a:p>
+            <a:pPr algn="ctr" indent="0" marL="0">
+              <a:buNone/>
+            </a:pPr>
+            <a:r>
+              <a:rPr lang="en-US" sz="1400" b="1" dirty="0">
+                <a:solidFill>
+                  <a:srgbClr val="0D9488"/>
                 </a:solidFill>
                 <a:latin typeface="Trebuchet MS" pitchFamily="34" charset="0"/>
                 <a:ea typeface="Trebuchet MS" pitchFamily="34" charset="-122"/>
                 <a:cs typeface="Trebuchet MS" pitchFamily="34" charset="-120"/>
               </a:rPr>
-              <a:t>c</a:t>
-            </a:r>
-            <a:endParaRPr lang="en-US" sz="900" dirty="0"/>
-          </a:p>
-        </p:txBody>
-      </p:sp>
-      <p:sp>
-        <p:nvSpPr>
-          <p:cNvPr id="48" name="Shape 46"/>
-          <p:cNvSpPr/>
-          <p:nvPr/>
-        </p:nvSpPr>
-        <p:spPr>
-          <a:xfrm>
-            <a:off x="2497015" y="4187952"/>
-            <a:ext cx="493776" cy="475488"/>
+              <a:t>tion</a:t>
+            </a:r>
+            <a:endParaRPr lang="en-US" sz="1400" dirty="0"/>
+          </a:p>
+        </p:txBody>
+      </p:sp>
+      <p:sp>
+        <p:nvSpPr>
+          <p:cNvPr id="46" name="Shape 44"/>
+          <p:cNvSpPr/>
+          <p:nvPr/>
+        </p:nvSpPr>
+        <p:spPr>
+          <a:xfrm>
+            <a:off x="365760" y="4096512"/>
+            <a:ext cx="1371600" cy="804672"/>
           </a:xfrm>
           <a:prstGeom prst="rect">
             <a:avLst>
-              <a:gd name="adj" fmla="val 7692"/>
+              <a:gd name="adj" fmla="val 6818"/>
             </a:avLst>
           </a:prstGeom>
           <a:solidFill>
-            <a:srgbClr val="FFFFFF"/>
-          </a:solidFill>
-          <a:ln w="12700">
-            <a:solidFill>
-              <a:srgbClr val="DB2777"/>
-            </a:solidFill>
-            <a:prstDash val="solid"/>
-          </a:ln>
-        </p:spPr>
-      </p:sp>
-      <p:sp>
-        <p:nvSpPr>
-          <p:cNvPr id="49" name="Text 47"/>
-          <p:cNvSpPr/>
-          <p:nvPr/>
-        </p:nvSpPr>
-        <p:spPr>
-          <a:xfrm>
-            <a:off x="2497015" y="4187952"/>
-            <a:ext cx="493776" cy="475488"/>
-          </a:xfrm>
-          <a:prstGeom prst="rect">
-            <a:avLst/>
-          </a:prstGeom>
-          <a:noFill/>
-          <a:ln/>
-        </p:spPr>
-        <p:txBody>
-          <a:bodyPr wrap="square" lIns="0" tIns="0" rIns="0" bIns="0" rtlCol="0" anchor="ctr"/>
-          <a:lstStyle/>
-          <a:p>
-            <a:pPr algn="ctr" indent="0" marL="0">
-              <a:buNone/>
-            </a:pPr>
-            <a:r>
-              <a:rPr lang="en-US" sz="900" b="1" dirty="0">
-                <a:solidFill>
-                  <a:srgbClr val="9D174D"/>
+            <a:srgbClr val="E2E8F0"/>
+          </a:solidFill>
+          <a:ln w="12700">
+            <a:solidFill>
+              <a:srgbClr val="E2E8F0"/>
+            </a:solidFill>
+            <a:prstDash val="solid"/>
+          </a:ln>
+        </p:spPr>
+      </p:sp>
+      <p:sp>
+        <p:nvSpPr>
+          <p:cNvPr id="47" name="Text 45"/>
+          <p:cNvSpPr/>
+          <p:nvPr/>
+        </p:nvSpPr>
+        <p:spPr>
+          <a:xfrm>
+            <a:off x="365760" y="4096512"/>
+            <a:ext cx="1371600" cy="804672"/>
+          </a:xfrm>
+          <a:prstGeom prst="rect">
+            <a:avLst/>
+          </a:prstGeom>
+          <a:noFill/>
+          <a:ln/>
+        </p:spPr>
+        <p:txBody>
+          <a:bodyPr wrap="square" lIns="0" tIns="0" rIns="0" bIns="0" rtlCol="0" anchor="ctr"/>
+          <a:lstStyle/>
+          <a:p>
+            <a:pPr algn="ctr" indent="0" marL="0">
+              <a:buNone/>
+            </a:pPr>
+            <a:r>
+              <a:rPr lang="en-US" sz="1100" b="1" dirty="0">
+                <a:solidFill>
+                  <a:srgbClr val="475569"/>
                 </a:solidFill>
                 <a:latin typeface="Trebuchet MS" pitchFamily="34" charset="0"/>
                 <a:ea typeface="Trebuchet MS" pitchFamily="34" charset="-122"/>
                 <a:cs typeface="Trebuchet MS" pitchFamily="34" charset="-120"/>
               </a:rPr>
-              <a:t>o</a:t>
-            </a:r>
-            <a:endParaRPr lang="en-US" sz="900" dirty="0"/>
-          </a:p>
-        </p:txBody>
-      </p:sp>
-      <p:sp>
-        <p:nvSpPr>
-          <p:cNvPr id="50" name="Shape 48"/>
-          <p:cNvSpPr/>
-          <p:nvPr/>
-        </p:nvSpPr>
-        <p:spPr>
-          <a:xfrm>
-            <a:off x="3041435" y="4187952"/>
-            <a:ext cx="493776" cy="475488"/>
+              <a:t>Phonemes</a:t>
+            </a:r>
+            <a:endParaRPr lang="en-US" sz="1100" dirty="0"/>
+          </a:p>
+        </p:txBody>
+      </p:sp>
+      <p:sp>
+        <p:nvSpPr>
+          <p:cNvPr id="48" name="Shape 46"/>
+          <p:cNvSpPr/>
+          <p:nvPr/>
+        </p:nvSpPr>
+        <p:spPr>
+          <a:xfrm>
+            <a:off x="1874520" y="4096512"/>
+            <a:ext cx="6903720" cy="804672"/>
           </a:xfrm>
           <a:prstGeom prst="rect">
             <a:avLst>
-              <a:gd name="adj" fmla="val 7692"/>
+              <a:gd name="adj" fmla="val 6818"/>
             </a:avLst>
           </a:prstGeom>
           <a:solidFill>
+            <a:srgbClr val="FCE7F3"/>
+          </a:solidFill>
+          <a:ln w="12700">
+            <a:solidFill>
+              <a:srgbClr val="DB2777"/>
+            </a:solidFill>
+            <a:prstDash val="solid"/>
+          </a:ln>
+        </p:spPr>
+      </p:sp>
+      <p:sp>
+        <p:nvSpPr>
+          <p:cNvPr id="49" name="Shape 47"/>
+          <p:cNvSpPr/>
+          <p:nvPr/>
+        </p:nvSpPr>
+        <p:spPr>
+          <a:xfrm>
+            <a:off x="1952244" y="4169664"/>
+            <a:ext cx="543652" cy="384048"/>
+          </a:xfrm>
+          <a:prstGeom prst="rect">
+            <a:avLst>
+              <a:gd name="adj" fmla="val 9524"/>
+            </a:avLst>
+          </a:prstGeom>
+          <a:solidFill>
             <a:srgbClr val="FFFFFF"/>
           </a:solidFill>
           <a:ln w="12700">
@@ -31208,14 +31076,14 @@
       </p:sp>
       <p:sp>
         <p:nvSpPr>
-          <p:cNvPr id="51" name="Text 49"/>
-          <p:cNvSpPr/>
-          <p:nvPr/>
-        </p:nvSpPr>
-        <p:spPr>
-          <a:xfrm>
-            <a:off x="3041435" y="4187952"/>
-            <a:ext cx="493776" cy="475488"/>
+          <p:cNvPr id="50" name="Text 48"/>
+          <p:cNvSpPr/>
+          <p:nvPr/>
+        </p:nvSpPr>
+        <p:spPr>
+          <a:xfrm>
+            <a:off x="1952244" y="4169664"/>
+            <a:ext cx="543652" cy="384048"/>
           </a:xfrm>
           <a:prstGeom prst="rect">
             <a:avLst/>
@@ -31239,7 +31107,7 @@
                 <a:ea typeface="Trebuchet MS" pitchFamily="34" charset="-122"/>
                 <a:cs typeface="Trebuchet MS" pitchFamily="34" charset="-120"/>
               </a:rPr>
-              <a:t>n</a:t>
+              <a:t>d</a:t>
             </a:r>
             <a:endParaRPr lang="en-US" sz="900" dirty="0"/>
           </a:p>
@@ -31247,18 +31115,18 @@
       </p:sp>
       <p:sp>
         <p:nvSpPr>
-          <p:cNvPr id="52" name="Shape 50"/>
-          <p:cNvSpPr/>
-          <p:nvPr/>
-        </p:nvSpPr>
-        <p:spPr>
-          <a:xfrm>
-            <a:off x="3585855" y="4187952"/>
-            <a:ext cx="493776" cy="475488"/>
+          <p:cNvPr id="51" name="Shape 49"/>
+          <p:cNvSpPr/>
+          <p:nvPr/>
+        </p:nvSpPr>
+        <p:spPr>
+          <a:xfrm>
+            <a:off x="2546188" y="4169664"/>
+            <a:ext cx="543652" cy="384048"/>
           </a:xfrm>
           <a:prstGeom prst="rect">
             <a:avLst>
-              <a:gd name="adj" fmla="val 7692"/>
+              <a:gd name="adj" fmla="val 9524"/>
             </a:avLst>
           </a:prstGeom>
           <a:solidFill>
@@ -31274,14 +31142,14 @@
       </p:sp>
       <p:sp>
         <p:nvSpPr>
-          <p:cNvPr id="53" name="Text 51"/>
-          <p:cNvSpPr/>
-          <p:nvPr/>
-        </p:nvSpPr>
-        <p:spPr>
-          <a:xfrm>
-            <a:off x="3585855" y="4187952"/>
-            <a:ext cx="493776" cy="475488"/>
+          <p:cNvPr id="52" name="Text 50"/>
+          <p:cNvSpPr/>
+          <p:nvPr/>
+        </p:nvSpPr>
+        <p:spPr>
+          <a:xfrm>
+            <a:off x="2546188" y="4169664"/>
+            <a:ext cx="543652" cy="384048"/>
           </a:xfrm>
           <a:prstGeom prst="rect">
             <a:avLst/>
@@ -31305,7 +31173,7 @@
                 <a:ea typeface="Trebuchet MS" pitchFamily="34" charset="-122"/>
                 <a:cs typeface="Trebuchet MS" pitchFamily="34" charset="-120"/>
               </a:rPr>
-              <a:t>c</a:t>
+              <a:t>e</a:t>
             </a:r>
             <a:endParaRPr lang="en-US" sz="900" dirty="0"/>
           </a:p>
@@ -31313,18 +31181,18 @@
       </p:sp>
       <p:sp>
         <p:nvSpPr>
-          <p:cNvPr id="54" name="Shape 52"/>
-          <p:cNvSpPr/>
-          <p:nvPr/>
-        </p:nvSpPr>
-        <p:spPr>
-          <a:xfrm>
-            <a:off x="4130274" y="4187952"/>
-            <a:ext cx="493776" cy="475488"/>
+          <p:cNvPr id="53" name="Shape 51"/>
+          <p:cNvSpPr/>
+          <p:nvPr/>
+        </p:nvSpPr>
+        <p:spPr>
+          <a:xfrm>
+            <a:off x="3140133" y="4169664"/>
+            <a:ext cx="543652" cy="384048"/>
           </a:xfrm>
           <a:prstGeom prst="rect">
             <a:avLst>
-              <a:gd name="adj" fmla="val 7692"/>
+              <a:gd name="adj" fmla="val 9524"/>
             </a:avLst>
           </a:prstGeom>
           <a:solidFill>
@@ -31340,14 +31208,14 @@
       </p:sp>
       <p:sp>
         <p:nvSpPr>
-          <p:cNvPr id="55" name="Text 53"/>
-          <p:cNvSpPr/>
-          <p:nvPr/>
-        </p:nvSpPr>
-        <p:spPr>
-          <a:xfrm>
-            <a:off x="4130274" y="4187952"/>
-            <a:ext cx="493776" cy="475488"/>
+          <p:cNvPr id="54" name="Text 52"/>
+          <p:cNvSpPr/>
+          <p:nvPr/>
+        </p:nvSpPr>
+        <p:spPr>
+          <a:xfrm>
+            <a:off x="3140133" y="4169664"/>
+            <a:ext cx="543652" cy="384048"/>
           </a:xfrm>
           <a:prstGeom prst="rect">
             <a:avLst/>
@@ -31371,7 +31239,7 @@
                 <a:ea typeface="Trebuchet MS" pitchFamily="34" charset="-122"/>
                 <a:cs typeface="Trebuchet MS" pitchFamily="34" charset="-120"/>
               </a:rPr>
-              <a:t>e</a:t>
+              <a:t>t</a:t>
             </a:r>
             <a:endParaRPr lang="en-US" sz="900" dirty="0"/>
           </a:p>
@@ -31379,18 +31247,18 @@
       </p:sp>
       <p:sp>
         <p:nvSpPr>
-          <p:cNvPr id="56" name="Shape 54"/>
-          <p:cNvSpPr/>
-          <p:nvPr/>
-        </p:nvSpPr>
-        <p:spPr>
-          <a:xfrm>
-            <a:off x="4674694" y="4187952"/>
-            <a:ext cx="493776" cy="475488"/>
+          <p:cNvPr id="55" name="Shape 53"/>
+          <p:cNvSpPr/>
+          <p:nvPr/>
+        </p:nvSpPr>
+        <p:spPr>
+          <a:xfrm>
+            <a:off x="3734077" y="4169664"/>
+            <a:ext cx="543652" cy="384048"/>
           </a:xfrm>
           <a:prstGeom prst="rect">
             <a:avLst>
-              <a:gd name="adj" fmla="val 7692"/>
+              <a:gd name="adj" fmla="val 9524"/>
             </a:avLst>
           </a:prstGeom>
           <a:solidFill>
@@ -31406,14 +31274,14 @@
       </p:sp>
       <p:sp>
         <p:nvSpPr>
-          <p:cNvPr id="57" name="Text 55"/>
-          <p:cNvSpPr/>
-          <p:nvPr/>
-        </p:nvSpPr>
-        <p:spPr>
-          <a:xfrm>
-            <a:off x="4674694" y="4187952"/>
-            <a:ext cx="493776" cy="475488"/>
+          <p:cNvPr id="56" name="Text 54"/>
+          <p:cNvSpPr/>
+          <p:nvPr/>
+        </p:nvSpPr>
+        <p:spPr>
+          <a:xfrm>
+            <a:off x="3734077" y="4169664"/>
+            <a:ext cx="543652" cy="384048"/>
           </a:xfrm>
           <a:prstGeom prst="rect">
             <a:avLst/>
@@ -31437,7 +31305,7 @@
                 <a:ea typeface="Trebuchet MS" pitchFamily="34" charset="-122"/>
                 <a:cs typeface="Trebuchet MS" pitchFamily="34" charset="-120"/>
               </a:rPr>
-              <a:t>n</a:t>
+              <a:t>er</a:t>
             </a:r>
             <a:endParaRPr lang="en-US" sz="900" dirty="0"/>
           </a:p>
@@ -31445,18 +31313,18 @@
       </p:sp>
       <p:sp>
         <p:nvSpPr>
-          <p:cNvPr id="58" name="Shape 56"/>
-          <p:cNvSpPr/>
-          <p:nvPr/>
-        </p:nvSpPr>
-        <p:spPr>
-          <a:xfrm>
-            <a:off x="5219114" y="4187952"/>
-            <a:ext cx="493776" cy="475488"/>
+          <p:cNvPr id="57" name="Shape 55"/>
+          <p:cNvSpPr/>
+          <p:nvPr/>
+        </p:nvSpPr>
+        <p:spPr>
+          <a:xfrm>
+            <a:off x="4328021" y="4169664"/>
+            <a:ext cx="543652" cy="384048"/>
           </a:xfrm>
           <a:prstGeom prst="rect">
             <a:avLst>
-              <a:gd name="adj" fmla="val 7692"/>
+              <a:gd name="adj" fmla="val 9524"/>
             </a:avLst>
           </a:prstGeom>
           <a:solidFill>
@@ -31472,14 +31340,14 @@
       </p:sp>
       <p:sp>
         <p:nvSpPr>
-          <p:cNvPr id="59" name="Text 57"/>
-          <p:cNvSpPr/>
-          <p:nvPr/>
-        </p:nvSpPr>
-        <p:spPr>
-          <a:xfrm>
-            <a:off x="5219114" y="4187952"/>
-            <a:ext cx="493776" cy="475488"/>
+          <p:cNvPr id="58" name="Text 56"/>
+          <p:cNvSpPr/>
+          <p:nvPr/>
+        </p:nvSpPr>
+        <p:spPr>
+          <a:xfrm>
+            <a:off x="4328021" y="4169664"/>
+            <a:ext cx="543652" cy="384048"/>
           </a:xfrm>
           <a:prstGeom prst="rect">
             <a:avLst/>
@@ -31503,7 +31371,7 @@
                 <a:ea typeface="Trebuchet MS" pitchFamily="34" charset="-122"/>
                 <a:cs typeface="Trebuchet MS" pitchFamily="34" charset="-120"/>
               </a:rPr>
-              <a:t>t</a:t>
+              <a:t>m</a:t>
             </a:r>
             <a:endParaRPr lang="en-US" sz="900" dirty="0"/>
           </a:p>
@@ -31511,18 +31379,18 @@
       </p:sp>
       <p:sp>
         <p:nvSpPr>
-          <p:cNvPr id="60" name="Shape 58"/>
-          <p:cNvSpPr/>
-          <p:nvPr/>
-        </p:nvSpPr>
-        <p:spPr>
-          <a:xfrm>
-            <a:off x="5763534" y="4187952"/>
-            <a:ext cx="493776" cy="475488"/>
+          <p:cNvPr id="59" name="Shape 57"/>
+          <p:cNvSpPr/>
+          <p:nvPr/>
+        </p:nvSpPr>
+        <p:spPr>
+          <a:xfrm>
+            <a:off x="4921966" y="4169664"/>
+            <a:ext cx="543652" cy="384048"/>
           </a:xfrm>
           <a:prstGeom prst="rect">
             <a:avLst>
-              <a:gd name="adj" fmla="val 7692"/>
+              <a:gd name="adj" fmla="val 9524"/>
             </a:avLst>
           </a:prstGeom>
           <a:solidFill>
@@ -31538,14 +31406,14 @@
       </p:sp>
       <p:sp>
         <p:nvSpPr>
-          <p:cNvPr id="61" name="Text 59"/>
-          <p:cNvSpPr/>
-          <p:nvPr/>
-        </p:nvSpPr>
-        <p:spPr>
-          <a:xfrm>
-            <a:off x="5763534" y="4187952"/>
-            <a:ext cx="493776" cy="475488"/>
+          <p:cNvPr id="60" name="Text 58"/>
+          <p:cNvSpPr/>
+          <p:nvPr/>
+        </p:nvSpPr>
+        <p:spPr>
+          <a:xfrm>
+            <a:off x="4921966" y="4169664"/>
+            <a:ext cx="543652" cy="384048"/>
           </a:xfrm>
           <a:prstGeom prst="rect">
             <a:avLst/>
@@ -31569,7 +31437,7 @@
                 <a:ea typeface="Trebuchet MS" pitchFamily="34" charset="-122"/>
                 <a:cs typeface="Trebuchet MS" pitchFamily="34" charset="-120"/>
               </a:rPr>
-              <a:t>r</a:t>
+              <a:t>i</a:t>
             </a:r>
             <a:endParaRPr lang="en-US" sz="900" dirty="0"/>
           </a:p>
@@ -31577,18 +31445,18 @@
       </p:sp>
       <p:sp>
         <p:nvSpPr>
-          <p:cNvPr id="62" name="Shape 60"/>
-          <p:cNvSpPr/>
-          <p:nvPr/>
-        </p:nvSpPr>
-        <p:spPr>
-          <a:xfrm>
-            <a:off x="6307953" y="4187952"/>
-            <a:ext cx="493776" cy="475488"/>
+          <p:cNvPr id="61" name="Shape 59"/>
+          <p:cNvSpPr/>
+          <p:nvPr/>
+        </p:nvSpPr>
+        <p:spPr>
+          <a:xfrm>
+            <a:off x="5515910" y="4169664"/>
+            <a:ext cx="543652" cy="384048"/>
           </a:xfrm>
           <a:prstGeom prst="rect">
             <a:avLst>
-              <a:gd name="adj" fmla="val 7692"/>
+              <a:gd name="adj" fmla="val 9524"/>
             </a:avLst>
           </a:prstGeom>
           <a:solidFill>
@@ -31604,14 +31472,14 @@
       </p:sp>
       <p:sp>
         <p:nvSpPr>
-          <p:cNvPr id="63" name="Text 61"/>
-          <p:cNvSpPr/>
-          <p:nvPr/>
-        </p:nvSpPr>
-        <p:spPr>
-          <a:xfrm>
-            <a:off x="6307953" y="4187952"/>
-            <a:ext cx="493776" cy="475488"/>
+          <p:cNvPr id="62" name="Text 60"/>
+          <p:cNvSpPr/>
+          <p:nvPr/>
+        </p:nvSpPr>
+        <p:spPr>
+          <a:xfrm>
+            <a:off x="5515910" y="4169664"/>
+            <a:ext cx="543652" cy="384048"/>
           </a:xfrm>
           <a:prstGeom prst="rect">
             <a:avLst/>
@@ -31635,7 +31503,7 @@
                 <a:ea typeface="Trebuchet MS" pitchFamily="34" charset="-122"/>
                 <a:cs typeface="Trebuchet MS" pitchFamily="34" charset="-120"/>
               </a:rPr>
-              <a:t>a</a:t>
+              <a:t>n</a:t>
             </a:r>
             <a:endParaRPr lang="en-US" sz="900" dirty="0"/>
           </a:p>
@@ -31643,18 +31511,18 @@
       </p:sp>
       <p:sp>
         <p:nvSpPr>
-          <p:cNvPr id="64" name="Shape 62"/>
-          <p:cNvSpPr/>
-          <p:nvPr/>
-        </p:nvSpPr>
-        <p:spPr>
-          <a:xfrm>
-            <a:off x="6852373" y="4187952"/>
-            <a:ext cx="493776" cy="475488"/>
+          <p:cNvPr id="63" name="Shape 61"/>
+          <p:cNvSpPr/>
+          <p:nvPr/>
+        </p:nvSpPr>
+        <p:spPr>
+          <a:xfrm>
+            <a:off x="6109855" y="4169664"/>
+            <a:ext cx="543652" cy="384048"/>
           </a:xfrm>
           <a:prstGeom prst="rect">
             <a:avLst>
-              <a:gd name="adj" fmla="val 7692"/>
+              <a:gd name="adj" fmla="val 9524"/>
             </a:avLst>
           </a:prstGeom>
           <a:solidFill>
@@ -31670,14 +31538,14 @@
       </p:sp>
       <p:sp>
         <p:nvSpPr>
-          <p:cNvPr id="65" name="Text 63"/>
-          <p:cNvSpPr/>
-          <p:nvPr/>
-        </p:nvSpPr>
-        <p:spPr>
-          <a:xfrm>
-            <a:off x="6852373" y="4187952"/>
-            <a:ext cx="493776" cy="475488"/>
+          <p:cNvPr id="64" name="Text 62"/>
+          <p:cNvSpPr/>
+          <p:nvPr/>
+        </p:nvSpPr>
+        <p:spPr>
+          <a:xfrm>
+            <a:off x="6109855" y="4169664"/>
+            <a:ext cx="543652" cy="384048"/>
           </a:xfrm>
           <a:prstGeom prst="rect">
             <a:avLst/>
@@ -31701,7 +31569,7 @@
                 <a:ea typeface="Trebuchet MS" pitchFamily="34" charset="-122"/>
                 <a:cs typeface="Trebuchet MS" pitchFamily="34" charset="-120"/>
               </a:rPr>
-              <a:t>t</a:t>
+              <a:t>a</a:t>
             </a:r>
             <a:endParaRPr lang="en-US" sz="900" dirty="0"/>
           </a:p>
@@ -31709,18 +31577,18 @@
       </p:sp>
       <p:sp>
         <p:nvSpPr>
-          <p:cNvPr id="66" name="Shape 64"/>
-          <p:cNvSpPr/>
-          <p:nvPr/>
-        </p:nvSpPr>
-        <p:spPr>
-          <a:xfrm>
-            <a:off x="7396793" y="4187952"/>
-            <a:ext cx="493776" cy="475488"/>
+          <p:cNvPr id="65" name="Shape 63"/>
+          <p:cNvSpPr/>
+          <p:nvPr/>
+        </p:nvSpPr>
+        <p:spPr>
+          <a:xfrm>
+            <a:off x="6703799" y="4169664"/>
+            <a:ext cx="543652" cy="384048"/>
           </a:xfrm>
           <a:prstGeom prst="rect">
             <a:avLst>
-              <a:gd name="adj" fmla="val 7692"/>
+              <a:gd name="adj" fmla="val 9524"/>
             </a:avLst>
           </a:prstGeom>
           <a:solidFill>
@@ -31736,14 +31604,14 @@
       </p:sp>
       <p:sp>
         <p:nvSpPr>
-          <p:cNvPr id="67" name="Text 65"/>
-          <p:cNvSpPr/>
-          <p:nvPr/>
-        </p:nvSpPr>
-        <p:spPr>
-          <a:xfrm>
-            <a:off x="7396793" y="4187952"/>
-            <a:ext cx="493776" cy="475488"/>
+          <p:cNvPr id="66" name="Text 64"/>
+          <p:cNvSpPr/>
+          <p:nvPr/>
+        </p:nvSpPr>
+        <p:spPr>
+          <a:xfrm>
+            <a:off x="6703799" y="4169664"/>
+            <a:ext cx="543652" cy="384048"/>
           </a:xfrm>
           <a:prstGeom prst="rect">
             <a:avLst/>
@@ -31767,6 +31635,111 @@
                 <a:ea typeface="Trebuchet MS" pitchFamily="34" charset="-122"/>
                 <a:cs typeface="Trebuchet MS" pitchFamily="34" charset="-120"/>
               </a:rPr>
+              <a:t>t</a:t>
+            </a:r>
+            <a:endParaRPr lang="en-US" sz="900" dirty="0"/>
+          </a:p>
+        </p:txBody>
+      </p:sp>
+      <p:sp>
+        <p:nvSpPr>
+          <p:cNvPr id="67" name="Text 65"/>
+          <p:cNvSpPr/>
+          <p:nvPr/>
+        </p:nvSpPr>
+        <p:spPr>
+          <a:xfrm>
+            <a:off x="6703799" y="4572000"/>
+            <a:ext cx="543652" cy="219456"/>
+          </a:xfrm>
+          <a:prstGeom prst="rect">
+            <a:avLst/>
+          </a:prstGeom>
+          <a:noFill/>
+          <a:ln/>
+        </p:spPr>
+        <p:txBody>
+          <a:bodyPr wrap="square" lIns="0" tIns="0" rIns="0" bIns="0" rtlCol="0" anchor="t"/>
+          <a:lstStyle/>
+          <a:p>
+            <a:pPr algn="ctr" indent="0" marL="0">
+              <a:buNone/>
+            </a:pPr>
+            <a:r>
+              <a:rPr lang="en-US" sz="750" i="1" dirty="0">
+                <a:solidFill>
+                  <a:srgbClr val="94A3B8"/>
+                </a:solidFill>
+                <a:latin typeface="Calibri" pitchFamily="34" charset="0"/>
+                <a:ea typeface="Calibri" pitchFamily="34" charset="-122"/>
+                <a:cs typeface="Calibri" pitchFamily="34" charset="-120"/>
+              </a:rPr>
+              <a:t>/sh/</a:t>
+            </a:r>
+            <a:endParaRPr lang="en-US" sz="750" dirty="0"/>
+          </a:p>
+        </p:txBody>
+      </p:sp>
+      <p:sp>
+        <p:nvSpPr>
+          <p:cNvPr id="68" name="Shape 66"/>
+          <p:cNvSpPr/>
+          <p:nvPr/>
+        </p:nvSpPr>
+        <p:spPr>
+          <a:xfrm>
+            <a:off x="7297743" y="4169664"/>
+            <a:ext cx="543652" cy="384048"/>
+          </a:xfrm>
+          <a:prstGeom prst="rect">
+            <a:avLst>
+              <a:gd name="adj" fmla="val 9524"/>
+            </a:avLst>
+          </a:prstGeom>
+          <a:solidFill>
+            <a:srgbClr val="FFFFFF"/>
+          </a:solidFill>
+          <a:ln w="12700">
+            <a:solidFill>
+              <a:srgbClr val="DB2777"/>
+            </a:solidFill>
+            <a:prstDash val="solid"/>
+          </a:ln>
+        </p:spPr>
+      </p:sp>
+      <p:sp>
+        <p:nvSpPr>
+          <p:cNvPr id="69" name="Text 67"/>
+          <p:cNvSpPr/>
+          <p:nvPr/>
+        </p:nvSpPr>
+        <p:spPr>
+          <a:xfrm>
+            <a:off x="7297743" y="4169664"/>
+            <a:ext cx="543652" cy="384048"/>
+          </a:xfrm>
+          <a:prstGeom prst="rect">
+            <a:avLst/>
+          </a:prstGeom>
+          <a:noFill/>
+          <a:ln/>
+        </p:spPr>
+        <p:txBody>
+          <a:bodyPr wrap="square" lIns="0" tIns="0" rIns="0" bIns="0" rtlCol="0" anchor="ctr"/>
+          <a:lstStyle/>
+          <a:p>
+            <a:pPr algn="ctr" indent="0" marL="0">
+              <a:buNone/>
+            </a:pPr>
+            <a:r>
+              <a:rPr lang="en-US" sz="900" b="1" dirty="0">
+                <a:solidFill>
+                  <a:srgbClr val="9D174D"/>
+                </a:solidFill>
+                <a:latin typeface="Trebuchet MS" pitchFamily="34" charset="0"/>
+                <a:ea typeface="Trebuchet MS" pitchFamily="34" charset="-122"/>
+                <a:cs typeface="Trebuchet MS" pitchFamily="34" charset="-120"/>
+              </a:rPr>
               <a:t>io</a:t>
             </a:r>
             <a:endParaRPr lang="en-US" sz="900" dirty="0"/>
@@ -31775,18 +31748,18 @@
       </p:sp>
       <p:sp>
         <p:nvSpPr>
-          <p:cNvPr id="68" name="Shape 66"/>
-          <p:cNvSpPr/>
-          <p:nvPr/>
-        </p:nvSpPr>
-        <p:spPr>
-          <a:xfrm>
-            <a:off x="7941212" y="4187952"/>
-            <a:ext cx="493776" cy="475488"/>
+          <p:cNvPr id="70" name="Shape 68"/>
+          <p:cNvSpPr/>
+          <p:nvPr/>
+        </p:nvSpPr>
+        <p:spPr>
+          <a:xfrm>
+            <a:off x="7891688" y="4169664"/>
+            <a:ext cx="543652" cy="384048"/>
           </a:xfrm>
           <a:prstGeom prst="rect">
             <a:avLst>
-              <a:gd name="adj" fmla="val 7692"/>
+              <a:gd name="adj" fmla="val 9524"/>
             </a:avLst>
           </a:prstGeom>
           <a:solidFill>
@@ -31802,14 +31775,14 @@
       </p:sp>
       <p:sp>
         <p:nvSpPr>
-          <p:cNvPr id="69" name="Text 67"/>
-          <p:cNvSpPr/>
-          <p:nvPr/>
-        </p:nvSpPr>
-        <p:spPr>
-          <a:xfrm>
-            <a:off x="7941212" y="4187952"/>
-            <a:ext cx="493776" cy="475488"/>
+          <p:cNvPr id="71" name="Text 69"/>
+          <p:cNvSpPr/>
+          <p:nvPr/>
+        </p:nvSpPr>
+        <p:spPr>
+          <a:xfrm>
+            <a:off x="7891688" y="4169664"/>
+            <a:ext cx="543652" cy="384048"/>
           </a:xfrm>
           <a:prstGeom prst="rect">
             <a:avLst/>
@@ -32125,7 +32098,7 @@
                 <a:ea typeface="Calibri" pitchFamily="34" charset="-122"/>
                 <a:cs typeface="Calibri" pitchFamily="34" charset="-120"/>
               </a:rPr>
-              <a:t>Word Labs  •  wordlabs.app  •  Suffix: '-tion' = act, state, or result</a:t>
+              <a:t>Word Labs  •  wordlabs.app  •  Suffix: '-tion' = act, process, or state</a:t>
             </a:r>
             <a:endParaRPr lang="en-US" sz="800" dirty="0"/>
           </a:p>
@@ -32543,11 +32516,11 @@
         <p:spPr>
           <a:xfrm>
             <a:off x="365760" y="4096512"/>
-            <a:ext cx="1371600" cy="658368"/>
+            <a:ext cx="1371600" cy="804672"/>
           </a:xfrm>
           <a:prstGeom prst="rect">
             <a:avLst>
-              <a:gd name="adj" fmla="val 8333"/>
+              <a:gd name="adj" fmla="val 6818"/>
             </a:avLst>
           </a:prstGeom>
           <a:solidFill>
@@ -32570,7 +32543,7 @@
         <p:spPr>
           <a:xfrm>
             <a:off x="365760" y="4096512"/>
-            <a:ext cx="1371600" cy="658368"/>
+            <a:ext cx="1371600" cy="804672"/>
           </a:xfrm>
           <a:prstGeom prst="rect">
             <a:avLst/>
@@ -32609,11 +32582,11 @@
         <p:spPr>
           <a:xfrm>
             <a:off x="1874520" y="4096512"/>
-            <a:ext cx="6903720" cy="658368"/>
+            <a:ext cx="6903720" cy="804672"/>
           </a:xfrm>
           <a:prstGeom prst="rect">
             <a:avLst>
-              <a:gd name="adj" fmla="val 8333"/>
+              <a:gd name="adj" fmla="val 6818"/>
             </a:avLst>
           </a:prstGeom>
           <a:solidFill>
@@ -32636,7 +32609,7 @@
         <p:spPr>
           <a:xfrm>
             <a:off x="1874520" y="4096512"/>
-            <a:ext cx="6903720" cy="658368"/>
+            <a:ext cx="6903720" cy="804672"/>
           </a:xfrm>
           <a:prstGeom prst="rect">
             <a:avLst/>
@@ -32952,7 +32925,7 @@
                 <a:ea typeface="Calibri" pitchFamily="34" charset="-122"/>
                 <a:cs typeface="Calibri" pitchFamily="34" charset="-120"/>
               </a:rPr>
-              <a:t>Word Labs  •  wordlabs.app  •  Suffix: '-tion' = act, state, or result</a:t>
+              <a:t>Word Labs  •  wordlabs.app  •  Suffix: '-tion' = act, process, or state</a:t>
             </a:r>
             <a:endParaRPr lang="en-US" sz="800" dirty="0"/>
           </a:p>
@@ -33230,7 +33203,7 @@
                 <a:ea typeface="Trebuchet MS" pitchFamily="34" charset="-122"/>
                 <a:cs typeface="Trebuchet MS" pitchFamily="34" charset="-120"/>
               </a:rPr>
-              <a:t>solv</a:t>
+              <a:t>solut</a:t>
             </a:r>
             <a:endParaRPr lang="en-US" sz="1300" dirty="0"/>
           </a:p>
@@ -33269,7 +33242,7 @@
                 <a:ea typeface="Calibri" pitchFamily="34" charset="-122"/>
                 <a:cs typeface="Calibri" pitchFamily="34" charset="-120"/>
               </a:rPr>
-              <a:t>loosen or answer</a:t>
+              <a:t>loosen / free</a:t>
             </a:r>
             <a:endParaRPr lang="en-US" sz="850" dirty="0"/>
           </a:p>
@@ -33277,46 +33250,7 @@
       </p:sp>
       <p:sp>
         <p:nvSpPr>
-          <p:cNvPr id="19" name="Text 17"/>
-          <p:cNvSpPr/>
-          <p:nvPr/>
-        </p:nvSpPr>
-        <p:spPr>
-          <a:xfrm>
-            <a:off x="2938272" y="2752344"/>
-            <a:ext cx="1828800" cy="182880"/>
-          </a:xfrm>
-          <a:prstGeom prst="rect">
-            <a:avLst/>
-          </a:prstGeom>
-          <a:noFill/>
-          <a:ln/>
-        </p:spPr>
-        <p:txBody>
-          <a:bodyPr wrap="square" lIns="0" tIns="0" rIns="0" bIns="0" rtlCol="0" anchor="t"/>
-          <a:lstStyle/>
-          <a:p>
-            <a:pPr algn="ctr" indent="0" marL="0">
-              <a:buNone/>
-            </a:pPr>
-            <a:r>
-              <a:rPr lang="en-US" sz="700" i="1" dirty="0">
-                <a:solidFill>
-                  <a:srgbClr val="94A3B8"/>
-                </a:solidFill>
-                <a:latin typeface="Calibri" pitchFamily="34" charset="0"/>
-                <a:ea typeface="Calibri" pitchFamily="34" charset="-122"/>
-                <a:cs typeface="Calibri" pitchFamily="34" charset="-120"/>
-              </a:rPr>
-              <a:t>'v' dropped before '-tion'</a:t>
-            </a:r>
-            <a:endParaRPr lang="en-US" sz="700" dirty="0"/>
-          </a:p>
-        </p:txBody>
-      </p:sp>
-      <p:sp>
-        <p:nvSpPr>
-          <p:cNvPr id="20" name="Shape 18"/>
+          <p:cNvPr id="19" name="Shape 17"/>
           <p:cNvSpPr/>
           <p:nvPr/>
         </p:nvSpPr>
@@ -33331,11 +33265,11 @@
             </a:avLst>
           </a:prstGeom>
           <a:solidFill>
-            <a:srgbClr val="CCFBF1"/>
+            <a:srgbClr val="FCE7F3"/>
           </a:solidFill>
           <a:ln w="19050">
             <a:solidFill>
-              <a:srgbClr val="0D9488"/>
+              <a:srgbClr val="DB2777"/>
             </a:solidFill>
             <a:prstDash val="solid"/>
           </a:ln>
@@ -33350,7 +33284,7 @@
       </p:sp>
       <p:sp>
         <p:nvSpPr>
-          <p:cNvPr id="21" name="Text 19"/>
+          <p:cNvPr id="20" name="Text 18"/>
           <p:cNvSpPr/>
           <p:nvPr/>
         </p:nvSpPr>
@@ -33375,13 +33309,13 @@
             <a:r>
               <a:rPr lang="en-US" sz="1300" b="1" dirty="0">
                 <a:solidFill>
-                  <a:srgbClr val="0F766E"/>
+                  <a:srgbClr val="9D174D"/>
                 </a:solidFill>
                 <a:latin typeface="Trebuchet MS" pitchFamily="34" charset="0"/>
                 <a:ea typeface="Trebuchet MS" pitchFamily="34" charset="-122"/>
                 <a:cs typeface="Trebuchet MS" pitchFamily="34" charset="-120"/>
               </a:rPr>
-              <a:t>tion</a:t>
+              <a:t>ion</a:t>
             </a:r>
             <a:endParaRPr lang="en-US" sz="1300" dirty="0"/>
           </a:p>
@@ -33389,7 +33323,7 @@
       </p:sp>
       <p:sp>
         <p:nvSpPr>
-          <p:cNvPr id="22" name="Text 20"/>
+          <p:cNvPr id="21" name="Text 19"/>
           <p:cNvSpPr/>
           <p:nvPr/>
         </p:nvSpPr>
@@ -33420,9 +33354,48 @@
                 <a:ea typeface="Calibri" pitchFamily="34" charset="-122"/>
                 <a:cs typeface="Calibri" pitchFamily="34" charset="-120"/>
               </a:rPr>
-              <a:t>act or state of</a:t>
+              <a:t>act or process</a:t>
             </a:r>
             <a:endParaRPr lang="en-US" sz="850" dirty="0"/>
+          </a:p>
+        </p:txBody>
+      </p:sp>
+      <p:sp>
+        <p:nvSpPr>
+          <p:cNvPr id="22" name="Text 20"/>
+          <p:cNvSpPr/>
+          <p:nvPr/>
+        </p:nvSpPr>
+        <p:spPr>
+          <a:xfrm>
+            <a:off x="5803392" y="2752344"/>
+            <a:ext cx="1828800" cy="182880"/>
+          </a:xfrm>
+          <a:prstGeom prst="rect">
+            <a:avLst/>
+          </a:prstGeom>
+          <a:noFill/>
+          <a:ln/>
+        </p:spPr>
+        <p:txBody>
+          <a:bodyPr wrap="square" lIns="0" tIns="0" rIns="0" bIns="0" rtlCol="0" anchor="t"/>
+          <a:lstStyle/>
+          <a:p>
+            <a:pPr algn="ctr" indent="0" marL="0">
+              <a:buNone/>
+            </a:pPr>
+            <a:r>
+              <a:rPr lang="en-US" sz="700" i="1" dirty="0">
+                <a:solidFill>
+                  <a:srgbClr val="94A3B8"/>
+                </a:solidFill>
+                <a:latin typeface="Calibri" pitchFamily="34" charset="0"/>
+                <a:ea typeface="Calibri" pitchFamily="34" charset="-122"/>
+                <a:cs typeface="Calibri" pitchFamily="34" charset="-120"/>
+              </a:rPr>
+              <a:t>'-ion' variant of '-tion' after certain bases</a:t>
+            </a:r>
+            <a:endParaRPr lang="en-US" sz="700" dirty="0"/>
           </a:p>
         </p:txBody>
       </p:sp>
@@ -33567,11 +33540,11 @@
         <p:spPr>
           <a:xfrm>
             <a:off x="365760" y="4096512"/>
-            <a:ext cx="1371600" cy="658368"/>
+            <a:ext cx="1371600" cy="804672"/>
           </a:xfrm>
           <a:prstGeom prst="rect">
             <a:avLst>
-              <a:gd name="adj" fmla="val 8333"/>
+              <a:gd name="adj" fmla="val 6818"/>
             </a:avLst>
           </a:prstGeom>
           <a:solidFill>
@@ -33594,7 +33567,7 @@
         <p:spPr>
           <a:xfrm>
             <a:off x="365760" y="4096512"/>
-            <a:ext cx="1371600" cy="658368"/>
+            <a:ext cx="1371600" cy="804672"/>
           </a:xfrm>
           <a:prstGeom prst="rect">
             <a:avLst/>
@@ -33633,11 +33606,11 @@
         <p:spPr>
           <a:xfrm>
             <a:off x="1874520" y="4096512"/>
-            <a:ext cx="6903720" cy="658368"/>
+            <a:ext cx="6903720" cy="804672"/>
           </a:xfrm>
           <a:prstGeom prst="rect">
             <a:avLst>
-              <a:gd name="adj" fmla="val 8333"/>
+              <a:gd name="adj" fmla="val 6818"/>
             </a:avLst>
           </a:prstGeom>
           <a:solidFill>
@@ -33660,7 +33633,7 @@
         <p:spPr>
           <a:xfrm>
             <a:off x="1874520" y="4096512"/>
-            <a:ext cx="6903720" cy="658368"/>
+            <a:ext cx="6903720" cy="804672"/>
           </a:xfrm>
           <a:prstGeom prst="rect">
             <a:avLst/>
@@ -33976,7 +33949,7 @@
                 <a:ea typeface="Calibri" pitchFamily="34" charset="-122"/>
                 <a:cs typeface="Calibri" pitchFamily="34" charset="-120"/>
               </a:rPr>
-              <a:t>Word Labs  •  wordlabs.app  •  Suffix: '-tion' = act, state, or result</a:t>
+              <a:t>Word Labs  •  wordlabs.app  •  Suffix: '-tion' = act, process, or state</a:t>
             </a:r>
             <a:endParaRPr lang="en-US" sz="800" dirty="0"/>
           </a:p>
@@ -34254,7 +34227,7 @@
                 <a:ea typeface="Trebuchet MS" pitchFamily="34" charset="-122"/>
                 <a:cs typeface="Trebuchet MS" pitchFamily="34" charset="-120"/>
               </a:rPr>
-              <a:t>solv</a:t>
+              <a:t>solut</a:t>
             </a:r>
             <a:endParaRPr lang="en-US" sz="1300" dirty="0"/>
           </a:p>
@@ -34293,7 +34266,7 @@
                 <a:ea typeface="Calibri" pitchFamily="34" charset="-122"/>
                 <a:cs typeface="Calibri" pitchFamily="34" charset="-120"/>
               </a:rPr>
-              <a:t>loosen or answer</a:t>
+              <a:t>loosen / free</a:t>
             </a:r>
             <a:endParaRPr lang="en-US" sz="850" dirty="0"/>
           </a:p>
@@ -34301,46 +34274,7 @@
       </p:sp>
       <p:sp>
         <p:nvSpPr>
-          <p:cNvPr id="19" name="Text 17"/>
-          <p:cNvSpPr/>
-          <p:nvPr/>
-        </p:nvSpPr>
-        <p:spPr>
-          <a:xfrm>
-            <a:off x="2938272" y="2752344"/>
-            <a:ext cx="1828800" cy="182880"/>
-          </a:xfrm>
-          <a:prstGeom prst="rect">
-            <a:avLst/>
-          </a:prstGeom>
-          <a:noFill/>
-          <a:ln/>
-        </p:spPr>
-        <p:txBody>
-          <a:bodyPr wrap="square" lIns="0" tIns="0" rIns="0" bIns="0" rtlCol="0" anchor="t"/>
-          <a:lstStyle/>
-          <a:p>
-            <a:pPr algn="ctr" indent="0" marL="0">
-              <a:buNone/>
-            </a:pPr>
-            <a:r>
-              <a:rPr lang="en-US" sz="700" i="1" dirty="0">
-                <a:solidFill>
-                  <a:srgbClr val="94A3B8"/>
-                </a:solidFill>
-                <a:latin typeface="Calibri" pitchFamily="34" charset="0"/>
-                <a:ea typeface="Calibri" pitchFamily="34" charset="-122"/>
-                <a:cs typeface="Calibri" pitchFamily="34" charset="-120"/>
-              </a:rPr>
-              <a:t>'v' dropped before '-tion'</a:t>
-            </a:r>
-            <a:endParaRPr lang="en-US" sz="700" dirty="0"/>
-          </a:p>
-        </p:txBody>
-      </p:sp>
-      <p:sp>
-        <p:nvSpPr>
-          <p:cNvPr id="20" name="Shape 18"/>
+          <p:cNvPr id="19" name="Shape 17"/>
           <p:cNvSpPr/>
           <p:nvPr/>
         </p:nvSpPr>
@@ -34355,11 +34289,11 @@
             </a:avLst>
           </a:prstGeom>
           <a:solidFill>
-            <a:srgbClr val="CCFBF1"/>
+            <a:srgbClr val="FCE7F3"/>
           </a:solidFill>
           <a:ln w="19050">
             <a:solidFill>
-              <a:srgbClr val="0D9488"/>
+              <a:srgbClr val="DB2777"/>
             </a:solidFill>
             <a:prstDash val="solid"/>
           </a:ln>
@@ -34374,7 +34308,7 @@
       </p:sp>
       <p:sp>
         <p:nvSpPr>
-          <p:cNvPr id="21" name="Text 19"/>
+          <p:cNvPr id="20" name="Text 18"/>
           <p:cNvSpPr/>
           <p:nvPr/>
         </p:nvSpPr>
@@ -34399,13 +34333,13 @@
             <a:r>
               <a:rPr lang="en-US" sz="1300" b="1" dirty="0">
                 <a:solidFill>
-                  <a:srgbClr val="0F766E"/>
+                  <a:srgbClr val="9D174D"/>
                 </a:solidFill>
                 <a:latin typeface="Trebuchet MS" pitchFamily="34" charset="0"/>
                 <a:ea typeface="Trebuchet MS" pitchFamily="34" charset="-122"/>
                 <a:cs typeface="Trebuchet MS" pitchFamily="34" charset="-120"/>
               </a:rPr>
-              <a:t>tion</a:t>
+              <a:t>ion</a:t>
             </a:r>
             <a:endParaRPr lang="en-US" sz="1300" dirty="0"/>
           </a:p>
@@ -34413,7 +34347,7 @@
       </p:sp>
       <p:sp>
         <p:nvSpPr>
-          <p:cNvPr id="22" name="Text 20"/>
+          <p:cNvPr id="21" name="Text 19"/>
           <p:cNvSpPr/>
           <p:nvPr/>
         </p:nvSpPr>
@@ -34444,9 +34378,48 @@
                 <a:ea typeface="Calibri" pitchFamily="34" charset="-122"/>
                 <a:cs typeface="Calibri" pitchFamily="34" charset="-120"/>
               </a:rPr>
-              <a:t>act or state of</a:t>
+              <a:t>act or process</a:t>
             </a:r>
             <a:endParaRPr lang="en-US" sz="850" dirty="0"/>
+          </a:p>
+        </p:txBody>
+      </p:sp>
+      <p:sp>
+        <p:nvSpPr>
+          <p:cNvPr id="22" name="Text 20"/>
+          <p:cNvSpPr/>
+          <p:nvPr/>
+        </p:nvSpPr>
+        <p:spPr>
+          <a:xfrm>
+            <a:off x="5803392" y="2752344"/>
+            <a:ext cx="1828800" cy="182880"/>
+          </a:xfrm>
+          <a:prstGeom prst="rect">
+            <a:avLst/>
+          </a:prstGeom>
+          <a:noFill/>
+          <a:ln/>
+        </p:spPr>
+        <p:txBody>
+          <a:bodyPr wrap="square" lIns="0" tIns="0" rIns="0" bIns="0" rtlCol="0" anchor="t"/>
+          <a:lstStyle/>
+          <a:p>
+            <a:pPr algn="ctr" indent="0" marL="0">
+              <a:buNone/>
+            </a:pPr>
+            <a:r>
+              <a:rPr lang="en-US" sz="700" i="1" dirty="0">
+                <a:solidFill>
+                  <a:srgbClr val="94A3B8"/>
+                </a:solidFill>
+                <a:latin typeface="Calibri" pitchFamily="34" charset="0"/>
+                <a:ea typeface="Calibri" pitchFamily="34" charset="-122"/>
+                <a:cs typeface="Calibri" pitchFamily="34" charset="-120"/>
+              </a:rPr>
+              <a:t>'-ion' variant of '-tion' after certain bases</a:t>
+            </a:r>
+            <a:endParaRPr lang="en-US" sz="700" dirty="0"/>
           </a:p>
         </p:txBody>
       </p:sp>
@@ -34828,11 +34801,11 @@
         <p:spPr>
           <a:xfrm>
             <a:off x="365760" y="4096512"/>
-            <a:ext cx="1371600" cy="658368"/>
+            <a:ext cx="1371600" cy="804672"/>
           </a:xfrm>
           <a:prstGeom prst="rect">
             <a:avLst>
-              <a:gd name="adj" fmla="val 8333"/>
+              <a:gd name="adj" fmla="val 6818"/>
             </a:avLst>
           </a:prstGeom>
           <a:solidFill>
@@ -34855,7 +34828,7 @@
         <p:spPr>
           <a:xfrm>
             <a:off x="365760" y="4096512"/>
-            <a:ext cx="1371600" cy="658368"/>
+            <a:ext cx="1371600" cy="804672"/>
           </a:xfrm>
           <a:prstGeom prst="rect">
             <a:avLst/>
@@ -34894,11 +34867,11 @@
         <p:spPr>
           <a:xfrm>
             <a:off x="1874520" y="4096512"/>
-            <a:ext cx="6903720" cy="658368"/>
+            <a:ext cx="6903720" cy="804672"/>
           </a:xfrm>
           <a:prstGeom prst="rect">
             <a:avLst>
-              <a:gd name="adj" fmla="val 8333"/>
+              <a:gd name="adj" fmla="val 6818"/>
             </a:avLst>
           </a:prstGeom>
           <a:solidFill>
@@ -34921,7 +34894,7 @@
         <p:spPr>
           <a:xfrm>
             <a:off x="1874520" y="4096512"/>
-            <a:ext cx="6903720" cy="658368"/>
+            <a:ext cx="6903720" cy="804672"/>
           </a:xfrm>
           <a:prstGeom prst="rect">
             <a:avLst/>
@@ -35237,7 +35210,7 @@
                 <a:ea typeface="Calibri" pitchFamily="34" charset="-122"/>
                 <a:cs typeface="Calibri" pitchFamily="34" charset="-120"/>
               </a:rPr>
-              <a:t>Word Labs  •  wordlabs.app  •  Suffix: '-tion' = act, state, or result</a:t>
+              <a:t>Word Labs  •  wordlabs.app  •  Suffix: '-tion' = act, process, or state</a:t>
             </a:r>
             <a:endParaRPr lang="en-US" sz="800" dirty="0"/>
           </a:p>
@@ -35515,7 +35488,7 @@
                 <a:ea typeface="Trebuchet MS" pitchFamily="34" charset="-122"/>
                 <a:cs typeface="Trebuchet MS" pitchFamily="34" charset="-120"/>
               </a:rPr>
-              <a:t>solv</a:t>
+              <a:t>solut</a:t>
             </a:r>
             <a:endParaRPr lang="en-US" sz="1300" dirty="0"/>
           </a:p>
@@ -35554,7 +35527,7 @@
                 <a:ea typeface="Calibri" pitchFamily="34" charset="-122"/>
                 <a:cs typeface="Calibri" pitchFamily="34" charset="-120"/>
               </a:rPr>
-              <a:t>loosen or answer</a:t>
+              <a:t>loosen / free</a:t>
             </a:r>
             <a:endParaRPr lang="en-US" sz="850" dirty="0"/>
           </a:p>
@@ -35562,46 +35535,7 @@
       </p:sp>
       <p:sp>
         <p:nvSpPr>
-          <p:cNvPr id="19" name="Text 17"/>
-          <p:cNvSpPr/>
-          <p:nvPr/>
-        </p:nvSpPr>
-        <p:spPr>
-          <a:xfrm>
-            <a:off x="2938272" y="2752344"/>
-            <a:ext cx="1828800" cy="182880"/>
-          </a:xfrm>
-          <a:prstGeom prst="rect">
-            <a:avLst/>
-          </a:prstGeom>
-          <a:noFill/>
-          <a:ln/>
-        </p:spPr>
-        <p:txBody>
-          <a:bodyPr wrap="square" lIns="0" tIns="0" rIns="0" bIns="0" rtlCol="0" anchor="t"/>
-          <a:lstStyle/>
-          <a:p>
-            <a:pPr algn="ctr" indent="0" marL="0">
-              <a:buNone/>
-            </a:pPr>
-            <a:r>
-              <a:rPr lang="en-US" sz="700" i="1" dirty="0">
-                <a:solidFill>
-                  <a:srgbClr val="94A3B8"/>
-                </a:solidFill>
-                <a:latin typeface="Calibri" pitchFamily="34" charset="0"/>
-                <a:ea typeface="Calibri" pitchFamily="34" charset="-122"/>
-                <a:cs typeface="Calibri" pitchFamily="34" charset="-120"/>
-              </a:rPr>
-              <a:t>'v' dropped before '-tion'</a:t>
-            </a:r>
-            <a:endParaRPr lang="en-US" sz="700" dirty="0"/>
-          </a:p>
-        </p:txBody>
-      </p:sp>
-      <p:sp>
-        <p:nvSpPr>
-          <p:cNvPr id="20" name="Shape 18"/>
+          <p:cNvPr id="19" name="Shape 17"/>
           <p:cNvSpPr/>
           <p:nvPr/>
         </p:nvSpPr>
@@ -35616,11 +35550,11 @@
             </a:avLst>
           </a:prstGeom>
           <a:solidFill>
-            <a:srgbClr val="CCFBF1"/>
+            <a:srgbClr val="FCE7F3"/>
           </a:solidFill>
           <a:ln w="19050">
             <a:solidFill>
-              <a:srgbClr val="0D9488"/>
+              <a:srgbClr val="DB2777"/>
             </a:solidFill>
             <a:prstDash val="solid"/>
           </a:ln>
@@ -35635,7 +35569,7 @@
       </p:sp>
       <p:sp>
         <p:nvSpPr>
-          <p:cNvPr id="21" name="Text 19"/>
+          <p:cNvPr id="20" name="Text 18"/>
           <p:cNvSpPr/>
           <p:nvPr/>
         </p:nvSpPr>
@@ -35660,13 +35594,13 @@
             <a:r>
               <a:rPr lang="en-US" sz="1300" b="1" dirty="0">
                 <a:solidFill>
-                  <a:srgbClr val="0F766E"/>
+                  <a:srgbClr val="9D174D"/>
                 </a:solidFill>
                 <a:latin typeface="Trebuchet MS" pitchFamily="34" charset="0"/>
                 <a:ea typeface="Trebuchet MS" pitchFamily="34" charset="-122"/>
                 <a:cs typeface="Trebuchet MS" pitchFamily="34" charset="-120"/>
               </a:rPr>
-              <a:t>tion</a:t>
+              <a:t>ion</a:t>
             </a:r>
             <a:endParaRPr lang="en-US" sz="1300" dirty="0"/>
           </a:p>
@@ -35674,7 +35608,7 @@
       </p:sp>
       <p:sp>
         <p:nvSpPr>
-          <p:cNvPr id="22" name="Text 20"/>
+          <p:cNvPr id="21" name="Text 19"/>
           <p:cNvSpPr/>
           <p:nvPr/>
         </p:nvSpPr>
@@ -35705,9 +35639,48 @@
                 <a:ea typeface="Calibri" pitchFamily="34" charset="-122"/>
                 <a:cs typeface="Calibri" pitchFamily="34" charset="-120"/>
               </a:rPr>
-              <a:t>act or state of</a:t>
+              <a:t>act or process</a:t>
             </a:r>
             <a:endParaRPr lang="en-US" sz="850" dirty="0"/>
+          </a:p>
+        </p:txBody>
+      </p:sp>
+      <p:sp>
+        <p:nvSpPr>
+          <p:cNvPr id="22" name="Text 20"/>
+          <p:cNvSpPr/>
+          <p:nvPr/>
+        </p:nvSpPr>
+        <p:spPr>
+          <a:xfrm>
+            <a:off x="5803392" y="2752344"/>
+            <a:ext cx="1828800" cy="182880"/>
+          </a:xfrm>
+          <a:prstGeom prst="rect">
+            <a:avLst/>
+          </a:prstGeom>
+          <a:noFill/>
+          <a:ln/>
+        </p:spPr>
+        <p:txBody>
+          <a:bodyPr wrap="square" lIns="0" tIns="0" rIns="0" bIns="0" rtlCol="0" anchor="t"/>
+          <a:lstStyle/>
+          <a:p>
+            <a:pPr algn="ctr" indent="0" marL="0">
+              <a:buNone/>
+            </a:pPr>
+            <a:r>
+              <a:rPr lang="en-US" sz="700" i="1" dirty="0">
+                <a:solidFill>
+                  <a:srgbClr val="94A3B8"/>
+                </a:solidFill>
+                <a:latin typeface="Calibri" pitchFamily="34" charset="0"/>
+                <a:ea typeface="Calibri" pitchFamily="34" charset="-122"/>
+                <a:cs typeface="Calibri" pitchFamily="34" charset="-120"/>
+              </a:rPr>
+              <a:t>'-ion' variant of '-tion' after certain bases</a:t>
+            </a:r>
+            <a:endParaRPr lang="en-US" sz="700" dirty="0"/>
           </a:p>
         </p:txBody>
       </p:sp>
@@ -36089,11 +36062,11 @@
         <p:spPr>
           <a:xfrm>
             <a:off x="365760" y="4096512"/>
-            <a:ext cx="1371600" cy="658368"/>
+            <a:ext cx="1371600" cy="804672"/>
           </a:xfrm>
           <a:prstGeom prst="rect">
             <a:avLst>
-              <a:gd name="adj" fmla="val 8333"/>
+              <a:gd name="adj" fmla="val 6818"/>
             </a:avLst>
           </a:prstGeom>
           <a:solidFill>
@@ -36116,7 +36089,7 @@
         <p:spPr>
           <a:xfrm>
             <a:off x="365760" y="4096512"/>
-            <a:ext cx="1371600" cy="658368"/>
+            <a:ext cx="1371600" cy="804672"/>
           </a:xfrm>
           <a:prstGeom prst="rect">
             <a:avLst/>
@@ -36155,11 +36128,11 @@
         <p:spPr>
           <a:xfrm>
             <a:off x="1874520" y="4096512"/>
-            <a:ext cx="6903720" cy="658368"/>
+            <a:ext cx="6903720" cy="804672"/>
           </a:xfrm>
           <a:prstGeom prst="rect">
             <a:avLst>
-              <a:gd name="adj" fmla="val 8333"/>
+              <a:gd name="adj" fmla="val 6818"/>
             </a:avLst>
           </a:prstGeom>
           <a:solidFill>
@@ -36181,12 +36154,12 @@
         </p:nvSpPr>
         <p:spPr>
           <a:xfrm>
-            <a:off x="2124837" y="4187952"/>
-            <a:ext cx="685800" cy="475488"/>
+            <a:off x="2124837" y="4169664"/>
+            <a:ext cx="685800" cy="384048"/>
           </a:xfrm>
           <a:prstGeom prst="rect">
             <a:avLst>
-              <a:gd name="adj" fmla="val 7692"/>
+              <a:gd name="adj" fmla="val 9524"/>
             </a:avLst>
           </a:prstGeom>
           <a:solidFill>
@@ -36208,8 +36181,8 @@
         </p:nvSpPr>
         <p:spPr>
           <a:xfrm>
-            <a:off x="2124837" y="4187952"/>
-            <a:ext cx="685800" cy="475488"/>
+            <a:off x="2124837" y="4169664"/>
+            <a:ext cx="685800" cy="384048"/>
           </a:xfrm>
           <a:prstGeom prst="rect">
             <a:avLst/>
@@ -36247,12 +36220,12 @@
         </p:nvSpPr>
         <p:spPr>
           <a:xfrm>
-            <a:off x="3033522" y="4187952"/>
-            <a:ext cx="685800" cy="475488"/>
+            <a:off x="3033522" y="4169664"/>
+            <a:ext cx="685800" cy="384048"/>
           </a:xfrm>
           <a:prstGeom prst="rect">
             <a:avLst>
-              <a:gd name="adj" fmla="val 7692"/>
+              <a:gd name="adj" fmla="val 9524"/>
             </a:avLst>
           </a:prstGeom>
           <a:solidFill>
@@ -36274,8 +36247,8 @@
         </p:nvSpPr>
         <p:spPr>
           <a:xfrm>
-            <a:off x="3033522" y="4187952"/>
-            <a:ext cx="685800" cy="475488"/>
+            <a:off x="3033522" y="4169664"/>
+            <a:ext cx="685800" cy="384048"/>
           </a:xfrm>
           <a:prstGeom prst="rect">
             <a:avLst/>
@@ -36313,12 +36286,12 @@
         </p:nvSpPr>
         <p:spPr>
           <a:xfrm>
-            <a:off x="3942207" y="4187952"/>
-            <a:ext cx="685800" cy="475488"/>
+            <a:off x="3942207" y="4169664"/>
+            <a:ext cx="685800" cy="384048"/>
           </a:xfrm>
           <a:prstGeom prst="rect">
             <a:avLst>
-              <a:gd name="adj" fmla="val 7692"/>
+              <a:gd name="adj" fmla="val 9524"/>
             </a:avLst>
           </a:prstGeom>
           <a:solidFill>
@@ -36340,8 +36313,8 @@
         </p:nvSpPr>
         <p:spPr>
           <a:xfrm>
-            <a:off x="3942207" y="4187952"/>
-            <a:ext cx="685800" cy="475488"/>
+            <a:off x="3942207" y="4169664"/>
+            <a:ext cx="685800" cy="384048"/>
           </a:xfrm>
           <a:prstGeom prst="rect">
             <a:avLst/>
@@ -36379,12 +36352,12 @@
         </p:nvSpPr>
         <p:spPr>
           <a:xfrm>
-            <a:off x="4850892" y="4187952"/>
-            <a:ext cx="685800" cy="475488"/>
+            <a:off x="4850892" y="4169664"/>
+            <a:ext cx="685800" cy="384048"/>
           </a:xfrm>
           <a:prstGeom prst="rect">
             <a:avLst>
-              <a:gd name="adj" fmla="val 7692"/>
+              <a:gd name="adj" fmla="val 9524"/>
             </a:avLst>
           </a:prstGeom>
           <a:solidFill>
@@ -36406,8 +36379,8 @@
         </p:nvSpPr>
         <p:spPr>
           <a:xfrm>
-            <a:off x="4850892" y="4187952"/>
-            <a:ext cx="685800" cy="475488"/>
+            <a:off x="4850892" y="4169664"/>
+            <a:ext cx="685800" cy="384048"/>
           </a:xfrm>
           <a:prstGeom prst="rect">
             <a:avLst/>
@@ -36445,12 +36418,12 @@
         </p:nvSpPr>
         <p:spPr>
           <a:xfrm>
-            <a:off x="5759577" y="4187952"/>
-            <a:ext cx="685800" cy="475488"/>
+            <a:off x="5759577" y="4169664"/>
+            <a:ext cx="685800" cy="384048"/>
           </a:xfrm>
           <a:prstGeom prst="rect">
             <a:avLst>
-              <a:gd name="adj" fmla="val 7692"/>
+              <a:gd name="adj" fmla="val 9524"/>
             </a:avLst>
           </a:prstGeom>
           <a:solidFill>
@@ -36472,8 +36445,8 @@
         </p:nvSpPr>
         <p:spPr>
           <a:xfrm>
-            <a:off x="5759577" y="4187952"/>
-            <a:ext cx="685800" cy="475488"/>
+            <a:off x="5759577" y="4169664"/>
+            <a:ext cx="685800" cy="384048"/>
           </a:xfrm>
           <a:prstGeom prst="rect">
             <a:avLst/>
@@ -36505,18 +36478,57 @@
       </p:sp>
       <p:sp>
         <p:nvSpPr>
-          <p:cNvPr id="47" name="Shape 45"/>
-          <p:cNvSpPr/>
-          <p:nvPr/>
-        </p:nvSpPr>
-        <p:spPr>
-          <a:xfrm>
-            <a:off x="6668262" y="4187952"/>
-            <a:ext cx="685800" cy="475488"/>
+          <p:cNvPr id="47" name="Text 45"/>
+          <p:cNvSpPr/>
+          <p:nvPr/>
+        </p:nvSpPr>
+        <p:spPr>
+          <a:xfrm>
+            <a:off x="5759577" y="4572000"/>
+            <a:ext cx="685800" cy="219456"/>
+          </a:xfrm>
+          <a:prstGeom prst="rect">
+            <a:avLst/>
+          </a:prstGeom>
+          <a:noFill/>
+          <a:ln/>
+        </p:spPr>
+        <p:txBody>
+          <a:bodyPr wrap="square" lIns="0" tIns="0" rIns="0" bIns="0" rtlCol="0" anchor="t"/>
+          <a:lstStyle/>
+          <a:p>
+            <a:pPr algn="ctr" indent="0" marL="0">
+              <a:buNone/>
+            </a:pPr>
+            <a:r>
+              <a:rPr lang="en-US" sz="750" i="1" dirty="0">
+                <a:solidFill>
+                  <a:srgbClr val="94A3B8"/>
+                </a:solidFill>
+                <a:latin typeface="Calibri" pitchFamily="34" charset="0"/>
+                <a:ea typeface="Calibri" pitchFamily="34" charset="-122"/>
+                <a:cs typeface="Calibri" pitchFamily="34" charset="-120"/>
+              </a:rPr>
+              <a:t>/sh/</a:t>
+            </a:r>
+            <a:endParaRPr lang="en-US" sz="750" dirty="0"/>
+          </a:p>
+        </p:txBody>
+      </p:sp>
+      <p:sp>
+        <p:nvSpPr>
+          <p:cNvPr id="48" name="Shape 46"/>
+          <p:cNvSpPr/>
+          <p:nvPr/>
+        </p:nvSpPr>
+        <p:spPr>
+          <a:xfrm>
+            <a:off x="6668262" y="4169664"/>
+            <a:ext cx="685800" cy="384048"/>
           </a:xfrm>
           <a:prstGeom prst="rect">
             <a:avLst>
-              <a:gd name="adj" fmla="val 7692"/>
+              <a:gd name="adj" fmla="val 9524"/>
             </a:avLst>
           </a:prstGeom>
           <a:solidFill>
@@ -36532,14 +36544,14 @@
       </p:sp>
       <p:sp>
         <p:nvSpPr>
-          <p:cNvPr id="48" name="Text 46"/>
-          <p:cNvSpPr/>
-          <p:nvPr/>
-        </p:nvSpPr>
-        <p:spPr>
-          <a:xfrm>
-            <a:off x="6668262" y="4187952"/>
-            <a:ext cx="685800" cy="475488"/>
+          <p:cNvPr id="49" name="Text 47"/>
+          <p:cNvSpPr/>
+          <p:nvPr/>
+        </p:nvSpPr>
+        <p:spPr>
+          <a:xfrm>
+            <a:off x="6668262" y="4169664"/>
+            <a:ext cx="685800" cy="384048"/>
           </a:xfrm>
           <a:prstGeom prst="rect">
             <a:avLst/>
@@ -36571,18 +36583,18 @@
       </p:sp>
       <p:sp>
         <p:nvSpPr>
-          <p:cNvPr id="49" name="Shape 47"/>
-          <p:cNvSpPr/>
-          <p:nvPr/>
-        </p:nvSpPr>
-        <p:spPr>
-          <a:xfrm>
-            <a:off x="7576947" y="4187952"/>
-            <a:ext cx="685800" cy="475488"/>
+          <p:cNvPr id="50" name="Shape 48"/>
+          <p:cNvSpPr/>
+          <p:nvPr/>
+        </p:nvSpPr>
+        <p:spPr>
+          <a:xfrm>
+            <a:off x="7576947" y="4169664"/>
+            <a:ext cx="685800" cy="384048"/>
           </a:xfrm>
           <a:prstGeom prst="rect">
             <a:avLst>
-              <a:gd name="adj" fmla="val 7692"/>
+              <a:gd name="adj" fmla="val 9524"/>
             </a:avLst>
           </a:prstGeom>
           <a:solidFill>
@@ -36598,14 +36610,14 @@
       </p:sp>
       <p:sp>
         <p:nvSpPr>
-          <p:cNvPr id="50" name="Text 48"/>
-          <p:cNvSpPr/>
-          <p:nvPr/>
-        </p:nvSpPr>
-        <p:spPr>
-          <a:xfrm>
-            <a:off x="7576947" y="4187952"/>
-            <a:ext cx="685800" cy="475488"/>
+          <p:cNvPr id="51" name="Text 49"/>
+          <p:cNvSpPr/>
+          <p:nvPr/>
+        </p:nvSpPr>
+        <p:spPr>
+          <a:xfrm>
+            <a:off x="7576947" y="4169664"/>
+            <a:ext cx="685800" cy="384048"/>
           </a:xfrm>
           <a:prstGeom prst="rect">
             <a:avLst/>
@@ -36921,7 +36933,7 @@
                 <a:ea typeface="Calibri" pitchFamily="34" charset="-122"/>
                 <a:cs typeface="Calibri" pitchFamily="34" charset="-120"/>
               </a:rPr>
-              <a:t>Word Labs  •  wordlabs.app  •  Suffix: '-tion' = act, state, or result</a:t>
+              <a:t>Word Labs  •  wordlabs.app  •  Suffix: '-tion' = act, process, or state</a:t>
             </a:r>
             <a:endParaRPr lang="en-US" sz="800" dirty="0"/>
           </a:p>
@@ -38090,7 +38102,7 @@
                 <a:ea typeface="Calibri" pitchFamily="34" charset="-122"/>
                 <a:cs typeface="Calibri" pitchFamily="34" charset="-120"/>
               </a:rPr>
-              <a:t>Word Labs  •  wordlabs.app  •  Suffix: '-tion' = act, state, or result</a:t>
+              <a:t>Word Labs  •  wordlabs.app  •  Suffix: '-tion' = act, process, or state</a:t>
             </a:r>
             <a:endParaRPr lang="en-US" sz="800" dirty="0"/>
           </a:p>
@@ -38953,7 +38965,7 @@
                 <a:ea typeface="Trebuchet MS" pitchFamily="34" charset="-122"/>
                 <a:cs typeface="Trebuchet MS" pitchFamily="34" charset="-120"/>
               </a:rPr>
-              <a:t>invent</a:t>
+              <a:t>protect</a:t>
             </a:r>
             <a:endParaRPr lang="en-US" sz="1300" dirty="0"/>
           </a:p>
@@ -39106,7 +39118,7 @@
                 <a:ea typeface="Trebuchet MS" pitchFamily="34" charset="-122"/>
                 <a:cs typeface="Trebuchet MS" pitchFamily="34" charset="-120"/>
               </a:rPr>
-              <a:t>protect</a:t>
+              <a:t>invent</a:t>
             </a:r>
             <a:endParaRPr lang="en-US" sz="1300" dirty="0"/>
           </a:p>
@@ -39368,7 +39380,7 @@
                 <a:ea typeface="Trebuchet MS" pitchFamily="34" charset="-122"/>
                 <a:cs typeface="Trebuchet MS" pitchFamily="34" charset="-120"/>
               </a:rPr>
-              <a:t>collection</a:t>
+              <a:t>direction</a:t>
             </a:r>
             <a:endParaRPr lang="en-US" sz="1200" dirty="0"/>
           </a:p>
@@ -39434,7 +39446,7 @@
                 <a:ea typeface="Trebuchet MS" pitchFamily="34" charset="-122"/>
                 <a:cs typeface="Trebuchet MS" pitchFamily="34" charset="-120"/>
               </a:rPr>
-              <a:t>direction</a:t>
+              <a:t>collection</a:t>
             </a:r>
             <a:endParaRPr lang="en-US" sz="1200" dirty="0"/>
           </a:p>
@@ -39632,7 +39644,7 @@
                 <a:ea typeface="Trebuchet MS" pitchFamily="34" charset="-122"/>
                 <a:cs typeface="Trebuchet MS" pitchFamily="34" charset="-120"/>
               </a:rPr>
-              <a:t>attraction</a:t>
+              <a:t>attention</a:t>
             </a:r>
             <a:endParaRPr lang="en-US" sz="1200" dirty="0"/>
           </a:p>
@@ -39990,7 +40002,7 @@
                 <a:ea typeface="Calibri" pitchFamily="34" charset="-122"/>
                 <a:cs typeface="Calibri" pitchFamily="34" charset="-120"/>
               </a:rPr>
-              <a:t>Word Labs  •  wordlabs.app  •  Suffix: '-tion' = act, state, or result</a:t>
+              <a:t>Word Labs  •  wordlabs.app  •  Suffix: '-tion' = act, process, or state</a:t>
             </a:r>
             <a:endParaRPr lang="en-US" sz="800" dirty="0"/>
           </a:p>
@@ -40154,7 +40166,7 @@
                 <a:ea typeface="Calibri" pitchFamily="34" charset="-122"/>
                 <a:cs typeface="Calibri" pitchFamily="34" charset="-120"/>
               </a:rPr>
-              <a:t>A meaningful word part added to the end of a word to change its meaning or form. The suffix '-tion' means 'act, state, or result'.</a:t>
+              <a:t>A meaningful word part added to the end of a word to change its meaning or form. The suffix '-tion' means 'act, process, or state'.</a:t>
             </a:r>
             <a:endParaRPr lang="en-US" sz="1350" dirty="0"/>
           </a:p>
@@ -40774,7 +40786,7 @@
                 <a:ea typeface="Calibri" pitchFamily="34" charset="-122"/>
                 <a:cs typeface="Calibri" pitchFamily="34" charset="-120"/>
               </a:rPr>
-              <a:t>Word Labs  •  wordlabs.app  •  Suffix: '-tion' = act, state, or result</a:t>
+              <a:t>Word Labs  •  wordlabs.app  •  Suffix: '-tion' = act, process, or state</a:t>
             </a:r>
             <a:endParaRPr lang="en-US" sz="800" dirty="0"/>
           </a:p>
@@ -41164,7 +41176,7 @@
                 <a:ea typeface="Calibri" pitchFamily="34" charset="-122"/>
                 <a:cs typeface="Calibri" pitchFamily="34" charset="-120"/>
               </a:rPr>
-              <a:t>3.  The word 'invention' contains the suffix '-tion'.</a:t>
+              <a:t>3.  The word 'collection' contains the suffix '-tion'.</a:t>
             </a:r>
             <a:endParaRPr lang="en-US" sz="1300" dirty="0"/>
           </a:p>
@@ -41303,7 +41315,7 @@
                 <a:ea typeface="Calibri" pitchFamily="34" charset="-122"/>
                 <a:cs typeface="Calibri" pitchFamily="34" charset="-120"/>
               </a:rPr>
-              <a:t>4.  Words ending in '-tion' name an act, state, or result of something.</a:t>
+              <a:t>4.  Words ending in '-tion' are always nouns.</a:t>
             </a:r>
             <a:endParaRPr lang="en-US" sz="1300" dirty="0"/>
           </a:p>
@@ -41442,7 +41454,7 @@
                 <a:ea typeface="Calibri" pitchFamily="34" charset="-122"/>
                 <a:cs typeface="Calibri" pitchFamily="34" charset="-120"/>
               </a:rPr>
-              <a:t>5.  The suffix '-tion' comes from Old English.</a:t>
+              <a:t>5.  The suffix '-tion' comes from an Old English origin.</a:t>
             </a:r>
             <a:endParaRPr lang="en-US" sz="1300" dirty="0"/>
           </a:p>
@@ -41800,7 +41812,7 @@
                 <a:ea typeface="Calibri" pitchFamily="34" charset="-122"/>
                 <a:cs typeface="Calibri" pitchFamily="34" charset="-120"/>
               </a:rPr>
-              <a:t>Word Labs  •  wordlabs.app  •  Suffix: '-tion' = act, state, or result</a:t>
+              <a:t>Word Labs  •  wordlabs.app  •  Suffix: '-tion' = act, process, or state</a:t>
             </a:r>
             <a:endParaRPr lang="en-US" sz="800" dirty="0"/>
           </a:p>
@@ -41937,7 +41949,7 @@
                 <a:ea typeface="Trebuchet MS" pitchFamily="34" charset="-122"/>
                 <a:cs typeface="Trebuchet MS" pitchFamily="34" charset="-120"/>
               </a:rPr>
-              <a:t>act, state, or result</a:t>
+              <a:t>act, process, or state</a:t>
             </a:r>
             <a:endParaRPr lang="en-US" sz="2000" dirty="0"/>
           </a:p>
@@ -42213,7 +42225,7 @@
                 <a:ea typeface="Trebuchet MS" pitchFamily="34" charset="-122"/>
                 <a:cs typeface="Trebuchet MS" pitchFamily="34" charset="-120"/>
               </a:rPr>
-              <a:t>collection</a:t>
+              <a:t>direction</a:t>
             </a:r>
             <a:endParaRPr lang="en-US" sz="1300" dirty="0"/>
           </a:p>
@@ -42279,7 +42291,7 @@
                 <a:ea typeface="Trebuchet MS" pitchFamily="34" charset="-122"/>
                 <a:cs typeface="Trebuchet MS" pitchFamily="34" charset="-120"/>
               </a:rPr>
-              <a:t>direction</a:t>
+              <a:t>collection</a:t>
             </a:r>
             <a:endParaRPr lang="en-US" sz="1300" dirty="0"/>
           </a:p>
@@ -42477,7 +42489,7 @@
                 <a:ea typeface="Trebuchet MS" pitchFamily="34" charset="-122"/>
                 <a:cs typeface="Trebuchet MS" pitchFamily="34" charset="-120"/>
               </a:rPr>
-              <a:t>attraction</a:t>
+              <a:t>attention</a:t>
             </a:r>
             <a:endParaRPr lang="en-US" sz="1300" dirty="0"/>
           </a:p>
@@ -42769,7 +42781,7 @@
                 <a:ea typeface="Calibri" pitchFamily="34" charset="-122"/>
                 <a:cs typeface="Calibri" pitchFamily="34" charset="-120"/>
               </a:rPr>
-              <a:t>Word Labs  •  wordlabs.app  •  Suffix: '-tion' = act, state, or result</a:t>
+              <a:t>Word Labs  •  wordlabs.app  •  Suffix: '-tion' = act, process, or state</a:t>
             </a:r>
             <a:endParaRPr lang="en-US" sz="800" dirty="0"/>
           </a:p>
@@ -43632,7 +43644,7 @@
                 <a:ea typeface="Trebuchet MS" pitchFamily="34" charset="-122"/>
                 <a:cs typeface="Trebuchet MS" pitchFamily="34" charset="-120"/>
               </a:rPr>
-              <a:t>invent</a:t>
+              <a:t>protect</a:t>
             </a:r>
             <a:endParaRPr lang="en-US" sz="1300" dirty="0"/>
           </a:p>
@@ -43785,7 +43797,7 @@
                 <a:ea typeface="Trebuchet MS" pitchFamily="34" charset="-122"/>
                 <a:cs typeface="Trebuchet MS" pitchFamily="34" charset="-120"/>
               </a:rPr>
-              <a:t>protect</a:t>
+              <a:t>invent</a:t>
             </a:r>
             <a:endParaRPr lang="en-US" sz="1300" dirty="0"/>
           </a:p>
@@ -44543,7 +44555,7 @@
                 <a:ea typeface="Calibri" pitchFamily="34" charset="-122"/>
                 <a:cs typeface="Calibri" pitchFamily="34" charset="-120"/>
               </a:rPr>
-              <a:t>Word Labs  •  wordlabs.app  •  Suffix: '-tion' = act, state, or result</a:t>
+              <a:t>Word Labs  •  wordlabs.app  •  Suffix: '-tion' = act, process, or state</a:t>
             </a:r>
             <a:endParaRPr lang="en-US" sz="800" dirty="0"/>
           </a:p>
@@ -44721,7 +44733,7 @@
                 <a:ea typeface="Calibri" pitchFamily="34" charset="-122"/>
                 <a:cs typeface="Calibri" pitchFamily="34" charset="-120"/>
               </a:rPr>
-              <a:t>The process of doing something or making something happen.</a:t>
+              <a:t>The process of doing something.</a:t>
             </a:r>
             <a:endParaRPr lang="en-US" sz="1200" dirty="0"/>
           </a:p>
@@ -44860,7 +44872,7 @@
                 <a:ea typeface="Calibri" pitchFamily="34" charset="-122"/>
                 <a:cs typeface="Calibri" pitchFamily="34" charset="-120"/>
               </a:rPr>
-              <a:t>A group of things gathered together, like stamps or books.</a:t>
+              <a:t>The path or way you need to go to get somewhere.</a:t>
             </a:r>
             <a:endParaRPr lang="en-US" sz="1200" dirty="0"/>
           </a:p>
@@ -44933,7 +44945,7 @@
                 <a:ea typeface="Trebuchet MS" pitchFamily="34" charset="-122"/>
                 <a:cs typeface="Trebuchet MS" pitchFamily="34" charset="-120"/>
               </a:rPr>
-              <a:t>collection</a:t>
+              <a:t>direction</a:t>
             </a:r>
             <a:endParaRPr lang="en-US" sz="1200" dirty="0"/>
           </a:p>
@@ -45072,7 +45084,7 @@
                 <a:ea typeface="Trebuchet MS" pitchFamily="34" charset="-122"/>
                 <a:cs typeface="Trebuchet MS" pitchFamily="34" charset="-120"/>
               </a:rPr>
-              <a:t>direction</a:t>
+              <a:t>collection</a:t>
             </a:r>
             <a:endParaRPr lang="en-US" sz="1200" dirty="0"/>
           </a:p>
@@ -45138,7 +45150,7 @@
                 <a:ea typeface="Calibri" pitchFamily="34" charset="-122"/>
                 <a:cs typeface="Calibri" pitchFamily="34" charset="-120"/>
               </a:rPr>
-              <a:t>The way you need to go or a guide telling you how to do something.</a:t>
+              <a:t>A group of things gathered together in one place.</a:t>
             </a:r>
             <a:endParaRPr lang="en-US" sz="1200" dirty="0"/>
           </a:p>
@@ -45277,7 +45289,7 @@
                 <a:ea typeface="Calibri" pitchFamily="34" charset="-122"/>
                 <a:cs typeface="Calibri" pitchFamily="34" charset="-120"/>
               </a:rPr>
-              <a:t>Keeping something or someone safe from harm or danger.</a:t>
+              <a:t>Keeping someone or something safe from harm.</a:t>
             </a:r>
             <a:endParaRPr lang="en-US" sz="1200" dirty="0"/>
           </a:p>
@@ -45416,7 +45428,7 @@
                 <a:ea typeface="Calibri" pitchFamily="34" charset="-122"/>
                 <a:cs typeface="Calibri" pitchFamily="34" charset="-120"/>
               </a:rPr>
-              <a:t>Something that draws people in or makes them interested.</a:t>
+              <a:t>Focusing your mind carefully on something.</a:t>
             </a:r>
             <a:endParaRPr lang="en-US" sz="1200" dirty="0"/>
           </a:p>
@@ -45489,7 +45501,7 @@
                 <a:ea typeface="Trebuchet MS" pitchFamily="34" charset="-122"/>
                 <a:cs typeface="Trebuchet MS" pitchFamily="34" charset="-120"/>
               </a:rPr>
-              <a:t>attraction</a:t>
+              <a:t>attention</a:t>
             </a:r>
             <a:endParaRPr lang="en-US" sz="1200" dirty="0"/>
           </a:p>
@@ -45555,7 +45567,7 @@
                 <a:ea typeface="Calibri" pitchFamily="34" charset="-122"/>
                 <a:cs typeface="Calibri" pitchFamily="34" charset="-120"/>
               </a:rPr>
-              <a:t>Something new that someone has made or thought up for the first time.</a:t>
+              <a:t>Something new that someone has created or made up.</a:t>
             </a:r>
             <a:endParaRPr lang="en-US" sz="1200" dirty="0"/>
           </a:p>
@@ -45847,7 +45859,7 @@
                 <a:ea typeface="Calibri" pitchFamily="34" charset="-122"/>
                 <a:cs typeface="Calibri" pitchFamily="34" charset="-120"/>
               </a:rPr>
-              <a:t>Word Labs  •  wordlabs.app  •  Suffix: '-tion' = act, state, or result</a:t>
+              <a:t>Word Labs  •  wordlabs.app  •  Suffix: '-tion' = act, process, or state</a:t>
             </a:r>
             <a:endParaRPr lang="en-US" sz="800" dirty="0"/>
           </a:p>
@@ -46050,7 +46062,7 @@
                 <a:ea typeface="Calibri" pitchFamily="34" charset="-122"/>
                 <a:cs typeface="Calibri" pitchFamily="34" charset="-120"/>
               </a:rPr>
-              <a:t>The construction of the new library took two years to complete.</a:t>
+              <a:t>The construction of the new school hall took several months to finish.</a:t>
             </a:r>
             <a:endParaRPr lang="en-US" sz="1500" dirty="0"/>
           </a:p>
@@ -46214,7 +46226,7 @@
                 <a:ea typeface="Calibri" pitchFamily="34" charset="-122"/>
                 <a:cs typeface="Calibri" pitchFamily="34" charset="-120"/>
               </a:rPr>
-              <a:t>Our teacher asked us to pay attention during the science demonstration.</a:t>
+              <a:t>Remember to pay attention when the teacher explains the instructions.</a:t>
             </a:r>
             <a:endParaRPr lang="en-US" sz="1500" dirty="0"/>
           </a:p>
@@ -46378,7 +46390,7 @@
                 <a:ea typeface="Calibri" pitchFamily="34" charset="-122"/>
                 <a:cs typeface="Calibri" pitchFamily="34" charset="-120"/>
               </a:rPr>
-              <a:t>The invention of the telephone changed the way people communicate.</a:t>
+              <a:t>Our class made a collection of books to donate to the local library.</a:t>
             </a:r>
             <a:endParaRPr lang="en-US" sz="1500" dirty="0"/>
           </a:p>
